--- a/Day6/6-paev-andmetarkus-esitlus.pptx
+++ b/Day6/6-paev-andmetarkus-esitlus.pptx
@@ -5,45 +5,43 @@
     <p:sldMasterId id="2147483648" r:id="rId4"/>
   </p:sldMasterIdLst>
   <p:notesMasterIdLst>
-    <p:notesMasterId r:id="rId21"/>
+    <p:notesMasterId r:id="rId19"/>
   </p:notesMasterIdLst>
   <p:handoutMasterIdLst>
-    <p:handoutMasterId r:id="rId22"/>
+    <p:handoutMasterId r:id="rId20"/>
   </p:handoutMasterIdLst>
   <p:sldIdLst>
     <p:sldId id="417" r:id="rId5"/>
     <p:sldId id="489" r:id="rId6"/>
     <p:sldId id="470" r:id="rId7"/>
-    <p:sldId id="641" r:id="rId8"/>
-    <p:sldId id="642" r:id="rId9"/>
-    <p:sldId id="473" r:id="rId10"/>
+    <p:sldId id="643" r:id="rId8"/>
+    <p:sldId id="473" r:id="rId9"/>
+    <p:sldId id="471" r:id="rId10"/>
     <p:sldId id="554" r:id="rId11"/>
-    <p:sldId id="643" r:id="rId12"/>
-    <p:sldId id="471" r:id="rId13"/>
-    <p:sldId id="644" r:id="rId14"/>
-    <p:sldId id="556" r:id="rId15"/>
-    <p:sldId id="555" r:id="rId16"/>
+    <p:sldId id="641" r:id="rId12"/>
+    <p:sldId id="644" r:id="rId13"/>
+    <p:sldId id="555" r:id="rId14"/>
+    <p:sldId id="645" r:id="rId15"/>
+    <p:sldId id="558" r:id="rId16"/>
     <p:sldId id="472" r:id="rId17"/>
     <p:sldId id="557" r:id="rId18"/>
-    <p:sldId id="558" r:id="rId19"/>
-    <p:sldId id="490" r:id="rId20"/>
   </p:sldIdLst>
   <p:sldSz cx="12192000" cy="6858000"/>
   <p:notesSz cx="6858000" cy="9144000"/>
   <p:embeddedFontLst>
     <p:embeddedFont>
       <p:font typeface="Inter" panose="020B0604020202020204" charset="0"/>
-      <p:regular r:id="rId23"/>
-      <p:bold r:id="rId24"/>
+      <p:regular r:id="rId21"/>
+      <p:bold r:id="rId22"/>
     </p:embeddedFont>
     <p:embeddedFont>
       <p:font typeface="Inter Bold" panose="020B0604020202020204" charset="0"/>
-      <p:bold r:id="rId25"/>
+      <p:bold r:id="rId23"/>
     </p:embeddedFont>
     <p:embeddedFont>
       <p:font typeface="Poppins SemiBold" panose="00000700000000000000" pitchFamily="2" charset="0"/>
-      <p:bold r:id="rId26"/>
-      <p:boldItalic r:id="rId27"/>
+      <p:bold r:id="rId24"/>
+      <p:boldItalic r:id="rId25"/>
     </p:embeddedFont>
   </p:embeddedFontLst>
   <p:defaultTextStyle>
@@ -152,17 +150,85 @@
 </p:presentation>
 </file>
 
+<file path=ppt/revisionInfo.xml><?xml version="1.0" encoding="utf-8"?>
+<p1510:revInfo xmlns:a="http://schemas.openxmlformats.org/drawingml/2006/main" xmlns:r="http://schemas.openxmlformats.org/officeDocument/2006/relationships" xmlns:p1510="http://schemas.microsoft.com/office/powerpoint/2015/10/main">
+  <p1510:revLst>
+    <p1510:client id="{3A2F0262-37F4-47A8-B98C-004B30A9F6B3}" v="203" dt="2026-04-06T18:52:17.470"/>
+  </p1510:revLst>
+</p1510:revInfo>
+</file>
+
 <file path=ppt/changesInfos/changesInfo1.xml><?xml version="1.0" encoding="utf-8"?>
 <pc:chgInfo xmlns:a="http://schemas.openxmlformats.org/drawingml/2006/main" xmlns:r="http://schemas.openxmlformats.org/officeDocument/2006/relationships" xmlns:ac="http://schemas.microsoft.com/office/drawing/2013/main/command" xmlns:pc="http://schemas.microsoft.com/office/powerpoint/2013/main/command">
   <pc:docChgLst>
     <pc:chgData name="Virve Räni" userId="161a7437-7ef4-49ec-91bf-54882f313dfe" providerId="ADAL" clId="{6D754EED-65AA-4A21-B175-6769012CF487}"/>
-    <pc:docChg chg="modSld">
-      <pc:chgData name="Virve Räni" userId="161a7437-7ef4-49ec-91bf-54882f313dfe" providerId="ADAL" clId="{6D754EED-65AA-4A21-B175-6769012CF487}" dt="2026-03-16T10:56:34.568" v="10" actId="20577"/>
+    <pc:docChg chg="custSel addSld delSld modSld sldOrd">
+      <pc:chgData name="Virve Räni" userId="161a7437-7ef4-49ec-91bf-54882f313dfe" providerId="ADAL" clId="{6D754EED-65AA-4A21-B175-6769012CF487}" dt="2026-04-06T19:42:00.933" v="579" actId="20577"/>
       <pc:docMkLst>
         <pc:docMk/>
       </pc:docMkLst>
       <pc:sldChg chg="modSp mod">
-        <pc:chgData name="Virve Räni" userId="161a7437-7ef4-49ec-91bf-54882f313dfe" providerId="ADAL" clId="{6D754EED-65AA-4A21-B175-6769012CF487}" dt="2026-03-16T10:55:57.597" v="6" actId="20577"/>
+        <pc:chgData name="Virve Räni" userId="161a7437-7ef4-49ec-91bf-54882f313dfe" providerId="ADAL" clId="{6D754EED-65AA-4A21-B175-6769012CF487}" dt="2026-04-06T18:37:38.084" v="214" actId="20577"/>
+        <pc:sldMkLst>
+          <pc:docMk/>
+          <pc:sldMk cId="537446728" sldId="470"/>
+        </pc:sldMkLst>
+        <pc:spChg chg="mod">
+          <ac:chgData name="Virve Räni" userId="161a7437-7ef4-49ec-91bf-54882f313dfe" providerId="ADAL" clId="{6D754EED-65AA-4A21-B175-6769012CF487}" dt="2026-04-06T18:37:38.084" v="214" actId="20577"/>
+          <ac:spMkLst>
+            <pc:docMk/>
+            <pc:sldMk cId="537446728" sldId="470"/>
+            <ac:spMk id="5" creationId="{78C1C2EC-E034-3DAF-EC3F-59EA67456D88}"/>
+          </ac:spMkLst>
+        </pc:spChg>
+      </pc:sldChg>
+      <pc:sldChg chg="modSp ord modAnim">
+        <pc:chgData name="Virve Räni" userId="161a7437-7ef4-49ec-91bf-54882f313dfe" providerId="ADAL" clId="{6D754EED-65AA-4A21-B175-6769012CF487}" dt="2026-04-06T18:52:17.470" v="420" actId="20577"/>
+        <pc:sldMkLst>
+          <pc:docMk/>
+          <pc:sldMk cId="791438371" sldId="471"/>
+        </pc:sldMkLst>
+        <pc:spChg chg="mod">
+          <ac:chgData name="Virve Räni" userId="161a7437-7ef4-49ec-91bf-54882f313dfe" providerId="ADAL" clId="{6D754EED-65AA-4A21-B175-6769012CF487}" dt="2026-04-06T18:52:17.470" v="420" actId="20577"/>
+          <ac:spMkLst>
+            <pc:docMk/>
+            <pc:sldMk cId="791438371" sldId="471"/>
+            <ac:spMk id="5" creationId="{F6EFDB5F-311B-A003-161F-6FE2F574F60B}"/>
+          </ac:spMkLst>
+        </pc:spChg>
+      </pc:sldChg>
+      <pc:sldChg chg="ord">
+        <pc:chgData name="Virve Räni" userId="161a7437-7ef4-49ec-91bf-54882f313dfe" providerId="ADAL" clId="{6D754EED-65AA-4A21-B175-6769012CF487}" dt="2026-04-06T19:40:29.013" v="489"/>
+        <pc:sldMkLst>
+          <pc:docMk/>
+          <pc:sldMk cId="3435446401" sldId="472"/>
+        </pc:sldMkLst>
+      </pc:sldChg>
+      <pc:sldChg chg="modSp mod ord">
+        <pc:chgData name="Virve Räni" userId="161a7437-7ef4-49ec-91bf-54882f313dfe" providerId="ADAL" clId="{6D754EED-65AA-4A21-B175-6769012CF487}" dt="2026-04-06T18:42:12.266" v="244" actId="20577"/>
+        <pc:sldMkLst>
+          <pc:docMk/>
+          <pc:sldMk cId="493806120" sldId="473"/>
+        </pc:sldMkLst>
+        <pc:spChg chg="mod">
+          <ac:chgData name="Virve Räni" userId="161a7437-7ef4-49ec-91bf-54882f313dfe" providerId="ADAL" clId="{6D754EED-65AA-4A21-B175-6769012CF487}" dt="2026-04-06T18:20:22.169" v="72" actId="20577"/>
+          <ac:spMkLst>
+            <pc:docMk/>
+            <pc:sldMk cId="493806120" sldId="473"/>
+            <ac:spMk id="2" creationId="{04BB82FD-643F-6AFD-B782-B19E179EA81B}"/>
+          </ac:spMkLst>
+        </pc:spChg>
+        <pc:spChg chg="mod">
+          <ac:chgData name="Virve Räni" userId="161a7437-7ef4-49ec-91bf-54882f313dfe" providerId="ADAL" clId="{6D754EED-65AA-4A21-B175-6769012CF487}" dt="2026-04-06T18:42:12.266" v="244" actId="20577"/>
+          <ac:spMkLst>
+            <pc:docMk/>
+            <pc:sldMk cId="493806120" sldId="473"/>
+            <ac:spMk id="3" creationId="{7325113B-F938-FA92-45B7-A088D0CA4519}"/>
+          </ac:spMkLst>
+        </pc:spChg>
+      </pc:sldChg>
+      <pc:sldChg chg="modSp mod">
+        <pc:chgData name="Virve Räni" userId="161a7437-7ef4-49ec-91bf-54882f313dfe" providerId="ADAL" clId="{6D754EED-65AA-4A21-B175-6769012CF487}" dt="2026-04-06T19:42:00.933" v="579" actId="20577"/>
         <pc:sldMkLst>
           <pc:docMk/>
           <pc:sldMk cId="2246918780" sldId="489"/>
@@ -175,21 +241,64 @@
             <ac:spMk id="2" creationId="{46A291BE-55D8-719B-FCEB-18D326A15990}"/>
           </ac:spMkLst>
         </pc:spChg>
+        <pc:graphicFrameChg chg="modGraphic">
+          <ac:chgData name="Virve Räni" userId="161a7437-7ef4-49ec-91bf-54882f313dfe" providerId="ADAL" clId="{6D754EED-65AA-4A21-B175-6769012CF487}" dt="2026-04-06T19:42:00.933" v="579" actId="20577"/>
+          <ac:graphicFrameMkLst>
+            <pc:docMk/>
+            <pc:sldMk cId="2246918780" sldId="489"/>
+            <ac:graphicFrameMk id="5" creationId="{55805DDA-288D-DB3E-2A59-EC7449C89D98}"/>
+          </ac:graphicFrameMkLst>
+        </pc:graphicFrameChg>
       </pc:sldChg>
-      <pc:sldChg chg="modSp mod">
-        <pc:chgData name="Virve Räni" userId="161a7437-7ef4-49ec-91bf-54882f313dfe" providerId="ADAL" clId="{6D754EED-65AA-4A21-B175-6769012CF487}" dt="2026-03-16T10:56:34.568" v="10" actId="20577"/>
+      <pc:sldChg chg="del">
+        <pc:chgData name="Virve Räni" userId="161a7437-7ef4-49ec-91bf-54882f313dfe" providerId="ADAL" clId="{6D754EED-65AA-4A21-B175-6769012CF487}" dt="2026-04-06T19:39:48.544" v="422" actId="47"/>
+        <pc:sldMkLst>
+          <pc:docMk/>
+          <pc:sldMk cId="1821779248" sldId="490"/>
+        </pc:sldMkLst>
+      </pc:sldChg>
+      <pc:sldChg chg="modSp del mod">
+        <pc:chgData name="Virve Räni" userId="161a7437-7ef4-49ec-91bf-54882f313dfe" providerId="ADAL" clId="{6D754EED-65AA-4A21-B175-6769012CF487}" dt="2026-04-06T19:39:31.240" v="421" actId="47"/>
         <pc:sldMkLst>
           <pc:docMk/>
           <pc:sldMk cId="109165733" sldId="556"/>
         </pc:sldMkLst>
+      </pc:sldChg>
+      <pc:sldChg chg="ord">
+        <pc:chgData name="Virve Räni" userId="161a7437-7ef4-49ec-91bf-54882f313dfe" providerId="ADAL" clId="{6D754EED-65AA-4A21-B175-6769012CF487}" dt="2026-04-06T19:40:31.228" v="491"/>
+        <pc:sldMkLst>
+          <pc:docMk/>
+          <pc:sldMk cId="151507908" sldId="557"/>
+        </pc:sldMkLst>
+      </pc:sldChg>
+      <pc:sldChg chg="modSp mod ord">
+        <pc:chgData name="Virve Räni" userId="161a7437-7ef4-49ec-91bf-54882f313dfe" providerId="ADAL" clId="{6D754EED-65AA-4A21-B175-6769012CF487}" dt="2026-04-06T18:21:05.567" v="80"/>
+        <pc:sldMkLst>
+          <pc:docMk/>
+          <pc:sldMk cId="1137972440" sldId="641"/>
+        </pc:sldMkLst>
         <pc:spChg chg="mod">
-          <ac:chgData name="Virve Räni" userId="161a7437-7ef4-49ec-91bf-54882f313dfe" providerId="ADAL" clId="{6D754EED-65AA-4A21-B175-6769012CF487}" dt="2026-03-16T10:56:34.568" v="10" actId="20577"/>
+          <ac:chgData name="Virve Räni" userId="161a7437-7ef4-49ec-91bf-54882f313dfe" providerId="ADAL" clId="{6D754EED-65AA-4A21-B175-6769012CF487}" dt="2026-04-06T18:19:49.183" v="30" actId="20577"/>
           <ac:spMkLst>
             <pc:docMk/>
-            <pc:sldMk cId="109165733" sldId="556"/>
-            <ac:spMk id="5" creationId="{79BC406D-94E4-F8E2-04F1-5E3C55B7B07C}"/>
+            <pc:sldMk cId="1137972440" sldId="641"/>
+            <ac:spMk id="3" creationId="{9CC3A1CD-3F5D-D5BD-4A3E-F94218F8E9CB}"/>
           </ac:spMkLst>
         </pc:spChg>
+      </pc:sldChg>
+      <pc:sldChg chg="del">
+        <pc:chgData name="Virve Räni" userId="161a7437-7ef4-49ec-91bf-54882f313dfe" providerId="ADAL" clId="{6D754EED-65AA-4A21-B175-6769012CF487}" dt="2026-04-06T18:19:56.734" v="31" actId="47"/>
+        <pc:sldMkLst>
+          <pc:docMk/>
+          <pc:sldMk cId="3465804841" sldId="642"/>
+        </pc:sldMkLst>
+      </pc:sldChg>
+      <pc:sldChg chg="ord">
+        <pc:chgData name="Virve Räni" userId="161a7437-7ef4-49ec-91bf-54882f313dfe" providerId="ADAL" clId="{6D754EED-65AA-4A21-B175-6769012CF487}" dt="2026-04-06T18:20:40.392" v="74"/>
+        <pc:sldMkLst>
+          <pc:docMk/>
+          <pc:sldMk cId="308433269" sldId="643"/>
+        </pc:sldMkLst>
       </pc:sldChg>
       <pc:sldChg chg="modSp mod">
         <pc:chgData name="Virve Räni" userId="161a7437-7ef4-49ec-91bf-54882f313dfe" providerId="ADAL" clId="{6D754EED-65AA-4A21-B175-6769012CF487}" dt="2026-03-16T10:56:30.657" v="8" actId="20577"/>
@@ -203,6 +312,21 @@
             <pc:docMk/>
             <pc:sldMk cId="2838608381" sldId="644"/>
             <ac:spMk id="5" creationId="{C8F9C816-F533-C6F6-6632-43FAF5E25536}"/>
+          </ac:spMkLst>
+        </pc:spChg>
+      </pc:sldChg>
+      <pc:sldChg chg="modSp new mod">
+        <pc:chgData name="Virve Räni" userId="161a7437-7ef4-49ec-91bf-54882f313dfe" providerId="ADAL" clId="{6D754EED-65AA-4A21-B175-6769012CF487}" dt="2026-04-06T19:40:19.031" v="487" actId="255"/>
+        <pc:sldMkLst>
+          <pc:docMk/>
+          <pc:sldMk cId="239317380" sldId="645"/>
+        </pc:sldMkLst>
+        <pc:spChg chg="mod">
+          <ac:chgData name="Virve Räni" userId="161a7437-7ef4-49ec-91bf-54882f313dfe" providerId="ADAL" clId="{6D754EED-65AA-4A21-B175-6769012CF487}" dt="2026-04-06T19:40:19.031" v="487" actId="255"/>
+          <ac:spMkLst>
+            <pc:docMk/>
+            <pc:sldMk cId="239317380" sldId="645"/>
+            <ac:spMk id="2" creationId="{FE1193C7-7A5B-3160-EC42-93B70B0DAC47}"/>
           </ac:spMkLst>
         </pc:spChg>
       </pc:sldChg>
@@ -305,7 +429,7 @@
           <a:p>
             <a:fld id="{F9D2AD6E-DEDD-49A0-A4BE-7A081A9112DA}" type="datetimeFigureOut">
               <a:rPr lang="en-US" smtClean="0"/>
-              <a:t>3/16/2026</a:t>
+              <a:t>4/6/2026</a:t>
             </a:fld>
             <a:endParaRPr lang="en-US"/>
           </a:p>
@@ -481,7 +605,7 @@
           </a:lstStyle>
           <a:p>
             <a:fld id="{2AF9C1A6-4321-41FA-B001-4140F0E2457F}" type="datetimeFigureOut">
-              <a:t>16.03.2026</a:t>
+              <a:t>06.04.2026</a:t>
             </a:fld>
             <a:endParaRPr lang="en-US"/>
           </a:p>
@@ -873,10 +997,10 @@
           <p:nvPr userDrawn="1"/>
         </p:nvPicPr>
         <p:blipFill>
-          <a:blip r:embed="rId2">
+          <a:blip>
             <a:extLst>
               <a:ext uri="{96DAC541-7B7A-43D3-8B79-37D633B846F1}">
-                <asvg:svgBlip xmlns:asvg="http://schemas.microsoft.com/office/drawing/2016/SVG/main" r:embed="rId3"/>
+                <asvg:svgBlip xmlns:asvg="http://schemas.microsoft.com/office/drawing/2016/SVG/main" r:embed="rId2"/>
               </a:ext>
             </a:extLst>
           </a:blip>
@@ -10434,10 +10558,10 @@
             <a:ext cx="810000" cy="320400"/>
           </a:xfrm>
           <a:blipFill>
-            <a:blip r:embed="rId2">
+            <a:blip>
               <a:extLst>
                 <a:ext uri="{96DAC541-7B7A-43D3-8B79-37D633B846F1}">
-                  <asvg:svgBlip xmlns:asvg="http://schemas.microsoft.com/office/drawing/2016/SVG/main" r:embed="rId3"/>
+                  <asvg:svgBlip xmlns:asvg="http://schemas.microsoft.com/office/drawing/2016/SVG/main" r:embed="rId2"/>
                 </a:ext>
               </a:extLst>
             </a:blip>
@@ -11716,10 +11840,10 @@
             <a:ext cx="810000" cy="320400"/>
           </a:xfrm>
           <a:blipFill>
-            <a:blip r:embed="rId2">
+            <a:blip>
               <a:extLst>
                 <a:ext uri="{96DAC541-7B7A-43D3-8B79-37D633B846F1}">
-                  <asvg:svgBlip xmlns:asvg="http://schemas.microsoft.com/office/drawing/2016/SVG/main" r:embed="rId3"/>
+                  <asvg:svgBlip xmlns:asvg="http://schemas.microsoft.com/office/drawing/2016/SVG/main" r:embed="rId2"/>
                 </a:ext>
               </a:extLst>
             </a:blip>
@@ -11960,7 +12084,7 @@
           <a:p>
             <a:fld id="{DE840A40-73C8-4048-8140-49F5D65BB431}" type="datetimeFigureOut">
               <a:rPr lang="et-EE" smtClean="0"/>
-              <a:t>16.03.2026</a:t>
+              <a:t>06.04.2026</a:t>
             </a:fld>
             <a:endParaRPr lang="et-EE"/>
           </a:p>
@@ -12073,10 +12197,10 @@
           <p:nvPr userDrawn="1"/>
         </p:nvPicPr>
         <p:blipFill>
-          <a:blip r:embed="rId2">
+          <a:blip>
             <a:extLst>
               <a:ext uri="{96DAC541-7B7A-43D3-8B79-37D633B846F1}">
-                <asvg:svgBlip xmlns:asvg="http://schemas.microsoft.com/office/drawing/2016/SVG/main" r:embed="rId3"/>
+                <asvg:svgBlip xmlns:asvg="http://schemas.microsoft.com/office/drawing/2016/SVG/main" r:embed="rId2"/>
               </a:ext>
             </a:extLst>
           </a:blip>
@@ -19055,10 +19179,10 @@
             <a:ext cx="2302064" cy="927536"/>
           </a:xfrm>
           <a:blipFill>
-            <a:blip r:embed="rId2">
+            <a:blip>
               <a:extLst>
                 <a:ext uri="{96DAC541-7B7A-43D3-8B79-37D633B846F1}">
-                  <asvg:svgBlip xmlns:asvg="http://schemas.microsoft.com/office/drawing/2016/SVG/main" r:embed="rId3"/>
+                  <asvg:svgBlip xmlns:asvg="http://schemas.microsoft.com/office/drawing/2016/SVG/main" r:embed="rId2"/>
                 </a:ext>
               </a:extLst>
             </a:blip>
@@ -19241,10 +19365,10 @@
           <p:nvPr userDrawn="1"/>
         </p:nvPicPr>
         <p:blipFill>
-          <a:blip r:embed="rId2">
+          <a:blip>
             <a:extLst>
               <a:ext uri="{96DAC541-7B7A-43D3-8B79-37D633B846F1}">
-                <asvg:svgBlip xmlns:asvg="http://schemas.microsoft.com/office/drawing/2016/SVG/main" r:embed="rId3"/>
+                <asvg:svgBlip xmlns:asvg="http://schemas.microsoft.com/office/drawing/2016/SVG/main" r:embed="rId2"/>
               </a:ext>
             </a:extLst>
           </a:blip>
@@ -19975,10 +20099,10 @@
           <p:nvPr userDrawn="1"/>
         </p:nvPicPr>
         <p:blipFill>
-          <a:blip r:embed="rId2">
+          <a:blip>
             <a:extLst>
               <a:ext uri="{96DAC541-7B7A-43D3-8B79-37D633B846F1}">
-                <asvg:svgBlip xmlns:asvg="http://schemas.microsoft.com/office/drawing/2016/SVG/main" r:embed="rId3"/>
+                <asvg:svgBlip xmlns:asvg="http://schemas.microsoft.com/office/drawing/2016/SVG/main" r:embed="rId2"/>
               </a:ext>
             </a:extLst>
           </a:blip>
@@ -20764,10 +20888,10 @@
             <a:ext cx="810000" cy="320400"/>
           </a:xfrm>
           <a:blipFill>
-            <a:blip r:embed="rId2">
+            <a:blip>
               <a:extLst>
                 <a:ext uri="{96DAC541-7B7A-43D3-8B79-37D633B846F1}">
-                  <asvg:svgBlip xmlns:asvg="http://schemas.microsoft.com/office/drawing/2016/SVG/main" r:embed="rId3"/>
+                  <asvg:svgBlip xmlns:asvg="http://schemas.microsoft.com/office/drawing/2016/SVG/main" r:embed="rId2"/>
                 </a:ext>
               </a:extLst>
             </a:blip>
@@ -24075,377 +24199,6 @@
         <p:cNvPr id="1" name="">
           <a:extLst>
             <a:ext uri="{FF2B5EF4-FFF2-40B4-BE49-F238E27FC236}">
-              <a16:creationId xmlns:a16="http://schemas.microsoft.com/office/drawing/2014/main" id="{2EB12F7D-0F32-EA88-B041-16143FEB8924}"/>
-            </a:ext>
-          </a:extLst>
-        </p:cNvPr>
-        <p:cNvGrpSpPr/>
-        <p:nvPr/>
-      </p:nvGrpSpPr>
-      <p:grpSpPr>
-        <a:xfrm>
-          <a:off x="0" y="0"/>
-          <a:ext cx="0" cy="0"/>
-          <a:chOff x="0" y="0"/>
-          <a:chExt cx="0" cy="0"/>
-        </a:xfrm>
-      </p:grpSpPr>
-      <p:sp>
-        <p:nvSpPr>
-          <p:cNvPr id="2" name="Title 1">
-            <a:extLst>
-              <a:ext uri="{FF2B5EF4-FFF2-40B4-BE49-F238E27FC236}">
-                <a16:creationId xmlns:a16="http://schemas.microsoft.com/office/drawing/2014/main" id="{89D3BBAC-BC5C-05AA-FECD-7B6769209565}"/>
-              </a:ext>
-            </a:extLst>
-          </p:cNvPr>
-          <p:cNvSpPr>
-            <a:spLocks noGrp="1"/>
-          </p:cNvSpPr>
-          <p:nvPr>
-            <p:ph type="ctrTitle"/>
-          </p:nvPr>
-        </p:nvSpPr>
-        <p:spPr/>
-        <p:txBody>
-          <a:bodyPr/>
-          <a:lstStyle/>
-          <a:p>
-            <a:r>
-              <a:rPr lang="en-US" dirty="0" err="1"/>
-              <a:t>DBeaver</a:t>
-            </a:r>
-            <a:r>
-              <a:rPr lang="en-US" dirty="0"/>
-              <a:t> – </a:t>
-            </a:r>
-            <a:r>
-              <a:rPr lang="en-US" dirty="0" err="1"/>
-              <a:t>tabelite</a:t>
-            </a:r>
-            <a:r>
-              <a:rPr lang="en-US" dirty="0"/>
-              <a:t> </a:t>
-            </a:r>
-            <a:r>
-              <a:rPr lang="en-US" dirty="0" err="1"/>
-              <a:t>ühendamine</a:t>
-            </a:r>
-            <a:endParaRPr lang="en-US" dirty="0"/>
-          </a:p>
-        </p:txBody>
-      </p:sp>
-      <p:sp>
-        <p:nvSpPr>
-          <p:cNvPr id="5" name="Content Placeholder 4">
-            <a:extLst>
-              <a:ext uri="{FF2B5EF4-FFF2-40B4-BE49-F238E27FC236}">
-                <a16:creationId xmlns:a16="http://schemas.microsoft.com/office/drawing/2014/main" id="{C8F9C816-F533-C6F6-6632-43FAF5E25536}"/>
-              </a:ext>
-            </a:extLst>
-          </p:cNvPr>
-          <p:cNvSpPr>
-            <a:spLocks noGrp="1"/>
-          </p:cNvSpPr>
-          <p:nvPr>
-            <p:ph sz="quarter" idx="10"/>
-          </p:nvPr>
-        </p:nvSpPr>
-        <p:spPr/>
-        <p:txBody>
-          <a:bodyPr/>
-          <a:lstStyle/>
-          <a:p>
-            <a:pPr marL="285750" indent="-285750">
-              <a:lnSpc>
-                <a:spcPct val="150000"/>
-              </a:lnSpc>
-            </a:pPr>
-            <a:r>
-              <a:rPr lang="en-US" sz="2400" dirty="0" err="1">
-                <a:ea typeface="Inter"/>
-                <a:cs typeface="+mn-lt"/>
-              </a:rPr>
-              <a:t>Lahendame</a:t>
-            </a:r>
-            <a:r>
-              <a:rPr lang="en-US" sz="2400" dirty="0">
-                <a:ea typeface="Inter"/>
-                <a:cs typeface="+mn-lt"/>
-              </a:rPr>
-              <a:t>: Day6 </a:t>
-            </a:r>
-            <a:r>
-              <a:rPr lang="en-US" sz="2400" dirty="0">
-                <a:ea typeface="Inter"/>
-                <a:cs typeface="+mn-lt"/>
-                <a:sym typeface="Wingdings" panose="05000000000000000000" pitchFamily="2" charset="2"/>
-              </a:rPr>
-              <a:t> </a:t>
-            </a:r>
-            <a:r>
-              <a:rPr lang="en-US" sz="2400" dirty="0">
-                <a:ea typeface="Inter"/>
-                <a:cs typeface="+mn-lt"/>
-              </a:rPr>
-              <a:t>sql_ulesanded_5.txt</a:t>
-            </a:r>
-          </a:p>
-          <a:p>
-            <a:pPr marL="857250" lvl="1" indent="-342900">
-              <a:lnSpc>
-                <a:spcPct val="150000"/>
-              </a:lnSpc>
-              <a:buAutoNum type="arabicPeriod"/>
-            </a:pPr>
-            <a:endParaRPr lang="en-US" dirty="0">
-              <a:solidFill>
-                <a:srgbClr val="121212"/>
-              </a:solidFill>
-              <a:cs typeface="+mn-lt"/>
-            </a:endParaRPr>
-          </a:p>
-          <a:p>
-            <a:pPr marL="857250" lvl="1" indent="-342900">
-              <a:lnSpc>
-                <a:spcPct val="150000"/>
-              </a:lnSpc>
-              <a:buAutoNum type="arabicPeriod"/>
-            </a:pPr>
-            <a:endParaRPr lang="en-US" dirty="0">
-              <a:cs typeface="+mn-lt"/>
-            </a:endParaRPr>
-          </a:p>
-          <a:p>
-            <a:pPr marL="0" indent="0">
-              <a:buClr>
-                <a:srgbClr val="121212"/>
-              </a:buClr>
-              <a:buNone/>
-            </a:pPr>
-            <a:endParaRPr lang="en-US" dirty="0">
-              <a:cs typeface="+mn-lt"/>
-            </a:endParaRPr>
-          </a:p>
-          <a:p>
-            <a:endParaRPr lang="en-US" dirty="0">
-              <a:cs typeface="+mn-lt"/>
-            </a:endParaRPr>
-          </a:p>
-        </p:txBody>
-      </p:sp>
-    </p:spTree>
-    <p:extLst>
-      <p:ext uri="{BB962C8B-B14F-4D97-AF65-F5344CB8AC3E}">
-        <p14:creationId xmlns:p14="http://schemas.microsoft.com/office/powerpoint/2010/main" val="2838608381"/>
-      </p:ext>
-    </p:extLst>
-  </p:cSld>
-  <p:clrMapOvr>
-    <a:masterClrMapping/>
-  </p:clrMapOvr>
-</p:sld>
-</file>
-
-<file path=ppt/slides/slide11.xml><?xml version="1.0" encoding="utf-8"?>
-<p:sld xmlns:a="http://schemas.openxmlformats.org/drawingml/2006/main" xmlns:r="http://schemas.openxmlformats.org/officeDocument/2006/relationships" xmlns:p="http://schemas.openxmlformats.org/presentationml/2006/main">
-  <p:cSld>
-    <p:spTree>
-      <p:nvGrpSpPr>
-        <p:cNvPr id="1" name="">
-          <a:extLst>
-            <a:ext uri="{FF2B5EF4-FFF2-40B4-BE49-F238E27FC236}">
-              <a16:creationId xmlns:a16="http://schemas.microsoft.com/office/drawing/2014/main" id="{498015DB-B099-C63F-0272-18252B5984CE}"/>
-            </a:ext>
-          </a:extLst>
-        </p:cNvPr>
-        <p:cNvGrpSpPr/>
-        <p:nvPr/>
-      </p:nvGrpSpPr>
-      <p:grpSpPr>
-        <a:xfrm>
-          <a:off x="0" y="0"/>
-          <a:ext cx="0" cy="0"/>
-          <a:chOff x="0" y="0"/>
-          <a:chExt cx="0" cy="0"/>
-        </a:xfrm>
-      </p:grpSpPr>
-      <p:sp>
-        <p:nvSpPr>
-          <p:cNvPr id="2" name="Title 1">
-            <a:extLst>
-              <a:ext uri="{FF2B5EF4-FFF2-40B4-BE49-F238E27FC236}">
-                <a16:creationId xmlns:a16="http://schemas.microsoft.com/office/drawing/2014/main" id="{F8B195F4-10BE-C6AB-9D71-EE23E24A74E6}"/>
-              </a:ext>
-            </a:extLst>
-          </p:cNvPr>
-          <p:cNvSpPr>
-            <a:spLocks noGrp="1"/>
-          </p:cNvSpPr>
-          <p:nvPr>
-            <p:ph type="ctrTitle"/>
-          </p:nvPr>
-        </p:nvSpPr>
-        <p:spPr/>
-        <p:txBody>
-          <a:bodyPr/>
-          <a:lstStyle/>
-          <a:p>
-            <a:r>
-              <a:rPr lang="en-US" dirty="0" err="1"/>
-              <a:t>DBeaver</a:t>
-            </a:r>
-            <a:r>
-              <a:rPr lang="en-US" dirty="0"/>
-              <a:t> – </a:t>
-            </a:r>
-            <a:r>
-              <a:rPr lang="en-US" dirty="0" err="1"/>
-              <a:t>andmete</a:t>
-            </a:r>
-            <a:r>
-              <a:rPr lang="en-US" dirty="0"/>
-              <a:t> </a:t>
-            </a:r>
-            <a:r>
-              <a:rPr lang="en-US" dirty="0" err="1"/>
-              <a:t>pärimine</a:t>
-            </a:r>
-            <a:r>
-              <a:rPr lang="en-US" dirty="0"/>
-              <a:t> - </a:t>
-            </a:r>
-            <a:r>
-              <a:rPr lang="en-US" dirty="0" err="1"/>
-              <a:t>alamtabelid</a:t>
-            </a:r>
-            <a:r>
-              <a:rPr lang="en-US" dirty="0"/>
-              <a:t> </a:t>
-            </a:r>
-          </a:p>
-        </p:txBody>
-      </p:sp>
-      <p:sp>
-        <p:nvSpPr>
-          <p:cNvPr id="5" name="Content Placeholder 4">
-            <a:extLst>
-              <a:ext uri="{FF2B5EF4-FFF2-40B4-BE49-F238E27FC236}">
-                <a16:creationId xmlns:a16="http://schemas.microsoft.com/office/drawing/2014/main" id="{79BC406D-94E4-F8E2-04F1-5E3C55B7B07C}"/>
-              </a:ext>
-            </a:extLst>
-          </p:cNvPr>
-          <p:cNvSpPr>
-            <a:spLocks noGrp="1"/>
-          </p:cNvSpPr>
-          <p:nvPr>
-            <p:ph sz="quarter" idx="10"/>
-          </p:nvPr>
-        </p:nvSpPr>
-        <p:spPr/>
-        <p:txBody>
-          <a:bodyPr/>
-          <a:lstStyle/>
-          <a:p>
-            <a:pPr marL="285750" indent="-285750">
-              <a:lnSpc>
-                <a:spcPct val="150000"/>
-              </a:lnSpc>
-            </a:pPr>
-            <a:r>
-              <a:rPr lang="en-US" sz="2400" dirty="0" err="1">
-                <a:ea typeface="Inter"/>
-                <a:cs typeface="+mn-lt"/>
-              </a:rPr>
-              <a:t>Lahendame</a:t>
-            </a:r>
-            <a:r>
-              <a:rPr lang="en-US" sz="2400" dirty="0">
-                <a:ea typeface="Inter"/>
-                <a:cs typeface="+mn-lt"/>
-              </a:rPr>
-              <a:t>: Day6 </a:t>
-            </a:r>
-            <a:r>
-              <a:rPr lang="en-US" sz="2400" dirty="0">
-                <a:ea typeface="Inter"/>
-                <a:cs typeface="+mn-lt"/>
-                <a:sym typeface="Wingdings" panose="05000000000000000000" pitchFamily="2" charset="2"/>
-              </a:rPr>
-              <a:t> </a:t>
-            </a:r>
-            <a:r>
-              <a:rPr lang="en-US" sz="2400" dirty="0">
-                <a:ea typeface="Inter"/>
-                <a:cs typeface="+mn-lt"/>
-              </a:rPr>
-              <a:t>sql_ulesanded_6.txt</a:t>
-            </a:r>
-          </a:p>
-          <a:p>
-            <a:pPr marL="857250" lvl="1" indent="-342900">
-              <a:lnSpc>
-                <a:spcPct val="150000"/>
-              </a:lnSpc>
-              <a:buAutoNum type="arabicPeriod"/>
-            </a:pPr>
-            <a:endParaRPr lang="en-US" dirty="0">
-              <a:solidFill>
-                <a:srgbClr val="121212"/>
-              </a:solidFill>
-              <a:cs typeface="+mn-lt"/>
-            </a:endParaRPr>
-          </a:p>
-          <a:p>
-            <a:pPr marL="857250" lvl="1" indent="-342900">
-              <a:lnSpc>
-                <a:spcPct val="150000"/>
-              </a:lnSpc>
-              <a:buAutoNum type="arabicPeriod"/>
-            </a:pPr>
-            <a:endParaRPr lang="en-US" dirty="0">
-              <a:cs typeface="+mn-lt"/>
-            </a:endParaRPr>
-          </a:p>
-          <a:p>
-            <a:pPr marL="0" indent="0">
-              <a:buClr>
-                <a:srgbClr val="121212"/>
-              </a:buClr>
-              <a:buNone/>
-            </a:pPr>
-            <a:endParaRPr lang="en-US" dirty="0">
-              <a:cs typeface="+mn-lt"/>
-            </a:endParaRPr>
-          </a:p>
-          <a:p>
-            <a:endParaRPr lang="en-US" dirty="0">
-              <a:cs typeface="+mn-lt"/>
-            </a:endParaRPr>
-          </a:p>
-        </p:txBody>
-      </p:sp>
-    </p:spTree>
-    <p:extLst>
-      <p:ext uri="{BB962C8B-B14F-4D97-AF65-F5344CB8AC3E}">
-        <p14:creationId xmlns:p14="http://schemas.microsoft.com/office/powerpoint/2010/main" val="109165733"/>
-      </p:ext>
-    </p:extLst>
-  </p:cSld>
-  <p:clrMapOvr>
-    <a:masterClrMapping/>
-  </p:clrMapOvr>
-</p:sld>
-</file>
-
-<file path=ppt/slides/slide12.xml><?xml version="1.0" encoding="utf-8"?>
-<p:sld xmlns:a="http://schemas.openxmlformats.org/drawingml/2006/main" xmlns:r="http://schemas.openxmlformats.org/officeDocument/2006/relationships" xmlns:p="http://schemas.openxmlformats.org/presentationml/2006/main">
-  <p:cSld>
-    <p:spTree>
-      <p:nvGrpSpPr>
-        <p:cNvPr id="1" name="">
-          <a:extLst>
-            <a:ext uri="{FF2B5EF4-FFF2-40B4-BE49-F238E27FC236}">
               <a16:creationId xmlns:a16="http://schemas.microsoft.com/office/drawing/2014/main" id="{0457CCB3-B259-3DCD-0027-7519909710D0}"/>
             </a:ext>
           </a:extLst>
@@ -24546,6 +24299,243 @@
     <p:extLst>
       <p:ext uri="{BB962C8B-B14F-4D97-AF65-F5344CB8AC3E}">
         <p14:creationId xmlns:p14="http://schemas.microsoft.com/office/powerpoint/2010/main" val="2250246704"/>
+      </p:ext>
+    </p:extLst>
+  </p:cSld>
+  <p:clrMapOvr>
+    <a:masterClrMapping/>
+  </p:clrMapOvr>
+</p:sld>
+</file>
+
+<file path=ppt/slides/slide11.xml><?xml version="1.0" encoding="utf-8"?>
+<p:sld xmlns:a="http://schemas.openxmlformats.org/drawingml/2006/main" xmlns:r="http://schemas.openxmlformats.org/officeDocument/2006/relationships" xmlns:p="http://schemas.openxmlformats.org/presentationml/2006/main">
+  <p:cSld>
+    <p:spTree>
+      <p:nvGrpSpPr>
+        <p:cNvPr id="1" name=""/>
+        <p:cNvGrpSpPr/>
+        <p:nvPr/>
+      </p:nvGrpSpPr>
+      <p:grpSpPr>
+        <a:xfrm>
+          <a:off x="0" y="0"/>
+          <a:ext cx="0" cy="0"/>
+          <a:chOff x="0" y="0"/>
+          <a:chExt cx="0" cy="0"/>
+        </a:xfrm>
+      </p:grpSpPr>
+      <p:sp>
+        <p:nvSpPr>
+          <p:cNvPr id="2" name="Title 1">
+            <a:extLst>
+              <a:ext uri="{FF2B5EF4-FFF2-40B4-BE49-F238E27FC236}">
+                <a16:creationId xmlns:a16="http://schemas.microsoft.com/office/drawing/2014/main" id="{FE1193C7-7A5B-3160-EC42-93B70B0DAC47}"/>
+              </a:ext>
+            </a:extLst>
+          </p:cNvPr>
+          <p:cNvSpPr>
+            <a:spLocks noGrp="1"/>
+          </p:cNvSpPr>
+          <p:nvPr>
+            <p:ph type="ctrTitle"/>
+          </p:nvPr>
+        </p:nvSpPr>
+        <p:spPr/>
+        <p:txBody>
+          <a:bodyPr/>
+          <a:lstStyle/>
+          <a:p>
+            <a:r>
+              <a:rPr lang="en-US" sz="2400" dirty="0" err="1"/>
+              <a:t>Dbeaver</a:t>
+            </a:r>
+            <a:r>
+              <a:rPr lang="en-US" sz="2400" dirty="0"/>
+              <a:t> – </a:t>
+            </a:r>
+            <a:r>
+              <a:rPr lang="en-US" sz="2400" dirty="0" err="1"/>
+              <a:t>andmete</a:t>
+            </a:r>
+            <a:r>
+              <a:rPr lang="en-US" sz="2400" dirty="0"/>
+              <a:t> </a:t>
+            </a:r>
+            <a:r>
+              <a:rPr lang="en-US" sz="2400" dirty="0" err="1"/>
+              <a:t>ühendamine</a:t>
+            </a:r>
+            <a:r>
+              <a:rPr lang="en-US" sz="2400" dirty="0"/>
+              <a:t> – </a:t>
+            </a:r>
+            <a:r>
+              <a:rPr lang="en-US" sz="2400" dirty="0" err="1"/>
+              <a:t>vaatame</a:t>
+            </a:r>
+            <a:r>
+              <a:rPr lang="en-US" sz="2400" dirty="0"/>
+              <a:t> </a:t>
+            </a:r>
+            <a:r>
+              <a:rPr lang="en-US" sz="2400" dirty="0" err="1"/>
+              <a:t>lahendused</a:t>
+            </a:r>
+            <a:r>
+              <a:rPr lang="en-US" sz="2400" dirty="0"/>
+              <a:t> </a:t>
+            </a:r>
+            <a:r>
+              <a:rPr lang="en-US" sz="2400" dirty="0" err="1"/>
+              <a:t>üle</a:t>
+            </a:r>
+            <a:endParaRPr lang="et-EE" sz="2400" dirty="0"/>
+          </a:p>
+        </p:txBody>
+      </p:sp>
+      <p:sp>
+        <p:nvSpPr>
+          <p:cNvPr id="3" name="Content Placeholder 2">
+            <a:extLst>
+              <a:ext uri="{FF2B5EF4-FFF2-40B4-BE49-F238E27FC236}">
+                <a16:creationId xmlns:a16="http://schemas.microsoft.com/office/drawing/2014/main" id="{24B3417E-5909-8D66-EE8F-A63F18106F0C}"/>
+              </a:ext>
+            </a:extLst>
+          </p:cNvPr>
+          <p:cNvSpPr>
+            <a:spLocks noGrp="1"/>
+          </p:cNvSpPr>
+          <p:nvPr>
+            <p:ph sz="quarter" idx="10"/>
+          </p:nvPr>
+        </p:nvSpPr>
+        <p:spPr/>
+        <p:txBody>
+          <a:bodyPr/>
+          <a:lstStyle/>
+          <a:p>
+            <a:endParaRPr lang="et-EE"/>
+          </a:p>
+        </p:txBody>
+      </p:sp>
+    </p:spTree>
+    <p:extLst>
+      <p:ext uri="{BB962C8B-B14F-4D97-AF65-F5344CB8AC3E}">
+        <p14:creationId xmlns:p14="http://schemas.microsoft.com/office/powerpoint/2010/main" val="239317380"/>
+      </p:ext>
+    </p:extLst>
+  </p:cSld>
+  <p:clrMapOvr>
+    <a:masterClrMapping/>
+  </p:clrMapOvr>
+</p:sld>
+</file>
+
+<file path=ppt/slides/slide12.xml><?xml version="1.0" encoding="utf-8"?>
+<p:sld xmlns:a="http://schemas.openxmlformats.org/drawingml/2006/main" xmlns:r="http://schemas.openxmlformats.org/officeDocument/2006/relationships" xmlns:p="http://schemas.openxmlformats.org/presentationml/2006/main">
+  <p:cSld>
+    <p:spTree>
+      <p:nvGrpSpPr>
+        <p:cNvPr id="1" name="">
+          <a:extLst>
+            <a:ext uri="{FF2B5EF4-FFF2-40B4-BE49-F238E27FC236}">
+              <a16:creationId xmlns:a16="http://schemas.microsoft.com/office/drawing/2014/main" id="{14BCBF13-0577-C954-E859-4485C0A777E3}"/>
+            </a:ext>
+          </a:extLst>
+        </p:cNvPr>
+        <p:cNvGrpSpPr/>
+        <p:nvPr/>
+      </p:nvGrpSpPr>
+      <p:grpSpPr>
+        <a:xfrm>
+          <a:off x="0" y="0"/>
+          <a:ext cx="0" cy="0"/>
+          <a:chOff x="0" y="0"/>
+          <a:chExt cx="0" cy="0"/>
+        </a:xfrm>
+      </p:grpSpPr>
+      <p:sp>
+        <p:nvSpPr>
+          <p:cNvPr id="3" name="Content Placeholder 2">
+            <a:extLst>
+              <a:ext uri="{FF2B5EF4-FFF2-40B4-BE49-F238E27FC236}">
+                <a16:creationId xmlns:a16="http://schemas.microsoft.com/office/drawing/2014/main" id="{EFA39D38-56B4-329D-1362-22E4CB980DCE}"/>
+              </a:ext>
+            </a:extLst>
+          </p:cNvPr>
+          <p:cNvSpPr>
+            <a:spLocks noGrp="1"/>
+          </p:cNvSpPr>
+          <p:nvPr>
+            <p:ph sz="quarter" idx="10"/>
+          </p:nvPr>
+        </p:nvSpPr>
+        <p:spPr/>
+        <p:txBody>
+          <a:bodyPr/>
+          <a:lstStyle/>
+          <a:p>
+            <a:pPr marL="0" indent="0">
+              <a:lnSpc>
+                <a:spcPct val="150000"/>
+              </a:lnSpc>
+              <a:buNone/>
+            </a:pPr>
+            <a:endParaRPr lang="en-US" sz="2800">
+              <a:ea typeface="Inter"/>
+            </a:endParaRPr>
+          </a:p>
+          <a:p>
+            <a:pPr marL="457200" lvl="1" indent="0">
+              <a:lnSpc>
+                <a:spcPct val="150000"/>
+              </a:lnSpc>
+              <a:buNone/>
+            </a:pPr>
+            <a:endParaRPr lang="en-US" sz="2000">
+              <a:ea typeface="Inter"/>
+            </a:endParaRPr>
+          </a:p>
+        </p:txBody>
+      </p:sp>
+      <p:sp>
+        <p:nvSpPr>
+          <p:cNvPr id="5" name="Title 4">
+            <a:extLst>
+              <a:ext uri="{FF2B5EF4-FFF2-40B4-BE49-F238E27FC236}">
+                <a16:creationId xmlns:a16="http://schemas.microsoft.com/office/drawing/2014/main" id="{DE74B9BA-4701-AF0C-7FCF-4AAD3F3B4CD4}"/>
+              </a:ext>
+            </a:extLst>
+          </p:cNvPr>
+          <p:cNvSpPr>
+            <a:spLocks noGrp="1"/>
+          </p:cNvSpPr>
+          <p:nvPr>
+            <p:ph type="ctrTitle"/>
+          </p:nvPr>
+        </p:nvSpPr>
+        <p:spPr>
+          <a:xfrm>
+            <a:off x="4283493" y="2675333"/>
+            <a:ext cx="3777666" cy="357043"/>
+          </a:xfrm>
+        </p:spPr>
+        <p:txBody>
+          <a:bodyPr/>
+          <a:lstStyle/>
+          <a:p>
+            <a:r>
+              <a:rPr lang="en-US"/>
+              <a:t>Paus 14:45-15:00</a:t>
+            </a:r>
+          </a:p>
+        </p:txBody>
+      </p:sp>
+    </p:spTree>
+    <p:extLst>
+      <p:ext uri="{BB962C8B-B14F-4D97-AF65-F5344CB8AC3E}">
+        <p14:creationId xmlns:p14="http://schemas.microsoft.com/office/powerpoint/2010/main" val="4120372495"/>
       </p:ext>
     </p:extLst>
   </p:cSld>
@@ -25254,596 +25244,6 @@
 </p:sld>
 </file>
 
-<file path=ppt/slides/slide15.xml><?xml version="1.0" encoding="utf-8"?>
-<p:sld xmlns:a="http://schemas.openxmlformats.org/drawingml/2006/main" xmlns:r="http://schemas.openxmlformats.org/officeDocument/2006/relationships" xmlns:p="http://schemas.openxmlformats.org/presentationml/2006/main">
-  <p:cSld>
-    <p:spTree>
-      <p:nvGrpSpPr>
-        <p:cNvPr id="1" name="">
-          <a:extLst>
-            <a:ext uri="{FF2B5EF4-FFF2-40B4-BE49-F238E27FC236}">
-              <a16:creationId xmlns:a16="http://schemas.microsoft.com/office/drawing/2014/main" id="{14BCBF13-0577-C954-E859-4485C0A777E3}"/>
-            </a:ext>
-          </a:extLst>
-        </p:cNvPr>
-        <p:cNvGrpSpPr/>
-        <p:nvPr/>
-      </p:nvGrpSpPr>
-      <p:grpSpPr>
-        <a:xfrm>
-          <a:off x="0" y="0"/>
-          <a:ext cx="0" cy="0"/>
-          <a:chOff x="0" y="0"/>
-          <a:chExt cx="0" cy="0"/>
-        </a:xfrm>
-      </p:grpSpPr>
-      <p:sp>
-        <p:nvSpPr>
-          <p:cNvPr id="3" name="Content Placeholder 2">
-            <a:extLst>
-              <a:ext uri="{FF2B5EF4-FFF2-40B4-BE49-F238E27FC236}">
-                <a16:creationId xmlns:a16="http://schemas.microsoft.com/office/drawing/2014/main" id="{EFA39D38-56B4-329D-1362-22E4CB980DCE}"/>
-              </a:ext>
-            </a:extLst>
-          </p:cNvPr>
-          <p:cNvSpPr>
-            <a:spLocks noGrp="1"/>
-          </p:cNvSpPr>
-          <p:nvPr>
-            <p:ph sz="quarter" idx="10"/>
-          </p:nvPr>
-        </p:nvSpPr>
-        <p:spPr/>
-        <p:txBody>
-          <a:bodyPr/>
-          <a:lstStyle/>
-          <a:p>
-            <a:pPr marL="0" indent="0">
-              <a:lnSpc>
-                <a:spcPct val="150000"/>
-              </a:lnSpc>
-              <a:buNone/>
-            </a:pPr>
-            <a:endParaRPr lang="en-US" sz="2800">
-              <a:ea typeface="Inter"/>
-            </a:endParaRPr>
-          </a:p>
-          <a:p>
-            <a:pPr marL="457200" lvl="1" indent="0">
-              <a:lnSpc>
-                <a:spcPct val="150000"/>
-              </a:lnSpc>
-              <a:buNone/>
-            </a:pPr>
-            <a:endParaRPr lang="en-US" sz="2000">
-              <a:ea typeface="Inter"/>
-            </a:endParaRPr>
-          </a:p>
-        </p:txBody>
-      </p:sp>
-      <p:sp>
-        <p:nvSpPr>
-          <p:cNvPr id="5" name="Title 4">
-            <a:extLst>
-              <a:ext uri="{FF2B5EF4-FFF2-40B4-BE49-F238E27FC236}">
-                <a16:creationId xmlns:a16="http://schemas.microsoft.com/office/drawing/2014/main" id="{DE74B9BA-4701-AF0C-7FCF-4AAD3F3B4CD4}"/>
-              </a:ext>
-            </a:extLst>
-          </p:cNvPr>
-          <p:cNvSpPr>
-            <a:spLocks noGrp="1"/>
-          </p:cNvSpPr>
-          <p:nvPr>
-            <p:ph type="ctrTitle"/>
-          </p:nvPr>
-        </p:nvSpPr>
-        <p:spPr>
-          <a:xfrm>
-            <a:off x="4283493" y="2675333"/>
-            <a:ext cx="3777666" cy="357043"/>
-          </a:xfrm>
-        </p:spPr>
-        <p:txBody>
-          <a:bodyPr/>
-          <a:lstStyle/>
-          <a:p>
-            <a:r>
-              <a:rPr lang="en-US"/>
-              <a:t>Paus 14:45-15:00</a:t>
-            </a:r>
-          </a:p>
-        </p:txBody>
-      </p:sp>
-    </p:spTree>
-    <p:extLst>
-      <p:ext uri="{BB962C8B-B14F-4D97-AF65-F5344CB8AC3E}">
-        <p14:creationId xmlns:p14="http://schemas.microsoft.com/office/powerpoint/2010/main" val="4120372495"/>
-      </p:ext>
-    </p:extLst>
-  </p:cSld>
-  <p:clrMapOvr>
-    <a:masterClrMapping/>
-  </p:clrMapOvr>
-</p:sld>
-</file>
-
-<file path=ppt/slides/slide16.xml><?xml version="1.0" encoding="utf-8"?>
-<p:sld xmlns:a="http://schemas.openxmlformats.org/drawingml/2006/main" xmlns:r="http://schemas.openxmlformats.org/officeDocument/2006/relationships" xmlns:p="http://schemas.openxmlformats.org/presentationml/2006/main">
-  <p:cSld>
-    <p:spTree>
-      <p:nvGrpSpPr>
-        <p:cNvPr id="1" name="">
-          <a:extLst>
-            <a:ext uri="{FF2B5EF4-FFF2-40B4-BE49-F238E27FC236}">
-              <a16:creationId xmlns:a16="http://schemas.microsoft.com/office/drawing/2014/main" id="{AC617CE0-EED5-7349-1A94-2995DC5D7708}"/>
-            </a:ext>
-          </a:extLst>
-        </p:cNvPr>
-        <p:cNvGrpSpPr/>
-        <p:nvPr/>
-      </p:nvGrpSpPr>
-      <p:grpSpPr>
-        <a:xfrm>
-          <a:off x="0" y="0"/>
-          <a:ext cx="0" cy="0"/>
-          <a:chOff x="0" y="0"/>
-          <a:chExt cx="0" cy="0"/>
-        </a:xfrm>
-      </p:grpSpPr>
-      <p:sp>
-        <p:nvSpPr>
-          <p:cNvPr id="2" name="Title 1">
-            <a:extLst>
-              <a:ext uri="{FF2B5EF4-FFF2-40B4-BE49-F238E27FC236}">
-                <a16:creationId xmlns:a16="http://schemas.microsoft.com/office/drawing/2014/main" id="{A6F7ECAB-F0C6-2BD9-091C-411E05342EE7}"/>
-              </a:ext>
-            </a:extLst>
-          </p:cNvPr>
-          <p:cNvSpPr>
-            <a:spLocks noGrp="1"/>
-          </p:cNvSpPr>
-          <p:nvPr>
-            <p:ph type="ctrTitle"/>
-          </p:nvPr>
-        </p:nvSpPr>
-        <p:spPr/>
-        <p:txBody>
-          <a:bodyPr/>
-          <a:lstStyle/>
-          <a:p>
-            <a:r>
-              <a:rPr lang="en-US"/>
-              <a:t>Visual Studio Code</a:t>
-            </a:r>
-          </a:p>
-        </p:txBody>
-      </p:sp>
-      <p:sp>
-        <p:nvSpPr>
-          <p:cNvPr id="5" name="Content Placeholder 4">
-            <a:extLst>
-              <a:ext uri="{FF2B5EF4-FFF2-40B4-BE49-F238E27FC236}">
-                <a16:creationId xmlns:a16="http://schemas.microsoft.com/office/drawing/2014/main" id="{914C68BD-2977-9852-E4B4-C0021262709D}"/>
-              </a:ext>
-            </a:extLst>
-          </p:cNvPr>
-          <p:cNvSpPr>
-            <a:spLocks noGrp="1"/>
-          </p:cNvSpPr>
-          <p:nvPr>
-            <p:ph sz="quarter" idx="10"/>
-          </p:nvPr>
-        </p:nvSpPr>
-        <p:spPr/>
-        <p:txBody>
-          <a:bodyPr/>
-          <a:lstStyle/>
-          <a:p>
-            <a:pPr marL="285750" indent="-285750">
-              <a:lnSpc>
-                <a:spcPct val="150000"/>
-              </a:lnSpc>
-            </a:pPr>
-            <a:r>
-              <a:rPr lang="en-US" sz="2000" dirty="0" err="1">
-                <a:ea typeface="Inter"/>
-                <a:cs typeface="+mn-lt"/>
-              </a:rPr>
-              <a:t>Andmebaasi</a:t>
-            </a:r>
-            <a:r>
-              <a:rPr lang="en-US" sz="2000" dirty="0">
-                <a:ea typeface="Inter"/>
-                <a:cs typeface="+mn-lt"/>
-              </a:rPr>
-              <a:t> </a:t>
-            </a:r>
-            <a:r>
-              <a:rPr lang="en-US" sz="2000" dirty="0" err="1">
-                <a:ea typeface="Inter"/>
-                <a:cs typeface="+mn-lt"/>
-              </a:rPr>
-              <a:t>ühendus</a:t>
-            </a:r>
-            <a:endParaRPr lang="en-US" sz="2000" dirty="0">
-              <a:ea typeface="Inter"/>
-              <a:cs typeface="+mn-lt"/>
-            </a:endParaRPr>
-          </a:p>
-          <a:p>
-            <a:pPr marL="800100" lvl="1">
-              <a:lnSpc>
-                <a:spcPct val="150000"/>
-              </a:lnSpc>
-            </a:pPr>
-            <a:r>
-              <a:rPr lang="en-US" sz="2000" dirty="0">
-                <a:ea typeface="Inter"/>
-                <a:cs typeface="+mn-lt"/>
-              </a:rPr>
-              <a:t>Extensions </a:t>
-            </a:r>
-            <a:r>
-              <a:rPr lang="en-US" sz="2000" dirty="0">
-                <a:ea typeface="Inter"/>
-                <a:cs typeface="+mn-lt"/>
-                <a:sym typeface="Wingdings" panose="05000000000000000000" pitchFamily="2" charset="2"/>
-              </a:rPr>
-              <a:t> PostgreSQL Client for Visual Studio Code</a:t>
-            </a:r>
-          </a:p>
-          <a:p>
-            <a:pPr marL="800100" lvl="1">
-              <a:lnSpc>
-                <a:spcPct val="150000"/>
-              </a:lnSpc>
-            </a:pPr>
-            <a:r>
-              <a:rPr lang="en-US" sz="2000" dirty="0" err="1">
-                <a:ea typeface="Inter"/>
-                <a:cs typeface="+mn-lt"/>
-                <a:sym typeface="Wingdings" panose="05000000000000000000" pitchFamily="2" charset="2"/>
-              </a:rPr>
-              <a:t>Ilmub</a:t>
-            </a:r>
-            <a:r>
-              <a:rPr lang="en-US" sz="2000" dirty="0">
-                <a:ea typeface="Inter"/>
-                <a:cs typeface="+mn-lt"/>
-                <a:sym typeface="Wingdings" panose="05000000000000000000" pitchFamily="2" charset="2"/>
-              </a:rPr>
-              <a:t> </a:t>
-            </a:r>
-            <a:r>
-              <a:rPr lang="en-US" sz="2000" dirty="0" err="1">
-                <a:ea typeface="Inter"/>
-                <a:cs typeface="+mn-lt"/>
-                <a:sym typeface="Wingdings" panose="05000000000000000000" pitchFamily="2" charset="2"/>
-              </a:rPr>
-              <a:t>vasakule</a:t>
-            </a:r>
-            <a:r>
-              <a:rPr lang="en-US" sz="2000" dirty="0">
-                <a:ea typeface="Inter"/>
-                <a:cs typeface="+mn-lt"/>
-                <a:sym typeface="Wingdings" panose="05000000000000000000" pitchFamily="2" charset="2"/>
-              </a:rPr>
-              <a:t> “Databases” </a:t>
-            </a:r>
-            <a:r>
-              <a:rPr lang="en-US" sz="2000" dirty="0" err="1">
-                <a:ea typeface="Inter"/>
-                <a:cs typeface="+mn-lt"/>
-                <a:sym typeface="Wingdings" panose="05000000000000000000" pitchFamily="2" charset="2"/>
-              </a:rPr>
-              <a:t>valik</a:t>
-            </a:r>
-            <a:r>
-              <a:rPr lang="en-US" sz="2000" dirty="0">
-                <a:ea typeface="Inter"/>
-                <a:cs typeface="+mn-lt"/>
-                <a:sym typeface="Wingdings" panose="05000000000000000000" pitchFamily="2" charset="2"/>
-              </a:rPr>
-              <a:t> </a:t>
-            </a:r>
-          </a:p>
-          <a:p>
-            <a:pPr marL="1200150" lvl="2">
-              <a:lnSpc>
-                <a:spcPct val="150000"/>
-              </a:lnSpc>
-            </a:pPr>
-            <a:r>
-              <a:rPr lang="en-US" sz="2000" dirty="0" err="1">
-                <a:ea typeface="Inter"/>
-                <a:cs typeface="+mn-lt"/>
-                <a:sym typeface="Wingdings" panose="05000000000000000000" pitchFamily="2" charset="2"/>
-              </a:rPr>
-              <a:t>Ühendume</a:t>
-            </a:r>
-            <a:r>
-              <a:rPr lang="en-US" sz="2000" dirty="0">
-                <a:ea typeface="Inter"/>
-                <a:cs typeface="+mn-lt"/>
-                <a:sym typeface="Wingdings" panose="05000000000000000000" pitchFamily="2" charset="2"/>
-              </a:rPr>
-              <a:t> </a:t>
-            </a:r>
-            <a:r>
-              <a:rPr lang="en-US" sz="2000" dirty="0" err="1">
-                <a:ea typeface="Inter"/>
-                <a:cs typeface="+mn-lt"/>
-                <a:sym typeface="Wingdings" panose="05000000000000000000" pitchFamily="2" charset="2"/>
-              </a:rPr>
-              <a:t>varem</a:t>
-            </a:r>
-            <a:r>
-              <a:rPr lang="en-US" sz="2000" dirty="0">
-                <a:ea typeface="Inter"/>
-                <a:cs typeface="+mn-lt"/>
-                <a:sym typeface="Wingdings" panose="05000000000000000000" pitchFamily="2" charset="2"/>
-              </a:rPr>
-              <a:t> </a:t>
-            </a:r>
-            <a:r>
-              <a:rPr lang="en-US" sz="2000" dirty="0" err="1">
-                <a:ea typeface="Inter"/>
-                <a:cs typeface="+mn-lt"/>
-                <a:sym typeface="Wingdings" panose="05000000000000000000" pitchFamily="2" charset="2"/>
-              </a:rPr>
-              <a:t>loodud</a:t>
-            </a:r>
-            <a:r>
-              <a:rPr lang="en-US" sz="2000" dirty="0">
-                <a:ea typeface="Inter"/>
-                <a:cs typeface="+mn-lt"/>
-                <a:sym typeface="Wingdings" panose="05000000000000000000" pitchFamily="2" charset="2"/>
-              </a:rPr>
-              <a:t> “</a:t>
-            </a:r>
-            <a:r>
-              <a:rPr lang="en-US" sz="2000" dirty="0" err="1">
-                <a:ea typeface="Inter"/>
-                <a:cs typeface="+mn-lt"/>
-                <a:sym typeface="Wingdings" panose="05000000000000000000" pitchFamily="2" charset="2"/>
-              </a:rPr>
-              <a:t>salesdb</a:t>
-            </a:r>
-            <a:r>
-              <a:rPr lang="en-US" sz="2000" dirty="0">
-                <a:ea typeface="Inter"/>
-                <a:cs typeface="+mn-lt"/>
-                <a:sym typeface="Wingdings" panose="05000000000000000000" pitchFamily="2" charset="2"/>
-              </a:rPr>
-              <a:t>” </a:t>
-            </a:r>
-            <a:r>
-              <a:rPr lang="en-US" sz="2000" dirty="0" err="1">
-                <a:ea typeface="Inter"/>
-                <a:cs typeface="+mn-lt"/>
-                <a:sym typeface="Wingdings" panose="05000000000000000000" pitchFamily="2" charset="2"/>
-              </a:rPr>
-              <a:t>andmebaasiga</a:t>
-            </a:r>
-            <a:endParaRPr lang="en-US" sz="2000" dirty="0">
-              <a:cs typeface="+mn-lt"/>
-            </a:endParaRPr>
-          </a:p>
-          <a:p>
-            <a:pPr marL="285750" indent="-285750">
-              <a:lnSpc>
-                <a:spcPct val="150000"/>
-              </a:lnSpc>
-              <a:buClr>
-                <a:srgbClr val="121212"/>
-              </a:buClr>
-            </a:pPr>
-            <a:r>
-              <a:rPr lang="en-US" sz="2000" dirty="0">
-                <a:ea typeface="Inter"/>
-                <a:cs typeface="+mn-lt"/>
-              </a:rPr>
-              <a:t>SQL </a:t>
-            </a:r>
-            <a:r>
-              <a:rPr lang="en-US" sz="2000" dirty="0" err="1">
-                <a:ea typeface="Inter"/>
-                <a:cs typeface="+mn-lt"/>
-              </a:rPr>
-              <a:t>päringute</a:t>
-            </a:r>
-            <a:r>
-              <a:rPr lang="en-US" sz="2000" dirty="0">
-                <a:ea typeface="Inter"/>
-                <a:cs typeface="+mn-lt"/>
-              </a:rPr>
-              <a:t> </a:t>
-            </a:r>
-            <a:r>
-              <a:rPr lang="en-US" sz="2000" dirty="0" err="1">
-                <a:ea typeface="Inter"/>
-                <a:cs typeface="+mn-lt"/>
-              </a:rPr>
-              <a:t>jooksutamine</a:t>
-            </a:r>
-            <a:endParaRPr lang="en-US" sz="2000" dirty="0">
-              <a:ea typeface="Inter"/>
-              <a:cs typeface="+mn-lt"/>
-            </a:endParaRPr>
-          </a:p>
-          <a:p>
-            <a:pPr marL="800100" lvl="1">
-              <a:lnSpc>
-                <a:spcPct val="150000"/>
-              </a:lnSpc>
-              <a:buClr>
-                <a:srgbClr val="121212"/>
-              </a:buClr>
-            </a:pPr>
-            <a:r>
-              <a:rPr lang="en-US" sz="2000" dirty="0">
-                <a:cs typeface="+mn-lt"/>
-              </a:rPr>
-              <a:t>File </a:t>
-            </a:r>
-            <a:r>
-              <a:rPr lang="en-US" sz="2000" dirty="0">
-                <a:cs typeface="+mn-lt"/>
-                <a:sym typeface="Wingdings" panose="05000000000000000000" pitchFamily="2" charset="2"/>
-              </a:rPr>
-              <a:t> New text file  Select a language: SQL</a:t>
-            </a:r>
-          </a:p>
-          <a:p>
-            <a:pPr marL="800100" lvl="1">
-              <a:lnSpc>
-                <a:spcPct val="150000"/>
-              </a:lnSpc>
-              <a:buClr>
-                <a:srgbClr val="121212"/>
-              </a:buClr>
-            </a:pPr>
-            <a:r>
-              <a:rPr lang="en-US" sz="2000" dirty="0" err="1">
-                <a:cs typeface="+mn-lt"/>
-                <a:sym typeface="Wingdings" panose="05000000000000000000" pitchFamily="2" charset="2"/>
-              </a:rPr>
-              <a:t>Salvestamine</a:t>
-            </a:r>
-            <a:r>
-              <a:rPr lang="en-US" sz="2000" dirty="0">
-                <a:cs typeface="+mn-lt"/>
-                <a:sym typeface="Wingdings" panose="05000000000000000000" pitchFamily="2" charset="2"/>
-              </a:rPr>
-              <a:t>: File  Save as</a:t>
-            </a:r>
-          </a:p>
-          <a:p>
-            <a:pPr marL="800100" lvl="1">
-              <a:lnSpc>
-                <a:spcPct val="150000"/>
-              </a:lnSpc>
-              <a:buClr>
-                <a:srgbClr val="121212"/>
-              </a:buClr>
-            </a:pPr>
-            <a:r>
-              <a:rPr lang="en-US" sz="2000" dirty="0" err="1">
-                <a:cs typeface="+mn-lt"/>
-                <a:sym typeface="Wingdings" panose="05000000000000000000" pitchFamily="2" charset="2"/>
-              </a:rPr>
-              <a:t>Jooksutamisel</a:t>
-            </a:r>
-            <a:r>
-              <a:rPr lang="en-US" sz="2000" dirty="0">
-                <a:cs typeface="+mn-lt"/>
-                <a:sym typeface="Wingdings" panose="05000000000000000000" pitchFamily="2" charset="2"/>
-              </a:rPr>
-              <a:t> vali </a:t>
-            </a:r>
-            <a:r>
-              <a:rPr lang="en-US" sz="2000" dirty="0" err="1">
-                <a:cs typeface="+mn-lt"/>
-                <a:sym typeface="Wingdings" panose="05000000000000000000" pitchFamily="2" charset="2"/>
-              </a:rPr>
-              <a:t>õige</a:t>
-            </a:r>
-            <a:r>
-              <a:rPr lang="en-US" sz="2000" dirty="0">
-                <a:cs typeface="+mn-lt"/>
-                <a:sym typeface="Wingdings" panose="05000000000000000000" pitchFamily="2" charset="2"/>
-              </a:rPr>
-              <a:t> </a:t>
-            </a:r>
-            <a:r>
-              <a:rPr lang="en-US" sz="2000" dirty="0" err="1">
-                <a:cs typeface="+mn-lt"/>
-                <a:sym typeface="Wingdings" panose="05000000000000000000" pitchFamily="2" charset="2"/>
-              </a:rPr>
-              <a:t>andmebaas</a:t>
-            </a:r>
-            <a:r>
-              <a:rPr lang="en-US" sz="2000" dirty="0">
-                <a:cs typeface="+mn-lt"/>
-                <a:sym typeface="Wingdings" panose="05000000000000000000" pitchFamily="2" charset="2"/>
-              </a:rPr>
-              <a:t> ja </a:t>
-            </a:r>
-            <a:r>
-              <a:rPr lang="en-US" sz="2000" dirty="0" err="1">
-                <a:cs typeface="+mn-lt"/>
-                <a:sym typeface="Wingdings" panose="05000000000000000000" pitchFamily="2" charset="2"/>
-              </a:rPr>
-              <a:t>skeem</a:t>
-            </a:r>
-            <a:r>
-              <a:rPr lang="en-US" sz="2000" dirty="0">
-                <a:cs typeface="+mn-lt"/>
-                <a:sym typeface="Wingdings" panose="05000000000000000000" pitchFamily="2" charset="2"/>
-              </a:rPr>
-              <a:t> </a:t>
-            </a:r>
-            <a:r>
-              <a:rPr lang="en-US" sz="2000" dirty="0" err="1">
-                <a:cs typeface="+mn-lt"/>
-                <a:sym typeface="Wingdings" panose="05000000000000000000" pitchFamily="2" charset="2"/>
-              </a:rPr>
-              <a:t>ülevalt</a:t>
-            </a:r>
-            <a:endParaRPr lang="en-US" sz="2000" dirty="0">
-              <a:cs typeface="+mn-lt"/>
-            </a:endParaRPr>
-          </a:p>
-          <a:p>
-            <a:pPr marL="857250" lvl="1" indent="-342900">
-              <a:lnSpc>
-                <a:spcPct val="150000"/>
-              </a:lnSpc>
-              <a:buAutoNum type="arabicPeriod"/>
-            </a:pPr>
-            <a:endParaRPr lang="en-US" dirty="0">
-              <a:cs typeface="+mn-lt"/>
-            </a:endParaRPr>
-          </a:p>
-          <a:p>
-            <a:pPr marL="857250" lvl="1" indent="-342900">
-              <a:lnSpc>
-                <a:spcPct val="150000"/>
-              </a:lnSpc>
-              <a:buAutoNum type="arabicPeriod"/>
-            </a:pPr>
-            <a:endParaRPr lang="en-US" dirty="0">
-              <a:cs typeface="+mn-lt"/>
-            </a:endParaRPr>
-          </a:p>
-          <a:p>
-            <a:pPr marL="0" indent="0">
-              <a:buNone/>
-            </a:pPr>
-            <a:endParaRPr lang="en-US" dirty="0">
-              <a:cs typeface="+mn-lt"/>
-            </a:endParaRPr>
-          </a:p>
-          <a:p>
-            <a:endParaRPr lang="en-US" dirty="0">
-              <a:cs typeface="+mn-lt"/>
-            </a:endParaRPr>
-          </a:p>
-        </p:txBody>
-      </p:sp>
-    </p:spTree>
-    <p:extLst>
-      <p:ext uri="{BB962C8B-B14F-4D97-AF65-F5344CB8AC3E}">
-        <p14:creationId xmlns:p14="http://schemas.microsoft.com/office/powerpoint/2010/main" val="1821779248"/>
-      </p:ext>
-    </p:extLst>
-  </p:cSld>
-  <p:clrMapOvr>
-    <a:masterClrMapping/>
-  </p:clrMapOvr>
-</p:sld>
-</file>
-
 <file path=ppt/slides/slide2.xml><?xml version="1.0" encoding="utf-8"?>
 <p:sld xmlns:a="http://schemas.openxmlformats.org/drawingml/2006/main" xmlns:r="http://schemas.openxmlformats.org/officeDocument/2006/relationships" xmlns:p="http://schemas.openxmlformats.org/presentationml/2006/main">
   <p:cSld>
@@ -25929,7 +25329,7 @@
             <p:ph sz="quarter" idx="10"/>
             <p:extLst>
               <p:ext uri="{D42A27DB-BD31-4B8C-83A1-F6EECF244321}">
-                <p14:modId xmlns:p14="http://schemas.microsoft.com/office/powerpoint/2010/main" val="522584294"/>
+                <p14:modId xmlns:p14="http://schemas.microsoft.com/office/powerpoint/2010/main" val="3676927514"/>
               </p:ext>
             </p:extLst>
           </p:nvPr>
@@ -26492,46 +25892,46 @@
                         <a:buChar char="•"/>
                       </a:pPr>
                       <a:r>
-                        <a:rPr lang="en-US" sz="2400" b="0" i="0">
+                        <a:rPr lang="en-US" sz="2400" b="0" i="0" dirty="0">
                           <a:solidFill>
                             <a:srgbClr val="121212"/>
                           </a:solidFill>
                           <a:effectLst/>
                           <a:latin typeface="Inter"/>
                         </a:rPr>
-                        <a:t>13:15 – 14:45 – </a:t>
+                        <a:t>13:15 – 14:45 – Koolitus – </a:t>
                       </a:r>
                       <a:r>
-                        <a:rPr lang="en-US" sz="2400" b="0" i="0" err="1">
+                        <a:rPr lang="en-US" sz="2400" b="0" i="0" dirty="0" err="1">
                           <a:solidFill>
                             <a:srgbClr val="121212"/>
                           </a:solidFill>
                           <a:effectLst/>
                           <a:latin typeface="Inter"/>
                         </a:rPr>
-                        <a:t>Koolitus</a:t>
+                        <a:t>Tabelite</a:t>
                       </a:r>
                       <a:r>
-                        <a:rPr lang="en-US" sz="2400" b="0" i="0">
+                        <a:rPr lang="en-US" sz="2400" b="0" i="0" dirty="0">
                           <a:solidFill>
                             <a:srgbClr val="121212"/>
                           </a:solidFill>
                           <a:effectLst/>
                           <a:latin typeface="Inter"/>
                         </a:rPr>
-                        <a:t> – CRUD </a:t>
+                        <a:t> </a:t>
                       </a:r>
                       <a:r>
-                        <a:rPr lang="en-US" sz="2400" b="0" i="0" err="1">
+                        <a:rPr lang="en-US" sz="2400" b="0" i="0" dirty="0" err="1">
                           <a:solidFill>
                             <a:srgbClr val="121212"/>
                           </a:solidFill>
                           <a:effectLst/>
                           <a:latin typeface="Inter"/>
                         </a:rPr>
-                        <a:t>käsud</a:t>
+                        <a:t>ühendamine</a:t>
                       </a:r>
-                      <a:endParaRPr lang="en-US" b="0" i="0" err="1">
+                      <a:endParaRPr lang="en-US" b="0" i="0" dirty="0">
                         <a:solidFill>
                           <a:srgbClr val="121212"/>
                         </a:solidFill>
@@ -26678,24 +26078,74 @@
                         <a:buChar char="•"/>
                       </a:pPr>
                       <a:r>
-                        <a:rPr lang="en-US" sz="2400" b="0" i="0">
+                        <a:rPr lang="en-US" sz="2400" b="0" i="0" dirty="0">
                           <a:solidFill>
                             <a:srgbClr val="121212"/>
                           </a:solidFill>
                           <a:effectLst/>
                           <a:latin typeface="Inter"/>
                         </a:rPr>
-                        <a:t>15:00 – 16:30 – </a:t>
+                        <a:t>15:00 – 16:30 – Koolitus – </a:t>
                       </a:r>
                       <a:r>
-                        <a:rPr lang="en-US" sz="2400" b="0" i="0" err="1">
+                        <a:rPr lang="en-US" sz="2400" b="0" i="0" dirty="0" err="1">
                           <a:solidFill>
                             <a:srgbClr val="121212"/>
                           </a:solidFill>
                           <a:effectLst/>
                           <a:latin typeface="Inter"/>
                         </a:rPr>
-                        <a:t>Koolitus</a:t>
+                        <a:t>Tabeli</a:t>
+                      </a:r>
+                      <a:r>
+                        <a:rPr lang="en-US" sz="2400" b="0" i="0" dirty="0">
+                          <a:solidFill>
+                            <a:srgbClr val="121212"/>
+                          </a:solidFill>
+                          <a:effectLst/>
+                          <a:latin typeface="Inter"/>
+                        </a:rPr>
+                        <a:t> </a:t>
+                      </a:r>
+                      <a:r>
+                        <a:rPr lang="en-US" sz="2400" b="0" i="0" dirty="0" err="1">
+                          <a:solidFill>
+                            <a:srgbClr val="121212"/>
+                          </a:solidFill>
+                          <a:effectLst/>
+                          <a:latin typeface="Inter"/>
+                        </a:rPr>
+                        <a:t>loomine</a:t>
+                      </a:r>
+                      <a:r>
+                        <a:rPr lang="en-US" sz="2400" b="0" i="0" dirty="0">
+                          <a:solidFill>
+                            <a:srgbClr val="121212"/>
+                          </a:solidFill>
+                          <a:effectLst/>
+                          <a:latin typeface="Inter"/>
+                        </a:rPr>
+                        <a:t> ja </a:t>
+                      </a:r>
+                      <a:r>
+                        <a:rPr lang="en-US" sz="2400" b="0" i="0" dirty="0" err="1">
+                          <a:solidFill>
+                            <a:srgbClr val="121212"/>
+                          </a:solidFill>
+                          <a:effectLst/>
+                          <a:latin typeface="Inter"/>
+                        </a:rPr>
+                        <a:t>uuendamine</a:t>
+                      </a:r>
+                      <a:r>
+                        <a:rPr lang="en-US" sz="2400" b="0" i="0" dirty="0">
+                          <a:solidFill>
+                            <a:srgbClr val="121212"/>
+                          </a:solidFill>
+                          <a:effectLst/>
+                          <a:latin typeface="Inter"/>
+                        </a:rPr>
+                        <a:t> SQL </a:t>
                       </a:r>
                       <a:r>
                         <a:rPr lang="en-US" sz="2400" b="0" i="0">
@@ -26705,39 +26155,9 @@
                           <a:effectLst/>
                           <a:latin typeface="Inter"/>
                         </a:rPr>
-                        <a:t> – Visual Studio Code </a:t>
+                        <a:t>abil</a:t>
                       </a:r>
-                      <a:r>
-                        <a:rPr lang="en-US" sz="2400" b="0" i="0" err="1">
-                          <a:solidFill>
-                            <a:srgbClr val="121212"/>
-                          </a:solidFill>
-                          <a:effectLst/>
-                          <a:latin typeface="Inter"/>
-                        </a:rPr>
-                        <a:t>andmebaasi</a:t>
-                      </a:r>
-                      <a:r>
-                        <a:rPr lang="en-US" sz="2400" b="0" i="0">
-                          <a:solidFill>
-                            <a:srgbClr val="121212"/>
-                          </a:solidFill>
-                          <a:effectLst/>
-                          <a:latin typeface="Inter"/>
-                        </a:rPr>
-                        <a:t> </a:t>
-                      </a:r>
-                      <a:r>
-                        <a:rPr lang="en-US" sz="2400" b="0" i="0" err="1">
-                          <a:solidFill>
-                            <a:srgbClr val="121212"/>
-                          </a:solidFill>
-                          <a:effectLst/>
-                          <a:latin typeface="Inter"/>
-                        </a:rPr>
-                        <a:t>päringuteks</a:t>
-                      </a:r>
-                      <a:endParaRPr lang="en-US" b="0" i="0" err="1">
+                      <a:endParaRPr lang="en-US" b="0" i="0" dirty="0">
                         <a:solidFill>
                           <a:srgbClr val="121212"/>
                         </a:solidFill>
@@ -27228,6 +26648,34 @@
                 <a:ea typeface="Inter"/>
                 <a:cs typeface="+mn-lt"/>
               </a:rPr>
+              <a:t>Database </a:t>
+            </a:r>
+            <a:r>
+              <a:rPr lang="en-US" dirty="0">
+                <a:ea typeface="Inter"/>
+                <a:cs typeface="+mn-lt"/>
+                <a:sym typeface="Wingdings" panose="05000000000000000000" pitchFamily="2" charset="2"/>
+              </a:rPr>
+              <a:t> New database connection</a:t>
+            </a:r>
+            <a:endParaRPr lang="en-US" dirty="0">
+              <a:ea typeface="Inter"/>
+              <a:cs typeface="+mn-lt"/>
+            </a:endParaRPr>
+          </a:p>
+          <a:p>
+            <a:pPr marL="1257300" lvl="2" indent="-342900">
+              <a:lnSpc>
+                <a:spcPct val="150000"/>
+              </a:lnSpc>
+              <a:buFont typeface="Wingdings"/>
+              <a:buChar char="§"/>
+            </a:pPr>
+            <a:r>
+              <a:rPr lang="en-US" dirty="0">
+                <a:ea typeface="Inter"/>
+                <a:cs typeface="+mn-lt"/>
+              </a:rPr>
               <a:t>Vali PostgreSQL</a:t>
             </a:r>
           </a:p>
@@ -27418,13 +26866,7 @@
   <p:cSld>
     <p:spTree>
       <p:nvGrpSpPr>
-        <p:cNvPr id="1" name="">
-          <a:extLst>
-            <a:ext uri="{FF2B5EF4-FFF2-40B4-BE49-F238E27FC236}">
-              <a16:creationId xmlns:a16="http://schemas.microsoft.com/office/drawing/2014/main" id="{CB468293-66B4-9531-CEB8-1310D457F65A}"/>
-            </a:ext>
-          </a:extLst>
-        </p:cNvPr>
+        <p:cNvPr id="1" name=""/>
         <p:cNvGrpSpPr/>
         <p:nvPr/>
       </p:nvGrpSpPr>
@@ -27441,7 +26883,7 @@
           <p:cNvPr id="2" name="Title 1">
             <a:extLst>
               <a:ext uri="{FF2B5EF4-FFF2-40B4-BE49-F238E27FC236}">
-                <a16:creationId xmlns:a16="http://schemas.microsoft.com/office/drawing/2014/main" id="{C529379B-8B4D-351D-FB50-463F72441597}"/>
+                <a16:creationId xmlns:a16="http://schemas.microsoft.com/office/drawing/2014/main" id="{E506CDB2-9145-1517-74B9-1D85A1A094E0}"/>
               </a:ext>
             </a:extLst>
           </p:cNvPr>
@@ -27458,92 +26900,12 @@
           <a:lstStyle/>
           <a:p>
             <a:r>
-              <a:rPr lang="en-US"/>
-              <a:t>SQL – </a:t>
-            </a:r>
-            <a:r>
-              <a:rPr lang="en-US" err="1"/>
-              <a:t>tabelite</a:t>
-            </a:r>
-            <a:r>
-              <a:rPr lang="en-US"/>
-              <a:t> </a:t>
-            </a:r>
-            <a:r>
-              <a:rPr lang="en-US" err="1"/>
-              <a:t>ühendamine</a:t>
-            </a:r>
-          </a:p>
-        </p:txBody>
-      </p:sp>
-      <p:pic>
-        <p:nvPicPr>
-          <p:cNvPr id="4" name="Content Placeholder 3" descr="A diagram of a diagram&#10;&#10;AI-generated content may be incorrect.">
-            <a:extLst>
-              <a:ext uri="{FF2B5EF4-FFF2-40B4-BE49-F238E27FC236}">
-                <a16:creationId xmlns:a16="http://schemas.microsoft.com/office/drawing/2014/main" id="{CD786AF0-AFD6-3E5D-F34D-476B12CA5EE5}"/>
-              </a:ext>
-            </a:extLst>
-          </p:cNvPr>
-          <p:cNvPicPr>
-            <a:picLocks noGrp="1" noChangeAspect="1"/>
-          </p:cNvPicPr>
-          <p:nvPr>
-            <p:ph sz="quarter" idx="10"/>
-          </p:nvPr>
-        </p:nvPicPr>
-        <p:blipFill>
-          <a:blip r:embed="rId2"/>
-          <a:stretch>
-            <a:fillRect/>
-          </a:stretch>
-        </p:blipFill>
-        <p:spPr>
-          <a:xfrm>
-            <a:off x="1105773" y="978462"/>
-            <a:ext cx="3946694" cy="5129944"/>
-          </a:xfrm>
-          <a:prstGeom prst="rect">
-            <a:avLst/>
-          </a:prstGeom>
-        </p:spPr>
-      </p:pic>
-      <p:sp>
-        <p:nvSpPr>
-          <p:cNvPr id="3" name="TextBox 2">
-            <a:extLst>
-              <a:ext uri="{FF2B5EF4-FFF2-40B4-BE49-F238E27FC236}">
-                <a16:creationId xmlns:a16="http://schemas.microsoft.com/office/drawing/2014/main" id="{9CC3A1CD-3F5D-D5BD-4A3E-F94218F8E9CB}"/>
-              </a:ext>
-            </a:extLst>
-          </p:cNvPr>
-          <p:cNvSpPr txBox="1"/>
-          <p:nvPr/>
-        </p:nvSpPr>
-        <p:spPr>
-          <a:xfrm>
-            <a:off x="6007608" y="1444752"/>
-            <a:ext cx="5742432" cy="1290225"/>
-          </a:xfrm>
-          <a:prstGeom prst="rect">
-            <a:avLst/>
-          </a:prstGeom>
-          <a:noFill/>
-        </p:spPr>
-        <p:txBody>
-          <a:bodyPr wrap="square" rtlCol="0">
-            <a:spAutoFit/>
-          </a:bodyPr>
-          <a:lstStyle/>
-          <a:p>
-            <a:pPr>
-              <a:lnSpc>
-                <a:spcPct val="150000"/>
-              </a:lnSpc>
-            </a:pPr>
+              <a:rPr lang="en-US" dirty="0"/>
+              <a:t>PostgreSQL </a:t>
+            </a:r>
             <a:r>
               <a:rPr lang="en-US" dirty="0" err="1"/>
-              <a:t>Vaatame</a:t>
+              <a:t>baasi</a:t>
             </a:r>
             <a:r>
               <a:rPr lang="en-US" dirty="0"/>
@@ -27551,145 +26913,18 @@
             </a:r>
             <a:r>
               <a:rPr lang="en-US" dirty="0" err="1"/>
-              <a:t>loogikat</a:t>
-            </a:r>
-            <a:r>
-              <a:rPr lang="en-US" dirty="0"/>
-              <a:t> </a:t>
-            </a:r>
-            <a:r>
-              <a:rPr lang="en-US" dirty="0" err="1"/>
-              <a:t>näite</a:t>
-            </a:r>
-            <a:r>
-              <a:rPr lang="en-US" dirty="0"/>
-              <a:t> </a:t>
-            </a:r>
-            <a:r>
-              <a:rPr lang="en-US" dirty="0" err="1"/>
-              <a:t>põhjal</a:t>
-            </a:r>
-            <a:r>
-              <a:rPr lang="en-US" dirty="0"/>
-              <a:t>: </a:t>
-            </a:r>
-          </a:p>
-          <a:p>
-            <a:pPr marL="285750" indent="-285750">
-              <a:lnSpc>
-                <a:spcPct val="150000"/>
-              </a:lnSpc>
-              <a:buFont typeface="Arial" panose="020B0604020202020204" pitchFamily="34" charset="0"/>
-              <a:buChar char="•"/>
-            </a:pPr>
-            <a:r>
-              <a:rPr lang="en-US" dirty="0" err="1"/>
-              <a:t>Github</a:t>
-            </a:r>
-            <a:r>
-              <a:rPr lang="en-US" dirty="0"/>
-              <a:t> </a:t>
-            </a:r>
-            <a:r>
-              <a:rPr lang="en-US" dirty="0">
-                <a:sym typeface="Wingdings" panose="05000000000000000000" pitchFamily="2" charset="2"/>
-              </a:rPr>
-              <a:t> Day7: JOINS_loogika_kahe_tabeli_puhul.XLSX</a:t>
+              <a:t>nimetamispraktikad</a:t>
             </a:r>
             <a:endParaRPr lang="et-EE" dirty="0"/>
-          </a:p>
-        </p:txBody>
-      </p:sp>
-    </p:spTree>
-    <p:extLst>
-      <p:ext uri="{BB962C8B-B14F-4D97-AF65-F5344CB8AC3E}">
-        <p14:creationId xmlns:p14="http://schemas.microsoft.com/office/powerpoint/2010/main" val="1137972440"/>
-      </p:ext>
-    </p:extLst>
-  </p:cSld>
-  <p:clrMapOvr>
-    <a:masterClrMapping/>
-  </p:clrMapOvr>
-</p:sld>
-</file>
-
-<file path=ppt/slides/slide5.xml><?xml version="1.0" encoding="utf-8"?>
-<p:sld xmlns:a="http://schemas.openxmlformats.org/drawingml/2006/main" xmlns:r="http://schemas.openxmlformats.org/officeDocument/2006/relationships" xmlns:p="http://schemas.openxmlformats.org/presentationml/2006/main">
-  <p:cSld>
-    <p:spTree>
-      <p:nvGrpSpPr>
-        <p:cNvPr id="1" name="">
-          <a:extLst>
-            <a:ext uri="{FF2B5EF4-FFF2-40B4-BE49-F238E27FC236}">
-              <a16:creationId xmlns:a16="http://schemas.microsoft.com/office/drawing/2014/main" id="{C62ABBA9-1443-F441-E763-4D5B7BA77B15}"/>
-            </a:ext>
-          </a:extLst>
-        </p:cNvPr>
-        <p:cNvGrpSpPr/>
-        <p:nvPr/>
-      </p:nvGrpSpPr>
-      <p:grpSpPr>
-        <a:xfrm>
-          <a:off x="0" y="0"/>
-          <a:ext cx="0" cy="0"/>
-          <a:chOff x="0" y="0"/>
-          <a:chExt cx="0" cy="0"/>
-        </a:xfrm>
-      </p:grpSpPr>
-      <p:sp>
-        <p:nvSpPr>
-          <p:cNvPr id="2" name="Title 1">
-            <a:extLst>
-              <a:ext uri="{FF2B5EF4-FFF2-40B4-BE49-F238E27FC236}">
-                <a16:creationId xmlns:a16="http://schemas.microsoft.com/office/drawing/2014/main" id="{3ED0282F-63C7-16AB-2536-DBC56444FC2F}"/>
-              </a:ext>
-            </a:extLst>
-          </p:cNvPr>
-          <p:cNvSpPr>
-            <a:spLocks noGrp="1"/>
-          </p:cNvSpPr>
-          <p:nvPr>
-            <p:ph type="ctrTitle"/>
-          </p:nvPr>
-        </p:nvSpPr>
-        <p:spPr/>
-        <p:txBody>
-          <a:bodyPr/>
-          <a:lstStyle/>
-          <a:p>
-            <a:r>
-              <a:rPr lang="en-US"/>
-              <a:t>SQL –  </a:t>
-            </a:r>
-            <a:r>
-              <a:rPr lang="en-US" err="1"/>
-              <a:t>päringu</a:t>
-            </a:r>
-            <a:r>
-              <a:rPr lang="en-US"/>
-              <a:t> </a:t>
-            </a:r>
-            <a:r>
-              <a:rPr lang="en-US" err="1"/>
-              <a:t>teostamise</a:t>
-            </a:r>
-            <a:r>
-              <a:rPr lang="en-US"/>
-              <a:t> </a:t>
-            </a:r>
-            <a:r>
-              <a:rPr lang="en-US" err="1"/>
-              <a:t>järjekord</a:t>
-            </a:r>
           </a:p>
         </p:txBody>
       </p:sp>
       <p:sp>
         <p:nvSpPr>
-          <p:cNvPr id="5" name="Content Placeholder 4">
+          <p:cNvPr id="3" name="Content Placeholder 2">
             <a:extLst>
               <a:ext uri="{FF2B5EF4-FFF2-40B4-BE49-F238E27FC236}">
-                <a16:creationId xmlns:a16="http://schemas.microsoft.com/office/drawing/2014/main" id="{8517FEC3-1EB7-A1BD-48DC-8132A7DC740D}"/>
+                <a16:creationId xmlns:a16="http://schemas.microsoft.com/office/drawing/2014/main" id="{B563FFA0-927B-E444-49B4-38B1CC7C83D1}"/>
               </a:ext>
             </a:extLst>
           </p:cNvPr>
@@ -27705,757 +26940,254 @@
           <a:bodyPr/>
           <a:lstStyle/>
           <a:p>
-            <a:pPr marL="0" indent="0">
-              <a:buNone/>
+            <a:pPr>
+              <a:lnSpc>
+                <a:spcPct val="150000"/>
+              </a:lnSpc>
             </a:pPr>
             <a:r>
-              <a:rPr lang="en-US">
-                <a:ea typeface="Inter"/>
-              </a:rPr>
-              <a:t>1. FROM/JOIN </a:t>
+              <a:rPr lang="en-US" sz="2400" dirty="0" err="1"/>
+              <a:t>Tabelite</a:t>
+            </a:r>
+            <a:r>
+              <a:rPr lang="en-US" sz="2400" dirty="0"/>
+              <a:t> ja </a:t>
+            </a:r>
+            <a:r>
+              <a:rPr lang="en-US" sz="2400" dirty="0" err="1"/>
+              <a:t>tulpade</a:t>
+            </a:r>
+            <a:r>
+              <a:rPr lang="en-US" sz="2400" dirty="0"/>
+              <a:t> </a:t>
+            </a:r>
+            <a:r>
+              <a:rPr lang="en-US" sz="2400" dirty="0" err="1"/>
+              <a:t>nimed</a:t>
+            </a:r>
+            <a:r>
+              <a:rPr lang="en-US" sz="2400" dirty="0"/>
+              <a:t>: </a:t>
             </a:r>
           </a:p>
           <a:p>
             <a:pPr lvl="1">
-              <a:buFont typeface="Wingdings" panose="020B0502030000000004" pitchFamily="34" charset="0"/>
-              <a:buChar char="Ø"/>
+              <a:lnSpc>
+                <a:spcPct val="150000"/>
+              </a:lnSpc>
             </a:pPr>
             <a:r>
-              <a:rPr lang="en-US" err="1">
-                <a:ea typeface="Inter"/>
-              </a:rPr>
-              <a:t>Defineerib</a:t>
-            </a:r>
-            <a:r>
-              <a:rPr lang="en-US">
-                <a:ea typeface="Inter"/>
-              </a:rPr>
-              <a:t>, </a:t>
-            </a:r>
-            <a:r>
-              <a:rPr lang="en-US" err="1">
-                <a:ea typeface="Inter"/>
-              </a:rPr>
-              <a:t>milliseid</a:t>
-            </a:r>
-            <a:r>
-              <a:rPr lang="en-US">
-                <a:ea typeface="Inter"/>
-              </a:rPr>
+              <a:rPr lang="en-US" sz="2400" dirty="0"/>
+              <a:t>Parim </a:t>
+            </a:r>
+            <a:r>
+              <a:rPr lang="en-US" sz="2400" dirty="0" err="1"/>
+              <a:t>praktika</a:t>
+            </a:r>
+            <a:r>
+              <a:rPr lang="en-US" sz="2400" dirty="0"/>
+              <a:t>: </a:t>
+            </a:r>
+            <a:r>
+              <a:rPr lang="et-EE" sz="2400" b="1" dirty="0" err="1"/>
+              <a:t>lowercase_with_underscores</a:t>
+            </a:r>
+            <a:r>
+              <a:rPr lang="et-EE" sz="2400" dirty="0"/>
               <a:t> </a:t>
             </a:r>
-            <a:r>
-              <a:rPr lang="en-US" err="1">
-                <a:ea typeface="Inter"/>
-              </a:rPr>
-              <a:t>tabeleid</a:t>
-            </a:r>
-            <a:r>
-              <a:rPr lang="en-US">
-                <a:ea typeface="Inter"/>
-              </a:rPr>
-              <a:t> </a:t>
-            </a:r>
-            <a:r>
-              <a:rPr lang="en-US" err="1">
-                <a:ea typeface="Inter"/>
-              </a:rPr>
-              <a:t>kasutatakse</a:t>
-            </a:r>
-            <a:r>
-              <a:rPr lang="en-US">
-                <a:ea typeface="Inter"/>
-              </a:rPr>
-              <a:t>.</a:t>
-            </a:r>
-          </a:p>
-          <a:p>
-            <a:pPr marL="0" indent="0">
-              <a:buNone/>
-            </a:pPr>
-            <a:r>
-              <a:rPr lang="en-US">
-                <a:ea typeface="Inter"/>
-              </a:rPr>
-              <a:t>2. WHERE </a:t>
-            </a:r>
+            <a:endParaRPr lang="en-US" sz="2400" dirty="0"/>
           </a:p>
           <a:p>
             <a:pPr lvl="1">
-              <a:buFont typeface="Wingdings" panose="020B0502030000000004" pitchFamily="34" charset="0"/>
-              <a:buChar char="Ø"/>
+              <a:lnSpc>
+                <a:spcPct val="150000"/>
+              </a:lnSpc>
             </a:pPr>
             <a:r>
-              <a:rPr lang="en-US" err="1">
-                <a:ea typeface="Inter"/>
-              </a:rPr>
-              <a:t>Filtreerib</a:t>
-            </a:r>
-            <a:r>
-              <a:rPr lang="en-US">
-                <a:ea typeface="Inter"/>
-              </a:rPr>
+              <a:rPr lang="en-US" sz="2400" dirty="0" err="1"/>
+              <a:t>Nt</a:t>
+            </a:r>
+            <a:r>
+              <a:rPr lang="en-US" sz="2400" dirty="0"/>
               <a:t> </a:t>
             </a:r>
             <a:r>
-              <a:rPr lang="en-US" err="1">
-                <a:ea typeface="Inter"/>
-              </a:rPr>
-              <a:t>välja</a:t>
-            </a:r>
-            <a:r>
-              <a:rPr lang="en-US">
-                <a:ea typeface="Inter"/>
-              </a:rPr>
+              <a:rPr lang="en-US" sz="2400" dirty="0" err="1"/>
+              <a:t>tabeli</a:t>
+            </a:r>
+            <a:r>
+              <a:rPr lang="en-US" sz="2400" dirty="0"/>
               <a:t> </a:t>
             </a:r>
             <a:r>
-              <a:rPr lang="en-US" err="1">
-                <a:ea typeface="Inter"/>
-              </a:rPr>
-              <a:t>andmeread</a:t>
-            </a:r>
-            <a:r>
-              <a:rPr lang="en-US">
-                <a:ea typeface="Inter"/>
-              </a:rPr>
-              <a:t>, mis </a:t>
-            </a:r>
-            <a:r>
-              <a:rPr lang="en-US" err="1">
-                <a:ea typeface="Inter"/>
-              </a:rPr>
-              <a:t>ei</a:t>
-            </a:r>
-            <a:r>
-              <a:rPr lang="en-US">
-                <a:ea typeface="Inter"/>
-              </a:rPr>
-              <a:t> </a:t>
-            </a:r>
-            <a:r>
-              <a:rPr lang="en-US" err="1">
-                <a:ea typeface="Inter"/>
-              </a:rPr>
-              <a:t>vasta</a:t>
-            </a:r>
-            <a:r>
-              <a:rPr lang="en-US">
-                <a:ea typeface="Inter"/>
-              </a:rPr>
-              <a:t> </a:t>
-            </a:r>
-            <a:r>
-              <a:rPr lang="en-US" err="1">
-                <a:ea typeface="Inter"/>
-              </a:rPr>
-              <a:t>tingimustele</a:t>
-            </a:r>
-            <a:r>
-              <a:rPr lang="en-US">
-                <a:ea typeface="Inter"/>
-              </a:rPr>
-              <a:t>.</a:t>
-            </a:r>
-            <a:endParaRPr lang="en-US"/>
-          </a:p>
-          <a:p>
-            <a:pPr marL="0" indent="0">
-              <a:buNone/>
-            </a:pPr>
-            <a:r>
-              <a:rPr lang="en-US">
-                <a:ea typeface="Inter"/>
-              </a:rPr>
-              <a:t>3. GROUP BY </a:t>
-            </a:r>
+              <a:rPr lang="en-US" sz="2400" dirty="0" err="1"/>
+              <a:t>nimed</a:t>
+            </a:r>
+            <a:r>
+              <a:rPr lang="en-US" sz="2400" dirty="0"/>
+              <a:t>: </a:t>
+            </a:r>
+            <a:r>
+              <a:rPr lang="en-US" sz="2400" dirty="0" err="1"/>
+              <a:t>sales_table</a:t>
+            </a:r>
+            <a:r>
+              <a:rPr lang="en-US" sz="2400" dirty="0"/>
+              <a:t>, </a:t>
+            </a:r>
+            <a:r>
+              <a:rPr lang="en-US" sz="2400" dirty="0" err="1"/>
+              <a:t>customer_table</a:t>
+            </a:r>
+            <a:r>
+              <a:rPr lang="en-US" sz="2400" dirty="0"/>
+              <a:t>, </a:t>
+            </a:r>
+            <a:r>
+              <a:rPr lang="en-US" sz="2400" dirty="0" err="1"/>
+              <a:t>date_table</a:t>
+            </a:r>
+            <a:endParaRPr lang="en-US" sz="2400" dirty="0"/>
           </a:p>
           <a:p>
             <a:pPr lvl="1">
-              <a:buFont typeface="Wingdings" panose="020B0502030000000004" pitchFamily="34" charset="0"/>
-              <a:buChar char="Ø"/>
+              <a:lnSpc>
+                <a:spcPct val="150000"/>
+              </a:lnSpc>
             </a:pPr>
             <a:r>
-              <a:rPr lang="en-US" err="1">
-                <a:ea typeface="Inter"/>
-              </a:rPr>
-              <a:t>Grupeerib</a:t>
-            </a:r>
-            <a:r>
-              <a:rPr lang="en-US">
-                <a:ea typeface="Inter"/>
-              </a:rPr>
+              <a:rPr lang="en-US" sz="2400" dirty="0" err="1"/>
+              <a:t>Nt</a:t>
+            </a:r>
+            <a:r>
+              <a:rPr lang="en-US" sz="2400" dirty="0"/>
               <a:t> </a:t>
             </a:r>
             <a:r>
-              <a:rPr lang="en-US" err="1">
-                <a:ea typeface="Inter"/>
-              </a:rPr>
-              <a:t>andmeread</a:t>
-            </a:r>
-            <a:r>
-              <a:rPr lang="en-US">
-                <a:ea typeface="Inter"/>
-              </a:rPr>
-              <a:t>.</a:t>
-            </a:r>
-            <a:endParaRPr lang="en-US"/>
+              <a:rPr lang="en-US" sz="2400" dirty="0" err="1"/>
+              <a:t>tulpade</a:t>
+            </a:r>
+            <a:r>
+              <a:rPr lang="en-US" sz="2400" dirty="0"/>
+              <a:t> </a:t>
+            </a:r>
+            <a:r>
+              <a:rPr lang="en-US" sz="2400" dirty="0" err="1"/>
+              <a:t>nimed</a:t>
+            </a:r>
+            <a:r>
+              <a:rPr lang="en-US" sz="2400" dirty="0"/>
+              <a:t>: </a:t>
+            </a:r>
+            <a:r>
+              <a:rPr lang="en-US" sz="2400" dirty="0" err="1"/>
+              <a:t>sale_id</a:t>
+            </a:r>
+            <a:r>
+              <a:rPr lang="en-US" sz="2400" dirty="0"/>
+              <a:t>, </a:t>
+            </a:r>
+            <a:r>
+              <a:rPr lang="en-US" sz="2400" dirty="0" err="1"/>
+              <a:t>customer_id</a:t>
+            </a:r>
+            <a:r>
+              <a:rPr lang="en-US" sz="2400" dirty="0"/>
+              <a:t>, </a:t>
+            </a:r>
+            <a:r>
+              <a:rPr lang="en-US" sz="2400" dirty="0" err="1"/>
+              <a:t>unit_price</a:t>
+            </a:r>
+            <a:endParaRPr lang="en-US" sz="2400" dirty="0"/>
           </a:p>
           <a:p>
-            <a:pPr marL="0" indent="0">
-              <a:buNone/>
+            <a:pPr>
+              <a:lnSpc>
+                <a:spcPct val="150000"/>
+              </a:lnSpc>
             </a:pPr>
             <a:r>
-              <a:rPr lang="en-US">
-                <a:ea typeface="Inter"/>
-              </a:rPr>
-              <a:t>4. HAVING </a:t>
-            </a:r>
-          </a:p>
-          <a:p>
-            <a:pPr marL="800100" lvl="1">
-              <a:buFont typeface="Wingdings" panose="020B0502030000000004" pitchFamily="34" charset="0"/>
-              <a:buChar char="Ø"/>
-            </a:pPr>
-            <a:r>
-              <a:rPr lang="en-US" err="1">
-                <a:ea typeface="Inter"/>
-              </a:rPr>
-              <a:t>Filtreerib</a:t>
-            </a:r>
-            <a:r>
-              <a:rPr lang="en-US">
-                <a:ea typeface="Inter"/>
-              </a:rPr>
+              <a:rPr lang="en-US" sz="2400" dirty="0"/>
+              <a:t>Kui on </a:t>
+            </a:r>
+            <a:r>
+              <a:rPr lang="en-US" sz="2400" dirty="0" err="1"/>
+              <a:t>suurtähed</a:t>
+            </a:r>
+            <a:r>
+              <a:rPr lang="en-US" sz="2400" dirty="0"/>
               <a:t> </a:t>
             </a:r>
             <a:r>
-              <a:rPr lang="en-US" err="1">
-                <a:ea typeface="Inter"/>
-              </a:rPr>
-              <a:t>välja</a:t>
-            </a:r>
-            <a:r>
-              <a:rPr lang="en-US">
-                <a:ea typeface="Inter"/>
-              </a:rPr>
+              <a:rPr lang="en-US" sz="2400" dirty="0" err="1"/>
+              <a:t>või</a:t>
+            </a:r>
+            <a:r>
+              <a:rPr lang="en-US" sz="2400" dirty="0"/>
               <a:t> </a:t>
             </a:r>
             <a:r>
-              <a:rPr lang="en-US" err="1">
-                <a:ea typeface="Inter"/>
-              </a:rPr>
-              <a:t>grupeeritud</a:t>
-            </a:r>
-            <a:r>
-              <a:rPr lang="en-US">
-                <a:ea typeface="Inter"/>
-              </a:rPr>
+              <a:rPr lang="en-US" sz="2400" dirty="0" err="1"/>
+              <a:t>väike</a:t>
+            </a:r>
+            <a:r>
+              <a:rPr lang="en-US" sz="2400" dirty="0"/>
+              <a:t>-ja </a:t>
+            </a:r>
+            <a:r>
+              <a:rPr lang="en-US" sz="2400" dirty="0" err="1"/>
+              <a:t>suurtähed</a:t>
+            </a:r>
+            <a:r>
+              <a:rPr lang="en-US" sz="2400" dirty="0"/>
               <a:t> </a:t>
             </a:r>
             <a:r>
-              <a:rPr lang="en-US" err="1">
-                <a:ea typeface="Inter"/>
-              </a:rPr>
-              <a:t>andmeread</a:t>
-            </a:r>
-            <a:r>
-              <a:rPr lang="en-US">
-                <a:ea typeface="Inter"/>
-              </a:rPr>
-              <a:t>, mis </a:t>
-            </a:r>
-            <a:r>
-              <a:rPr lang="en-US" err="1">
-                <a:ea typeface="Inter"/>
-              </a:rPr>
-              <a:t>ei</a:t>
-            </a:r>
-            <a:r>
-              <a:rPr lang="en-US">
-                <a:ea typeface="Inter"/>
-              </a:rPr>
+              <a:rPr lang="en-US" sz="2400" dirty="0" err="1"/>
+              <a:t>segamini</a:t>
+            </a:r>
+            <a:r>
+              <a:rPr lang="en-US" sz="2400" dirty="0"/>
+              <a:t>, </a:t>
+            </a:r>
+            <a:r>
+              <a:rPr lang="en-US" sz="2400" dirty="0" err="1"/>
+              <a:t>siis</a:t>
+            </a:r>
+            <a:r>
+              <a:rPr lang="en-US" sz="2400" dirty="0"/>
               <a:t> </a:t>
             </a:r>
             <a:r>
-              <a:rPr lang="en-US" err="1">
-                <a:ea typeface="Inter"/>
-              </a:rPr>
-              <a:t>vasta</a:t>
-            </a:r>
-            <a:r>
-              <a:rPr lang="en-US">
-                <a:ea typeface="Inter"/>
-              </a:rPr>
+              <a:rPr lang="en-US" sz="2400" dirty="0" err="1"/>
+              <a:t>tulevad</a:t>
+            </a:r>
+            <a:r>
+              <a:rPr lang="en-US" sz="2400" dirty="0"/>
               <a:t> </a:t>
             </a:r>
             <a:r>
-              <a:rPr lang="en-US" err="1">
-                <a:ea typeface="Inter"/>
-              </a:rPr>
-              <a:t>tingimustele</a:t>
-            </a:r>
-            <a:r>
-              <a:rPr lang="en-US">
-                <a:ea typeface="Inter"/>
-              </a:rPr>
-              <a:t>.</a:t>
-            </a:r>
-          </a:p>
-          <a:p>
-            <a:pPr marL="0" indent="0">
-              <a:buNone/>
-            </a:pPr>
-            <a:r>
-              <a:rPr lang="en-US">
-                <a:ea typeface="Inter"/>
-              </a:rPr>
-              <a:t>5. SELECT </a:t>
-            </a:r>
-          </a:p>
-          <a:p>
-            <a:pPr marL="800100" lvl="1">
-              <a:buFont typeface="Wingdings" panose="020B0502030000000004" pitchFamily="34" charset="0"/>
-              <a:buChar char="Ø"/>
-            </a:pPr>
-            <a:r>
-              <a:rPr lang="en-US" err="1">
-                <a:ea typeface="Inter"/>
-              </a:rPr>
-              <a:t>Valib</a:t>
-            </a:r>
-            <a:r>
-              <a:rPr lang="en-US">
-                <a:ea typeface="Inter"/>
-              </a:rPr>
+              <a:rPr lang="en-US" sz="2400" dirty="0" err="1"/>
+              <a:t>ümber</a:t>
+            </a:r>
+            <a:r>
+              <a:rPr lang="en-US" sz="2400" dirty="0"/>
               <a:t> </a:t>
             </a:r>
             <a:r>
-              <a:rPr lang="en-US" err="1">
-                <a:ea typeface="Inter"/>
-              </a:rPr>
-              <a:t>tulbad</a:t>
-            </a:r>
-            <a:r>
-              <a:rPr lang="en-US">
-                <a:ea typeface="Inter"/>
-              </a:rPr>
-              <a:t>, </a:t>
-            </a:r>
-            <a:r>
-              <a:rPr lang="en-US" err="1">
-                <a:ea typeface="Inter"/>
-              </a:rPr>
-              <a:t>mida</a:t>
-            </a:r>
-            <a:r>
-              <a:rPr lang="en-US">
-                <a:ea typeface="Inter"/>
-              </a:rPr>
-              <a:t> </a:t>
-            </a:r>
-            <a:r>
-              <a:rPr lang="en-US" err="1">
-                <a:ea typeface="Inter"/>
-              </a:rPr>
-              <a:t>näidata</a:t>
-            </a:r>
-            <a:r>
-              <a:rPr lang="en-US">
-                <a:ea typeface="Inter"/>
-              </a:rPr>
-              <a:t>.</a:t>
-            </a:r>
-          </a:p>
-          <a:p>
-            <a:pPr marL="0" indent="0">
-              <a:buNone/>
-            </a:pPr>
-            <a:r>
-              <a:rPr lang="en-US">
-                <a:ea typeface="Inter"/>
-              </a:rPr>
-              <a:t>6. ORDER BY </a:t>
-            </a:r>
-          </a:p>
-          <a:p>
-            <a:pPr marL="800100" lvl="1">
-              <a:buClr>
-                <a:srgbClr val="121212"/>
-              </a:buClr>
-              <a:buFont typeface="Wingdings" panose="020B0502030000000004" pitchFamily="34" charset="0"/>
-              <a:buChar char="Ø"/>
-            </a:pPr>
-            <a:r>
-              <a:rPr lang="en-US" err="1">
-                <a:ea typeface="Inter"/>
-              </a:rPr>
-              <a:t>Sorteerib</a:t>
-            </a:r>
-            <a:r>
-              <a:rPr lang="en-US">
-                <a:ea typeface="Inter"/>
-              </a:rPr>
-              <a:t> </a:t>
-            </a:r>
-            <a:r>
-              <a:rPr lang="en-US" err="1">
-                <a:ea typeface="Inter"/>
-              </a:rPr>
-              <a:t>valitud</a:t>
-            </a:r>
-            <a:r>
-              <a:rPr lang="en-US">
-                <a:ea typeface="Inter"/>
-              </a:rPr>
-              <a:t> </a:t>
-            </a:r>
-            <a:r>
-              <a:rPr lang="en-US" err="1">
-                <a:ea typeface="Inter"/>
-              </a:rPr>
-              <a:t>andmeread</a:t>
-            </a:r>
-            <a:r>
-              <a:rPr lang="en-US">
-                <a:ea typeface="Inter"/>
-              </a:rPr>
-              <a:t>.</a:t>
-            </a:r>
-            <a:endParaRPr lang="en-US"/>
-          </a:p>
-          <a:p>
-            <a:pPr marL="0" indent="0">
-              <a:buNone/>
-            </a:pPr>
-            <a:r>
-              <a:rPr lang="en-US">
-                <a:ea typeface="Inter"/>
-              </a:rPr>
-              <a:t>7. LIMIT</a:t>
-            </a:r>
-          </a:p>
-          <a:p>
-            <a:pPr marL="800100" lvl="1">
-              <a:buFont typeface="Wingdings" panose="020B0502030000000004" pitchFamily="34" charset="0"/>
-              <a:buChar char="Ø"/>
-            </a:pPr>
-            <a:r>
-              <a:rPr lang="en-US" err="1">
-                <a:ea typeface="Inter"/>
-              </a:rPr>
-              <a:t>Jätab</a:t>
-            </a:r>
-            <a:r>
-              <a:rPr lang="en-US">
-                <a:ea typeface="Inter"/>
-              </a:rPr>
-              <a:t> </a:t>
-            </a:r>
-            <a:r>
-              <a:rPr lang="en-US" err="1">
-                <a:ea typeface="Inter"/>
-              </a:rPr>
-              <a:t>alles</a:t>
-            </a:r>
-            <a:r>
-              <a:rPr lang="en-US">
-                <a:ea typeface="Inter"/>
-              </a:rPr>
-              <a:t> </a:t>
-            </a:r>
-            <a:r>
-              <a:rPr lang="en-US" err="1">
-                <a:ea typeface="Inter"/>
-              </a:rPr>
-              <a:t>ainult</a:t>
-            </a:r>
-            <a:r>
-              <a:rPr lang="en-US">
-                <a:ea typeface="Inter"/>
-              </a:rPr>
-              <a:t> </a:t>
-            </a:r>
-            <a:r>
-              <a:rPr lang="en-US" err="1">
-                <a:ea typeface="Inter"/>
-              </a:rPr>
-              <a:t>täpsustatud</a:t>
-            </a:r>
-            <a:r>
-              <a:rPr lang="en-US">
-                <a:ea typeface="Inter"/>
-              </a:rPr>
-              <a:t> </a:t>
-            </a:r>
-            <a:r>
-              <a:rPr lang="en-US" err="1">
-                <a:ea typeface="Inter"/>
-              </a:rPr>
-              <a:t>arvu</a:t>
-            </a:r>
-            <a:r>
-              <a:rPr lang="en-US">
-                <a:ea typeface="Inter"/>
-              </a:rPr>
-              <a:t> </a:t>
-            </a:r>
-            <a:r>
-              <a:rPr lang="en-US" err="1">
-                <a:ea typeface="Inter"/>
-              </a:rPr>
-              <a:t>ridu</a:t>
-            </a:r>
-            <a:r>
-              <a:rPr lang="en-US">
-                <a:ea typeface="Inter"/>
-              </a:rPr>
-              <a:t>.</a:t>
-            </a:r>
-            <a:endParaRPr lang="en-US"/>
-          </a:p>
-          <a:p>
-            <a:pPr marL="800100" lvl="1">
-              <a:buFont typeface="Wingdings" panose="020B0502030000000004" pitchFamily="34" charset="0"/>
-              <a:buChar char="Ø"/>
-            </a:pPr>
-            <a:endParaRPr lang="en-US"/>
-          </a:p>
-          <a:p>
-            <a:pPr marL="285750" indent="-285750">
-              <a:buClr>
-                <a:srgbClr val="121212"/>
-              </a:buClr>
-            </a:pPr>
-            <a:r>
-              <a:rPr lang="en-US" err="1">
-                <a:ea typeface="Inter"/>
-              </a:rPr>
-              <a:t>Teostamise</a:t>
-            </a:r>
-            <a:r>
-              <a:rPr lang="en-US">
-                <a:ea typeface="Inter"/>
-              </a:rPr>
-              <a:t> </a:t>
-            </a:r>
-            <a:r>
-              <a:rPr lang="en-US" err="1">
-                <a:ea typeface="Inter"/>
-              </a:rPr>
-              <a:t>järjekord</a:t>
-            </a:r>
-            <a:r>
-              <a:rPr lang="en-US">
-                <a:ea typeface="Inter"/>
-              </a:rPr>
-              <a:t> </a:t>
-            </a:r>
-            <a:r>
-              <a:rPr lang="en-US" err="1">
-                <a:ea typeface="Inter"/>
-              </a:rPr>
-              <a:t>muutub</a:t>
-            </a:r>
-            <a:r>
-              <a:rPr lang="en-US">
-                <a:ea typeface="Inter"/>
-              </a:rPr>
-              <a:t> </a:t>
-            </a:r>
-            <a:r>
-              <a:rPr lang="en-US" err="1">
-                <a:ea typeface="Inter"/>
-              </a:rPr>
-              <a:t>oluliseks</a:t>
-            </a:r>
-            <a:r>
-              <a:rPr lang="en-US">
-                <a:ea typeface="Inter"/>
-              </a:rPr>
-              <a:t> </a:t>
-            </a:r>
-            <a:r>
-              <a:rPr lang="en-US" err="1">
-                <a:ea typeface="Inter"/>
-              </a:rPr>
-              <a:t>suuremate</a:t>
-            </a:r>
-            <a:r>
-              <a:rPr lang="en-US">
-                <a:ea typeface="Inter"/>
-              </a:rPr>
-              <a:t> </a:t>
-            </a:r>
-            <a:r>
-              <a:rPr lang="en-US" err="1">
-                <a:ea typeface="Inter"/>
-              </a:rPr>
-              <a:t>päringute</a:t>
-            </a:r>
-            <a:r>
-              <a:rPr lang="en-US">
-                <a:ea typeface="Inter"/>
-              </a:rPr>
-              <a:t> </a:t>
-            </a:r>
-            <a:r>
-              <a:rPr lang="en-US" err="1">
-                <a:ea typeface="Inter"/>
-              </a:rPr>
-              <a:t>puhul</a:t>
-            </a:r>
-            <a:r>
-              <a:rPr lang="en-US">
-                <a:ea typeface="Inter"/>
-              </a:rPr>
-              <a:t>. Mida </a:t>
-            </a:r>
-            <a:r>
-              <a:rPr lang="en-US" err="1">
-                <a:ea typeface="Inter"/>
-              </a:rPr>
-              <a:t>varasemas</a:t>
-            </a:r>
-            <a:r>
-              <a:rPr lang="en-US">
-                <a:ea typeface="Inter"/>
-              </a:rPr>
-              <a:t> </a:t>
-            </a:r>
-            <a:r>
-              <a:rPr lang="en-US" err="1">
-                <a:ea typeface="Inter"/>
-              </a:rPr>
-              <a:t>sammus</a:t>
-            </a:r>
-            <a:r>
-              <a:rPr lang="en-US">
-                <a:ea typeface="Inter"/>
-              </a:rPr>
-              <a:t> </a:t>
-            </a:r>
-            <a:r>
-              <a:rPr lang="en-US" err="1">
-                <a:ea typeface="Inter"/>
-              </a:rPr>
-              <a:t>saad</a:t>
-            </a:r>
-            <a:r>
-              <a:rPr lang="en-US">
-                <a:ea typeface="Inter"/>
-              </a:rPr>
-              <a:t> </a:t>
-            </a:r>
-            <a:r>
-              <a:rPr lang="en-US" err="1">
-                <a:ea typeface="Inter"/>
-              </a:rPr>
-              <a:t>päringu</a:t>
-            </a:r>
-            <a:r>
-              <a:rPr lang="en-US">
-                <a:ea typeface="Inter"/>
-              </a:rPr>
-              <a:t> </a:t>
-            </a:r>
-            <a:r>
-              <a:rPr lang="en-US" err="1">
-                <a:ea typeface="Inter"/>
-              </a:rPr>
-              <a:t>tulemusi</a:t>
-            </a:r>
-            <a:r>
-              <a:rPr lang="en-US">
-                <a:ea typeface="Inter"/>
-              </a:rPr>
-              <a:t> </a:t>
-            </a:r>
-            <a:r>
-              <a:rPr lang="en-US" err="1">
-                <a:ea typeface="Inter"/>
-              </a:rPr>
-              <a:t>piirata</a:t>
-            </a:r>
-            <a:r>
-              <a:rPr lang="en-US">
-                <a:ea typeface="Inter"/>
-              </a:rPr>
-              <a:t>, </a:t>
-            </a:r>
-            <a:r>
-              <a:rPr lang="en-US" err="1">
-                <a:ea typeface="Inter"/>
-              </a:rPr>
-              <a:t>seda</a:t>
-            </a:r>
-            <a:r>
-              <a:rPr lang="en-US">
-                <a:ea typeface="Inter"/>
-              </a:rPr>
-              <a:t> </a:t>
-            </a:r>
-            <a:r>
-              <a:rPr lang="en-US" err="1">
-                <a:ea typeface="Inter"/>
-              </a:rPr>
-              <a:t>optimaalsem</a:t>
-            </a:r>
-            <a:r>
-              <a:rPr lang="en-US">
-                <a:ea typeface="Inter"/>
-              </a:rPr>
-              <a:t> (</a:t>
-            </a:r>
-            <a:r>
-              <a:rPr lang="en-US" err="1">
-                <a:ea typeface="Inter"/>
-              </a:rPr>
-              <a:t>kiirem</a:t>
-            </a:r>
-            <a:r>
-              <a:rPr lang="en-US">
-                <a:ea typeface="Inter"/>
-              </a:rPr>
-              <a:t>) on </a:t>
-            </a:r>
-            <a:r>
-              <a:rPr lang="en-US" err="1">
-                <a:ea typeface="Inter"/>
-              </a:rPr>
-              <a:t>päringu</a:t>
-            </a:r>
-            <a:r>
-              <a:rPr lang="en-US">
-                <a:ea typeface="Inter"/>
-              </a:rPr>
-              <a:t> </a:t>
-            </a:r>
-            <a:r>
-              <a:rPr lang="en-US" err="1">
-                <a:ea typeface="Inter"/>
-              </a:rPr>
-              <a:t>teostus</a:t>
-            </a:r>
-            <a:r>
-              <a:rPr lang="en-US">
-                <a:ea typeface="Inter"/>
-              </a:rPr>
-              <a:t>.</a:t>
-            </a:r>
-            <a:endParaRPr lang="en-US"/>
-          </a:p>
-          <a:p>
-            <a:endParaRPr lang="en-US">
-              <a:cs typeface="+mn-lt"/>
-            </a:endParaRPr>
+              <a:rPr lang="en-US" sz="2400" dirty="0" err="1"/>
+              <a:t>jutumärgid</a:t>
+            </a:r>
+            <a:endParaRPr lang="et-EE" sz="2400" dirty="0"/>
           </a:p>
         </p:txBody>
       </p:sp>
     </p:spTree>
     <p:extLst>
       <p:ext uri="{BB962C8B-B14F-4D97-AF65-F5344CB8AC3E}">
-        <p14:creationId xmlns:p14="http://schemas.microsoft.com/office/powerpoint/2010/main" val="3465804841"/>
+        <p14:creationId xmlns:p14="http://schemas.microsoft.com/office/powerpoint/2010/main" val="308433269"/>
       </p:ext>
     </p:extLst>
   </p:cSld>
@@ -28465,7 +27197,7 @@
 </p:sld>
 </file>
 
-<file path=ppt/slides/slide6.xml><?xml version="1.0" encoding="utf-8"?>
+<file path=ppt/slides/slide5.xml><?xml version="1.0" encoding="utf-8"?>
 <p:sld xmlns:a="http://schemas.openxmlformats.org/drawingml/2006/main" xmlns:r="http://schemas.openxmlformats.org/officeDocument/2006/relationships" xmlns:p="http://schemas.openxmlformats.org/presentationml/2006/main">
   <p:cSld>
     <p:spTree>
@@ -28504,16 +27236,20 @@
           <a:lstStyle/>
           <a:p>
             <a:r>
-              <a:rPr lang="en-US" err="1"/>
+              <a:rPr lang="en-US" dirty="0" err="1"/>
               <a:t>Põhilised</a:t>
             </a:r>
             <a:r>
-              <a:rPr lang="en-US"/>
+              <a:rPr lang="en-US" dirty="0"/>
               <a:t> </a:t>
             </a:r>
             <a:r>
-              <a:rPr lang="en-US" err="1"/>
+              <a:rPr lang="en-US" dirty="0" err="1"/>
               <a:t>andmetüübid</a:t>
+            </a:r>
+            <a:r>
+              <a:rPr lang="en-US" dirty="0"/>
+              <a:t> PostgreSQL</a:t>
             </a:r>
           </a:p>
         </p:txBody>
@@ -28545,18 +27281,18 @@
               </a:lnSpc>
             </a:pPr>
             <a:r>
-              <a:rPr lang="en-US" sz="2400">
+              <a:rPr lang="en-US" sz="2400" dirty="0">
                 <a:ea typeface="Inter"/>
               </a:rPr>
               <a:t>INT - </a:t>
             </a:r>
             <a:r>
-              <a:rPr lang="en-US" sz="2400" err="1">
+              <a:rPr lang="en-US" sz="2400" dirty="0" err="1">
                 <a:ea typeface="Inter"/>
               </a:rPr>
               <a:t>täisnumber</a:t>
             </a:r>
-            <a:endParaRPr lang="en-US" sz="2400"/>
+            <a:endParaRPr lang="en-US" sz="2400" dirty="0"/>
           </a:p>
           <a:p>
             <a:pPr>
@@ -28565,115 +27301,115 @@
               </a:lnSpc>
             </a:pPr>
             <a:r>
-              <a:rPr lang="en-US" sz="2400">
+              <a:rPr lang="en-US" sz="2400" dirty="0">
                 <a:ea typeface="Inter"/>
               </a:rPr>
               <a:t>NUMERIC (x, y) - </a:t>
             </a:r>
             <a:r>
-              <a:rPr lang="en-US" sz="2400" err="1">
+              <a:rPr lang="en-US" sz="2400" dirty="0" err="1">
                 <a:ea typeface="Inter"/>
               </a:rPr>
               <a:t>komakohtadega</a:t>
             </a:r>
             <a:r>
-              <a:rPr lang="en-US" sz="2400">
+              <a:rPr lang="en-US" sz="2400" dirty="0">
                 <a:ea typeface="Inter"/>
               </a:rPr>
               <a:t> number, </a:t>
             </a:r>
             <a:r>
-              <a:rPr lang="en-US" sz="2400" err="1">
+              <a:rPr lang="en-US" sz="2400" dirty="0" err="1">
                 <a:ea typeface="Inter"/>
               </a:rPr>
               <a:t>kus</a:t>
             </a:r>
             <a:r>
-              <a:rPr lang="en-US" sz="2400">
+              <a:rPr lang="en-US" sz="2400" dirty="0">
                 <a:ea typeface="Inter"/>
               </a:rPr>
               <a:t> x </a:t>
             </a:r>
             <a:r>
-              <a:rPr lang="en-US" sz="2400" err="1">
+              <a:rPr lang="en-US" sz="2400" dirty="0" err="1">
                 <a:ea typeface="Inter"/>
               </a:rPr>
               <a:t>täpsustab</a:t>
             </a:r>
             <a:r>
-              <a:rPr lang="en-US" sz="2400">
+              <a:rPr lang="en-US" sz="2400" dirty="0">
                 <a:ea typeface="Inter"/>
               </a:rPr>
               <a:t> </a:t>
             </a:r>
             <a:r>
-              <a:rPr lang="en-US" sz="2400" err="1">
+              <a:rPr lang="en-US" sz="2400" dirty="0" err="1">
                 <a:ea typeface="Inter"/>
               </a:rPr>
               <a:t>tulba</a:t>
             </a:r>
             <a:r>
-              <a:rPr lang="en-US" sz="2400">
+              <a:rPr lang="en-US" sz="2400" dirty="0">
                 <a:ea typeface="Inter"/>
               </a:rPr>
               <a:t> </a:t>
             </a:r>
             <a:r>
-              <a:rPr lang="en-US" sz="2400" err="1">
+              <a:rPr lang="en-US" sz="2400" dirty="0" err="1">
                 <a:ea typeface="Inter"/>
               </a:rPr>
               <a:t>pikkuse</a:t>
             </a:r>
             <a:r>
-              <a:rPr lang="en-US" sz="2400">
+              <a:rPr lang="en-US" sz="2400" dirty="0">
                 <a:ea typeface="Inter"/>
               </a:rPr>
               <a:t> ja y </a:t>
             </a:r>
             <a:r>
-              <a:rPr lang="en-US" sz="2400" err="1">
+              <a:rPr lang="en-US" sz="2400" dirty="0" err="1">
                 <a:ea typeface="Inter"/>
               </a:rPr>
               <a:t>komakohtade</a:t>
             </a:r>
             <a:r>
-              <a:rPr lang="en-US" sz="2400">
+              <a:rPr lang="en-US" sz="2400" dirty="0">
                 <a:ea typeface="Inter"/>
               </a:rPr>
               <a:t> </a:t>
             </a:r>
             <a:r>
-              <a:rPr lang="en-US" sz="2400" err="1">
+              <a:rPr lang="en-US" sz="2400" dirty="0" err="1">
                 <a:ea typeface="Inter"/>
               </a:rPr>
               <a:t>arvu</a:t>
             </a:r>
             <a:r>
-              <a:rPr lang="en-US" sz="2400">
+              <a:rPr lang="en-US" sz="2400" dirty="0">
                 <a:ea typeface="Inter"/>
               </a:rPr>
               <a:t>, </a:t>
             </a:r>
             <a:r>
-              <a:rPr lang="en-US" sz="2400" err="1">
+              <a:rPr lang="en-US" sz="2400" dirty="0" err="1">
                 <a:ea typeface="Inter"/>
               </a:rPr>
               <a:t>nt</a:t>
             </a:r>
             <a:r>
-              <a:rPr lang="en-US" sz="2400">
+              <a:rPr lang="en-US" sz="2400" dirty="0">
                 <a:ea typeface="Inter"/>
               </a:rPr>
               <a:t> 100,55 </a:t>
             </a:r>
             <a:r>
-              <a:rPr lang="en-US" sz="2400" err="1">
+              <a:rPr lang="en-US" sz="2400" dirty="0" err="1">
                 <a:ea typeface="Inter"/>
               </a:rPr>
               <a:t>oleks</a:t>
             </a:r>
             <a:r>
-              <a:rPr lang="en-US" sz="2400">
+              <a:rPr lang="en-US" sz="2400" dirty="0">
                 <a:ea typeface="Inter"/>
               </a:rPr>
               <a:t> NUMERIC(5,2)</a:t>
@@ -28686,42 +27422,42 @@
               </a:lnSpc>
             </a:pPr>
             <a:r>
-              <a:rPr lang="en-US" sz="2400">
+              <a:rPr lang="en-US" sz="2400" dirty="0">
                 <a:ea typeface="Inter"/>
               </a:rPr>
               <a:t>TEXT – </a:t>
             </a:r>
             <a:r>
-              <a:rPr lang="en-US" sz="2400" err="1">
+              <a:rPr lang="en-US" sz="2400" dirty="0" err="1">
                 <a:ea typeface="Inter"/>
               </a:rPr>
               <a:t>pikkuse</a:t>
             </a:r>
             <a:r>
-              <a:rPr lang="en-US" sz="2400">
+              <a:rPr lang="en-US" sz="2400" dirty="0">
                 <a:ea typeface="Inter"/>
               </a:rPr>
               <a:t> </a:t>
             </a:r>
             <a:r>
-              <a:rPr lang="en-US" sz="2400" err="1">
+              <a:rPr lang="en-US" sz="2400" dirty="0" err="1">
                 <a:ea typeface="Inter"/>
               </a:rPr>
               <a:t>piiranguteta</a:t>
             </a:r>
             <a:r>
-              <a:rPr lang="en-US" sz="2400">
+              <a:rPr lang="en-US" sz="2400" dirty="0">
                 <a:ea typeface="Inter"/>
               </a:rPr>
               <a:t> </a:t>
             </a:r>
             <a:r>
-              <a:rPr lang="en-US" sz="2400" err="1">
+              <a:rPr lang="en-US" sz="2400" dirty="0" err="1">
                 <a:ea typeface="Inter"/>
               </a:rPr>
               <a:t>tekstiväli</a:t>
             </a:r>
-            <a:endParaRPr lang="en-US" sz="2400">
+            <a:endParaRPr lang="en-US" sz="2400" dirty="0">
               <a:ea typeface="Inter"/>
             </a:endParaRPr>
           </a:p>
@@ -28732,90 +27468,90 @@
               </a:lnSpc>
             </a:pPr>
             <a:r>
-              <a:rPr lang="en-US" sz="2400">
+              <a:rPr lang="en-US" sz="2400" dirty="0">
                 <a:ea typeface="Inter"/>
               </a:rPr>
               <a:t>VARCHAR (n) - </a:t>
             </a:r>
             <a:r>
-              <a:rPr lang="en-US" sz="2400" err="1">
+              <a:rPr lang="en-US" sz="2400" dirty="0" err="1">
                 <a:ea typeface="Inter"/>
               </a:rPr>
               <a:t>pikkuse</a:t>
             </a:r>
             <a:r>
-              <a:rPr lang="en-US" sz="2400">
+              <a:rPr lang="en-US" sz="2400" dirty="0">
                 <a:ea typeface="Inter"/>
               </a:rPr>
               <a:t> </a:t>
             </a:r>
             <a:r>
-              <a:rPr lang="en-US" sz="2400" err="1">
+              <a:rPr lang="en-US" sz="2400" dirty="0" err="1">
                 <a:ea typeface="Inter"/>
               </a:rPr>
               <a:t>piiranguga</a:t>
             </a:r>
             <a:r>
-              <a:rPr lang="en-US" sz="2400">
+              <a:rPr lang="en-US" sz="2400" dirty="0">
                 <a:ea typeface="Inter"/>
               </a:rPr>
               <a:t> </a:t>
             </a:r>
             <a:r>
-              <a:rPr lang="en-US" sz="2400" err="1">
+              <a:rPr lang="en-US" sz="2400" dirty="0" err="1">
                 <a:ea typeface="Inter"/>
               </a:rPr>
               <a:t>tekstiväli</a:t>
             </a:r>
             <a:r>
-              <a:rPr lang="en-US" sz="2400">
+              <a:rPr lang="en-US" sz="2400" dirty="0">
                 <a:ea typeface="Inter"/>
               </a:rPr>
               <a:t>, </a:t>
             </a:r>
             <a:r>
-              <a:rPr lang="en-US" sz="2400" err="1">
+              <a:rPr lang="en-US" sz="2400" dirty="0" err="1">
                 <a:ea typeface="Inter"/>
               </a:rPr>
               <a:t>kus</a:t>
             </a:r>
             <a:r>
-              <a:rPr lang="en-US" sz="2400">
+              <a:rPr lang="en-US" sz="2400" dirty="0">
                 <a:ea typeface="Inter"/>
               </a:rPr>
               <a:t> n </a:t>
             </a:r>
             <a:r>
-              <a:rPr lang="en-US" sz="2400" err="1">
+              <a:rPr lang="en-US" sz="2400" dirty="0" err="1">
                 <a:ea typeface="Inter"/>
               </a:rPr>
               <a:t>tähistab</a:t>
             </a:r>
             <a:r>
-              <a:rPr lang="en-US" sz="2400">
+              <a:rPr lang="en-US" sz="2400" dirty="0">
                 <a:ea typeface="Inter"/>
               </a:rPr>
               <a:t> </a:t>
             </a:r>
             <a:r>
-              <a:rPr lang="en-US" sz="2400" err="1">
+              <a:rPr lang="en-US" sz="2400" dirty="0" err="1">
                 <a:ea typeface="Inter"/>
               </a:rPr>
               <a:t>välja</a:t>
             </a:r>
             <a:r>
-              <a:rPr lang="en-US" sz="2400">
+              <a:rPr lang="en-US" sz="2400" dirty="0">
                 <a:ea typeface="Inter"/>
               </a:rPr>
               <a:t> </a:t>
             </a:r>
             <a:r>
-              <a:rPr lang="en-US" sz="2400" err="1">
+              <a:rPr lang="en-US" sz="2400" dirty="0" err="1">
                 <a:ea typeface="Inter"/>
               </a:rPr>
               <a:t>pikkust</a:t>
             </a:r>
-            <a:endParaRPr lang="en-US" sz="2400">
+            <a:endParaRPr lang="en-US" sz="2400" dirty="0">
               <a:ea typeface="Inter"/>
             </a:endParaRPr>
           </a:p>
@@ -28826,55 +27562,55 @@
               </a:lnSpc>
             </a:pPr>
             <a:r>
-              <a:rPr lang="en-US" sz="2400">
+              <a:rPr lang="en-US" sz="2400" dirty="0">
                 <a:ea typeface="Inter"/>
               </a:rPr>
               <a:t>BOOLEAN – </a:t>
             </a:r>
             <a:r>
-              <a:rPr lang="en-US" sz="2400" err="1">
+              <a:rPr lang="en-US" sz="2400" dirty="0" err="1">
                 <a:ea typeface="Inter"/>
               </a:rPr>
               <a:t>kahe</a:t>
             </a:r>
             <a:r>
-              <a:rPr lang="en-US" sz="2400">
+              <a:rPr lang="en-US" sz="2400" dirty="0">
                 <a:ea typeface="Inter"/>
               </a:rPr>
               <a:t> </a:t>
             </a:r>
             <a:r>
-              <a:rPr lang="en-US" sz="2400" err="1">
+              <a:rPr lang="en-US" sz="2400" dirty="0" err="1">
                 <a:ea typeface="Inter"/>
               </a:rPr>
               <a:t>väärtusega</a:t>
             </a:r>
             <a:r>
-              <a:rPr lang="en-US" sz="2400">
+              <a:rPr lang="en-US" sz="2400" dirty="0">
                 <a:ea typeface="Inter"/>
               </a:rPr>
               <a:t> </a:t>
             </a:r>
             <a:r>
-              <a:rPr lang="en-US" sz="2400" err="1">
+              <a:rPr lang="en-US" sz="2400" dirty="0" err="1">
                 <a:ea typeface="Inter"/>
               </a:rPr>
               <a:t>väli</a:t>
             </a:r>
             <a:r>
-              <a:rPr lang="en-US" sz="2400">
+              <a:rPr lang="en-US" sz="2400" dirty="0">
                 <a:ea typeface="Inter"/>
               </a:rPr>
               <a:t>, TRUE, FALSE ja </a:t>
             </a:r>
             <a:r>
-              <a:rPr lang="en-US" sz="2400" err="1">
+              <a:rPr lang="en-US" sz="2400" dirty="0" err="1">
                 <a:ea typeface="Inter"/>
               </a:rPr>
               <a:t>tühiväärtus</a:t>
             </a:r>
             <a:r>
-              <a:rPr lang="en-US" sz="2400">
+              <a:rPr lang="en-US" sz="2400" dirty="0">
                 <a:ea typeface="Inter"/>
               </a:rPr>
               <a:t> (NULL)</a:t>
@@ -28887,18 +27623,18 @@
               </a:lnSpc>
             </a:pPr>
             <a:r>
-              <a:rPr lang="en-US" sz="2400">
+              <a:rPr lang="en-US" sz="2400" dirty="0">
                 <a:ea typeface="Inter"/>
               </a:rPr>
               <a:t>DATE - </a:t>
             </a:r>
             <a:r>
-              <a:rPr lang="en-US" sz="2400" err="1">
+              <a:rPr lang="en-US" sz="2400" dirty="0" err="1">
                 <a:ea typeface="Inter"/>
               </a:rPr>
               <a:t>kuupäev</a:t>
             </a:r>
-            <a:endParaRPr lang="en-US" sz="2400">
+            <a:endParaRPr lang="en-US" sz="2400" dirty="0">
               <a:ea typeface="Inter"/>
             </a:endParaRPr>
           </a:p>
@@ -28909,39 +27645,81 @@
               </a:lnSpc>
             </a:pPr>
             <a:r>
-              <a:rPr lang="en-US" sz="2400">
+              <a:rPr lang="en-US" sz="2400" dirty="0">
                 <a:ea typeface="Inter"/>
               </a:rPr>
               <a:t>TIMESTAMP - </a:t>
             </a:r>
             <a:r>
-              <a:rPr lang="en-US" sz="2400" err="1">
+              <a:rPr lang="en-US" sz="2400" dirty="0" err="1">
                 <a:ea typeface="Inter"/>
               </a:rPr>
               <a:t>kuupäev</a:t>
             </a:r>
             <a:r>
-              <a:rPr lang="en-US" sz="2400">
+              <a:rPr lang="en-US" sz="2400" dirty="0">
                 <a:ea typeface="Inter"/>
               </a:rPr>
               <a:t> </a:t>
             </a:r>
             <a:r>
-              <a:rPr lang="en-US" sz="2400" err="1">
+              <a:rPr lang="en-US" sz="2400" dirty="0" err="1">
                 <a:ea typeface="Inter"/>
               </a:rPr>
               <a:t>kellaajaga</a:t>
             </a:r>
-            <a:endParaRPr lang="en-US" sz="2400" err="1"/>
+            <a:endParaRPr lang="en-US" sz="2400" dirty="0">
+              <a:ea typeface="Inter"/>
+            </a:endParaRPr>
+          </a:p>
+          <a:p>
+            <a:pPr>
+              <a:lnSpc>
+                <a:spcPct val="150000"/>
+              </a:lnSpc>
+            </a:pPr>
+            <a:r>
+              <a:rPr lang="en-US" sz="2400" dirty="0" err="1">
+                <a:ea typeface="Inter"/>
+              </a:rPr>
+              <a:t>Dokumentatsioon</a:t>
+            </a:r>
+            <a:r>
+              <a:rPr lang="en-US" sz="2400" dirty="0">
+                <a:ea typeface="Inter"/>
+              </a:rPr>
+              <a:t>:</a:t>
+            </a:r>
+          </a:p>
+          <a:p>
+            <a:pPr lvl="1">
+              <a:lnSpc>
+                <a:spcPct val="150000"/>
+              </a:lnSpc>
+            </a:pPr>
+            <a:r>
+              <a:rPr lang="en-US" sz="2400" dirty="0">
+                <a:ea typeface="Inter"/>
+                <a:hlinkClick r:id="rId2"/>
+              </a:rPr>
+              <a:t>https://www.postgresql.org/docs/current/datatype.html</a:t>
+            </a:r>
+            <a:r>
+              <a:rPr lang="en-US" sz="2400" dirty="0">
+                <a:ea typeface="Inter"/>
+              </a:rPr>
+              <a:t> </a:t>
+            </a:r>
+            <a:endParaRPr lang="en-US" sz="2400" dirty="0"/>
           </a:p>
           <a:p>
             <a:pPr marL="0" indent="0">
               <a:buNone/>
             </a:pPr>
-            <a:endParaRPr lang="en-US" sz="2400"/>
+            <a:endParaRPr lang="en-US" sz="2400" dirty="0"/>
           </a:p>
           <a:p>
-            <a:endParaRPr lang="en-US" sz="2400"/>
+            <a:endParaRPr lang="en-US" sz="2400" dirty="0"/>
           </a:p>
         </p:txBody>
       </p:sp>
@@ -28958,456 +27736,7 @@
 </p:sld>
 </file>
 
-<file path=ppt/slides/slide7.xml><?xml version="1.0" encoding="utf-8"?>
-<p:sld xmlns:a="http://schemas.openxmlformats.org/drawingml/2006/main" xmlns:r="http://schemas.openxmlformats.org/officeDocument/2006/relationships" xmlns:p="http://schemas.openxmlformats.org/presentationml/2006/main">
-  <p:cSld>
-    <p:spTree>
-      <p:nvGrpSpPr>
-        <p:cNvPr id="1" name="">
-          <a:extLst>
-            <a:ext uri="{FF2B5EF4-FFF2-40B4-BE49-F238E27FC236}">
-              <a16:creationId xmlns:a16="http://schemas.microsoft.com/office/drawing/2014/main" id="{1469E57D-0698-A888-A781-B5BA4506C68A}"/>
-            </a:ext>
-          </a:extLst>
-        </p:cNvPr>
-        <p:cNvGrpSpPr/>
-        <p:nvPr/>
-      </p:nvGrpSpPr>
-      <p:grpSpPr>
-        <a:xfrm>
-          <a:off x="0" y="0"/>
-          <a:ext cx="0" cy="0"/>
-          <a:chOff x="0" y="0"/>
-          <a:chExt cx="0" cy="0"/>
-        </a:xfrm>
-      </p:grpSpPr>
-      <p:sp>
-        <p:nvSpPr>
-          <p:cNvPr id="3" name="Content Placeholder 2">
-            <a:extLst>
-              <a:ext uri="{FF2B5EF4-FFF2-40B4-BE49-F238E27FC236}">
-                <a16:creationId xmlns:a16="http://schemas.microsoft.com/office/drawing/2014/main" id="{BDBE8A2B-41F3-0AD3-D3F7-DF4AC897F524}"/>
-              </a:ext>
-            </a:extLst>
-          </p:cNvPr>
-          <p:cNvSpPr>
-            <a:spLocks noGrp="1"/>
-          </p:cNvSpPr>
-          <p:nvPr>
-            <p:ph sz="quarter" idx="10"/>
-          </p:nvPr>
-        </p:nvSpPr>
-        <p:spPr/>
-        <p:txBody>
-          <a:bodyPr/>
-          <a:lstStyle/>
-          <a:p>
-            <a:pPr marL="0" indent="0">
-              <a:lnSpc>
-                <a:spcPct val="150000"/>
-              </a:lnSpc>
-              <a:buNone/>
-            </a:pPr>
-            <a:endParaRPr lang="en-US" sz="2800">
-              <a:ea typeface="Inter"/>
-            </a:endParaRPr>
-          </a:p>
-          <a:p>
-            <a:pPr marL="457200" lvl="1" indent="0">
-              <a:lnSpc>
-                <a:spcPct val="150000"/>
-              </a:lnSpc>
-              <a:buNone/>
-            </a:pPr>
-            <a:endParaRPr lang="en-US" sz="2000">
-              <a:ea typeface="Inter"/>
-            </a:endParaRPr>
-          </a:p>
-        </p:txBody>
-      </p:sp>
-      <p:sp>
-        <p:nvSpPr>
-          <p:cNvPr id="5" name="Title 4">
-            <a:extLst>
-              <a:ext uri="{FF2B5EF4-FFF2-40B4-BE49-F238E27FC236}">
-                <a16:creationId xmlns:a16="http://schemas.microsoft.com/office/drawing/2014/main" id="{1A4C1C95-F9A5-B2F3-AAC1-345A2C3966B7}"/>
-              </a:ext>
-            </a:extLst>
-          </p:cNvPr>
-          <p:cNvSpPr>
-            <a:spLocks noGrp="1"/>
-          </p:cNvSpPr>
-          <p:nvPr>
-            <p:ph type="ctrTitle"/>
-          </p:nvPr>
-        </p:nvSpPr>
-        <p:spPr>
-          <a:xfrm>
-            <a:off x="4283493" y="2675333"/>
-            <a:ext cx="3777666" cy="357043"/>
-          </a:xfrm>
-        </p:spPr>
-        <p:txBody>
-          <a:bodyPr/>
-          <a:lstStyle/>
-          <a:p>
-            <a:r>
-              <a:rPr lang="en-US"/>
-              <a:t>Paus 10:30-10:45</a:t>
-            </a:r>
-          </a:p>
-        </p:txBody>
-      </p:sp>
-    </p:spTree>
-    <p:extLst>
-      <p:ext uri="{BB962C8B-B14F-4D97-AF65-F5344CB8AC3E}">
-        <p14:creationId xmlns:p14="http://schemas.microsoft.com/office/powerpoint/2010/main" val="2156485789"/>
-      </p:ext>
-    </p:extLst>
-  </p:cSld>
-  <p:clrMapOvr>
-    <a:masterClrMapping/>
-  </p:clrMapOvr>
-</p:sld>
-</file>
-
-<file path=ppt/slides/slide8.xml><?xml version="1.0" encoding="utf-8"?>
-<p:sld xmlns:a="http://schemas.openxmlformats.org/drawingml/2006/main" xmlns:r="http://schemas.openxmlformats.org/officeDocument/2006/relationships" xmlns:p="http://schemas.openxmlformats.org/presentationml/2006/main">
-  <p:cSld>
-    <p:spTree>
-      <p:nvGrpSpPr>
-        <p:cNvPr id="1" name=""/>
-        <p:cNvGrpSpPr/>
-        <p:nvPr/>
-      </p:nvGrpSpPr>
-      <p:grpSpPr>
-        <a:xfrm>
-          <a:off x="0" y="0"/>
-          <a:ext cx="0" cy="0"/>
-          <a:chOff x="0" y="0"/>
-          <a:chExt cx="0" cy="0"/>
-        </a:xfrm>
-      </p:grpSpPr>
-      <p:sp>
-        <p:nvSpPr>
-          <p:cNvPr id="2" name="Title 1">
-            <a:extLst>
-              <a:ext uri="{FF2B5EF4-FFF2-40B4-BE49-F238E27FC236}">
-                <a16:creationId xmlns:a16="http://schemas.microsoft.com/office/drawing/2014/main" id="{E506CDB2-9145-1517-74B9-1D85A1A094E0}"/>
-              </a:ext>
-            </a:extLst>
-          </p:cNvPr>
-          <p:cNvSpPr>
-            <a:spLocks noGrp="1"/>
-          </p:cNvSpPr>
-          <p:nvPr>
-            <p:ph type="ctrTitle"/>
-          </p:nvPr>
-        </p:nvSpPr>
-        <p:spPr/>
-        <p:txBody>
-          <a:bodyPr/>
-          <a:lstStyle/>
-          <a:p>
-            <a:r>
-              <a:rPr lang="en-US" dirty="0"/>
-              <a:t>PostgreSQL </a:t>
-            </a:r>
-            <a:r>
-              <a:rPr lang="en-US" dirty="0" err="1"/>
-              <a:t>baasi</a:t>
-            </a:r>
-            <a:r>
-              <a:rPr lang="en-US" dirty="0"/>
-              <a:t> </a:t>
-            </a:r>
-            <a:r>
-              <a:rPr lang="en-US" dirty="0" err="1"/>
-              <a:t>nimetamispraktikad</a:t>
-            </a:r>
-            <a:endParaRPr lang="et-EE" dirty="0"/>
-          </a:p>
-        </p:txBody>
-      </p:sp>
-      <p:sp>
-        <p:nvSpPr>
-          <p:cNvPr id="3" name="Content Placeholder 2">
-            <a:extLst>
-              <a:ext uri="{FF2B5EF4-FFF2-40B4-BE49-F238E27FC236}">
-                <a16:creationId xmlns:a16="http://schemas.microsoft.com/office/drawing/2014/main" id="{B563FFA0-927B-E444-49B4-38B1CC7C83D1}"/>
-              </a:ext>
-            </a:extLst>
-          </p:cNvPr>
-          <p:cNvSpPr>
-            <a:spLocks noGrp="1"/>
-          </p:cNvSpPr>
-          <p:nvPr>
-            <p:ph sz="quarter" idx="10"/>
-          </p:nvPr>
-        </p:nvSpPr>
-        <p:spPr/>
-        <p:txBody>
-          <a:bodyPr/>
-          <a:lstStyle/>
-          <a:p>
-            <a:pPr>
-              <a:lnSpc>
-                <a:spcPct val="150000"/>
-              </a:lnSpc>
-            </a:pPr>
-            <a:r>
-              <a:rPr lang="en-US" sz="2400" dirty="0" err="1"/>
-              <a:t>Tabelite</a:t>
-            </a:r>
-            <a:r>
-              <a:rPr lang="en-US" sz="2400" dirty="0"/>
-              <a:t> ja </a:t>
-            </a:r>
-            <a:r>
-              <a:rPr lang="en-US" sz="2400" dirty="0" err="1"/>
-              <a:t>tulpade</a:t>
-            </a:r>
-            <a:r>
-              <a:rPr lang="en-US" sz="2400" dirty="0"/>
-              <a:t> </a:t>
-            </a:r>
-            <a:r>
-              <a:rPr lang="en-US" sz="2400" dirty="0" err="1"/>
-              <a:t>nimed</a:t>
-            </a:r>
-            <a:r>
-              <a:rPr lang="en-US" sz="2400" dirty="0"/>
-              <a:t>: </a:t>
-            </a:r>
-          </a:p>
-          <a:p>
-            <a:pPr lvl="1">
-              <a:lnSpc>
-                <a:spcPct val="150000"/>
-              </a:lnSpc>
-            </a:pPr>
-            <a:r>
-              <a:rPr lang="en-US" sz="2400" dirty="0"/>
-              <a:t>Parim </a:t>
-            </a:r>
-            <a:r>
-              <a:rPr lang="en-US" sz="2400" dirty="0" err="1"/>
-              <a:t>praktika</a:t>
-            </a:r>
-            <a:r>
-              <a:rPr lang="en-US" sz="2400" dirty="0"/>
-              <a:t>: </a:t>
-            </a:r>
-            <a:r>
-              <a:rPr lang="et-EE" sz="2400" b="1" dirty="0" err="1"/>
-              <a:t>lowercase_with_underscores</a:t>
-            </a:r>
-            <a:r>
-              <a:rPr lang="et-EE" sz="2400" dirty="0"/>
-              <a:t> </a:t>
-            </a:r>
-            <a:endParaRPr lang="en-US" sz="2400" dirty="0"/>
-          </a:p>
-          <a:p>
-            <a:pPr lvl="1">
-              <a:lnSpc>
-                <a:spcPct val="150000"/>
-              </a:lnSpc>
-            </a:pPr>
-            <a:r>
-              <a:rPr lang="en-US" sz="2400" dirty="0" err="1"/>
-              <a:t>Nt</a:t>
-            </a:r>
-            <a:r>
-              <a:rPr lang="en-US" sz="2400" dirty="0"/>
-              <a:t> </a:t>
-            </a:r>
-            <a:r>
-              <a:rPr lang="en-US" sz="2400" dirty="0" err="1"/>
-              <a:t>tabeli</a:t>
-            </a:r>
-            <a:r>
-              <a:rPr lang="en-US" sz="2400" dirty="0"/>
-              <a:t> </a:t>
-            </a:r>
-            <a:r>
-              <a:rPr lang="en-US" sz="2400" dirty="0" err="1"/>
-              <a:t>nimed</a:t>
-            </a:r>
-            <a:r>
-              <a:rPr lang="en-US" sz="2400" dirty="0"/>
-              <a:t>: </a:t>
-            </a:r>
-            <a:r>
-              <a:rPr lang="en-US" sz="2400" dirty="0" err="1"/>
-              <a:t>sales_table</a:t>
-            </a:r>
-            <a:r>
-              <a:rPr lang="en-US" sz="2400" dirty="0"/>
-              <a:t>, </a:t>
-            </a:r>
-            <a:r>
-              <a:rPr lang="en-US" sz="2400" dirty="0" err="1"/>
-              <a:t>customer_table</a:t>
-            </a:r>
-            <a:r>
-              <a:rPr lang="en-US" sz="2400" dirty="0"/>
-              <a:t>, </a:t>
-            </a:r>
-            <a:r>
-              <a:rPr lang="en-US" sz="2400" dirty="0" err="1"/>
-              <a:t>date_table</a:t>
-            </a:r>
-            <a:endParaRPr lang="en-US" sz="2400" dirty="0"/>
-          </a:p>
-          <a:p>
-            <a:pPr lvl="1">
-              <a:lnSpc>
-                <a:spcPct val="150000"/>
-              </a:lnSpc>
-            </a:pPr>
-            <a:r>
-              <a:rPr lang="en-US" sz="2400" dirty="0" err="1"/>
-              <a:t>Nt</a:t>
-            </a:r>
-            <a:r>
-              <a:rPr lang="en-US" sz="2400" dirty="0"/>
-              <a:t> </a:t>
-            </a:r>
-            <a:r>
-              <a:rPr lang="en-US" sz="2400" dirty="0" err="1"/>
-              <a:t>tulpade</a:t>
-            </a:r>
-            <a:r>
-              <a:rPr lang="en-US" sz="2400" dirty="0"/>
-              <a:t> </a:t>
-            </a:r>
-            <a:r>
-              <a:rPr lang="en-US" sz="2400" dirty="0" err="1"/>
-              <a:t>nimed</a:t>
-            </a:r>
-            <a:r>
-              <a:rPr lang="en-US" sz="2400" dirty="0"/>
-              <a:t>: </a:t>
-            </a:r>
-            <a:r>
-              <a:rPr lang="en-US" sz="2400" dirty="0" err="1"/>
-              <a:t>sale_id</a:t>
-            </a:r>
-            <a:r>
-              <a:rPr lang="en-US" sz="2400" dirty="0"/>
-              <a:t>, </a:t>
-            </a:r>
-            <a:r>
-              <a:rPr lang="en-US" sz="2400" dirty="0" err="1"/>
-              <a:t>customer_id</a:t>
-            </a:r>
-            <a:r>
-              <a:rPr lang="en-US" sz="2400" dirty="0"/>
-              <a:t>, </a:t>
-            </a:r>
-            <a:r>
-              <a:rPr lang="en-US" sz="2400" dirty="0" err="1"/>
-              <a:t>unit_price</a:t>
-            </a:r>
-            <a:endParaRPr lang="en-US" sz="2400" dirty="0"/>
-          </a:p>
-          <a:p>
-            <a:pPr>
-              <a:lnSpc>
-                <a:spcPct val="150000"/>
-              </a:lnSpc>
-            </a:pPr>
-            <a:r>
-              <a:rPr lang="en-US" sz="2400" dirty="0"/>
-              <a:t>Kui on </a:t>
-            </a:r>
-            <a:r>
-              <a:rPr lang="en-US" sz="2400" dirty="0" err="1"/>
-              <a:t>suurtähed</a:t>
-            </a:r>
-            <a:r>
-              <a:rPr lang="en-US" sz="2400" dirty="0"/>
-              <a:t> </a:t>
-            </a:r>
-            <a:r>
-              <a:rPr lang="en-US" sz="2400" dirty="0" err="1"/>
-              <a:t>või</a:t>
-            </a:r>
-            <a:r>
-              <a:rPr lang="en-US" sz="2400" dirty="0"/>
-              <a:t> </a:t>
-            </a:r>
-            <a:r>
-              <a:rPr lang="en-US" sz="2400" dirty="0" err="1"/>
-              <a:t>väike</a:t>
-            </a:r>
-            <a:r>
-              <a:rPr lang="en-US" sz="2400" dirty="0"/>
-              <a:t>-ja </a:t>
-            </a:r>
-            <a:r>
-              <a:rPr lang="en-US" sz="2400" dirty="0" err="1"/>
-              <a:t>suurtähed</a:t>
-            </a:r>
-            <a:r>
-              <a:rPr lang="en-US" sz="2400" dirty="0"/>
-              <a:t> </a:t>
-            </a:r>
-            <a:r>
-              <a:rPr lang="en-US" sz="2400" dirty="0" err="1"/>
-              <a:t>segamini</a:t>
-            </a:r>
-            <a:r>
-              <a:rPr lang="en-US" sz="2400" dirty="0"/>
-              <a:t>, </a:t>
-            </a:r>
-            <a:r>
-              <a:rPr lang="en-US" sz="2400" dirty="0" err="1"/>
-              <a:t>siis</a:t>
-            </a:r>
-            <a:r>
-              <a:rPr lang="en-US" sz="2400" dirty="0"/>
-              <a:t> </a:t>
-            </a:r>
-            <a:r>
-              <a:rPr lang="en-US" sz="2400" dirty="0" err="1"/>
-              <a:t>tulevad</a:t>
-            </a:r>
-            <a:r>
-              <a:rPr lang="en-US" sz="2400" dirty="0"/>
-              <a:t> </a:t>
-            </a:r>
-            <a:r>
-              <a:rPr lang="en-US" sz="2400" dirty="0" err="1"/>
-              <a:t>ümber</a:t>
-            </a:r>
-            <a:r>
-              <a:rPr lang="en-US" sz="2400" dirty="0"/>
-              <a:t> </a:t>
-            </a:r>
-            <a:r>
-              <a:rPr lang="en-US" sz="2400" dirty="0" err="1"/>
-              <a:t>jutumärgid</a:t>
-            </a:r>
-            <a:endParaRPr lang="et-EE" sz="2400" dirty="0"/>
-          </a:p>
-        </p:txBody>
-      </p:sp>
-    </p:spTree>
-    <p:extLst>
-      <p:ext uri="{BB962C8B-B14F-4D97-AF65-F5344CB8AC3E}">
-        <p14:creationId xmlns:p14="http://schemas.microsoft.com/office/powerpoint/2010/main" val="308433269"/>
-      </p:ext>
-    </p:extLst>
-  </p:cSld>
-  <p:clrMapOvr>
-    <a:masterClrMapping/>
-  </p:clrMapOvr>
-</p:sld>
-</file>
-
-<file path=ppt/slides/slide9.xml><?xml version="1.0" encoding="utf-8"?>
+<file path=ppt/slides/slide6.xml><?xml version="1.0" encoding="utf-8"?>
 <p:sld xmlns:a="http://schemas.openxmlformats.org/drawingml/2006/main" xmlns:r="http://schemas.openxmlformats.org/officeDocument/2006/relationships" xmlns:p="http://schemas.openxmlformats.org/presentationml/2006/main">
   <p:cSld>
     <p:spTree>
@@ -29634,6 +27963,80 @@
             </a:endParaRPr>
           </a:p>
           <a:p>
+            <a:pPr marL="800100" lvl="1">
+              <a:lnSpc>
+                <a:spcPct val="150000"/>
+              </a:lnSpc>
+            </a:pPr>
+            <a:r>
+              <a:rPr lang="en-US" sz="2000" dirty="0" err="1">
+                <a:ea typeface="+mn-lt"/>
+                <a:cs typeface="+mn-lt"/>
+              </a:rPr>
+              <a:t>Laeme</a:t>
+            </a:r>
+            <a:r>
+              <a:rPr lang="en-US" sz="2000" dirty="0">
+                <a:ea typeface="+mn-lt"/>
+                <a:cs typeface="+mn-lt"/>
+              </a:rPr>
+              <a:t> alla Day6 </a:t>
+            </a:r>
+            <a:r>
+              <a:rPr lang="en-US" sz="2000" dirty="0" err="1">
+                <a:ea typeface="+mn-lt"/>
+                <a:cs typeface="+mn-lt"/>
+              </a:rPr>
+              <a:t>andmeallikad</a:t>
+            </a:r>
+            <a:r>
+              <a:rPr lang="en-US" sz="2000" dirty="0">
+                <a:ea typeface="+mn-lt"/>
+                <a:cs typeface="+mn-lt"/>
+              </a:rPr>
+              <a:t>: </a:t>
+            </a:r>
+            <a:r>
+              <a:rPr lang="en-US" sz="2000" dirty="0" err="1">
+                <a:ea typeface="+mn-lt"/>
+                <a:cs typeface="+mn-lt"/>
+              </a:rPr>
+              <a:t>sales_table</a:t>
+            </a:r>
+            <a:r>
+              <a:rPr lang="en-US" sz="2000" dirty="0">
+                <a:ea typeface="+mn-lt"/>
+                <a:cs typeface="+mn-lt"/>
+              </a:rPr>
+              <a:t>, </a:t>
+            </a:r>
+            <a:r>
+              <a:rPr lang="en-US" sz="2000" dirty="0" err="1">
+                <a:ea typeface="+mn-lt"/>
+                <a:cs typeface="+mn-lt"/>
+              </a:rPr>
+              <a:t>sales_rep_table</a:t>
+            </a:r>
+            <a:r>
+              <a:rPr lang="en-US" sz="2000" dirty="0">
+                <a:ea typeface="+mn-lt"/>
+                <a:cs typeface="+mn-lt"/>
+              </a:rPr>
+              <a:t>, </a:t>
+            </a:r>
+            <a:r>
+              <a:rPr lang="en-US" sz="2000" dirty="0" err="1">
+                <a:ea typeface="+mn-lt"/>
+                <a:cs typeface="+mn-lt"/>
+              </a:rPr>
+              <a:t>budget_table</a:t>
+            </a:r>
+            <a:endParaRPr lang="en-US" sz="2000" dirty="0">
+              <a:ea typeface="+mn-lt"/>
+              <a:cs typeface="+mn-lt"/>
+            </a:endParaRPr>
+          </a:p>
+          <a:p>
             <a:pPr marL="285750" indent="-285750">
               <a:lnSpc>
                 <a:spcPct val="150000"/>
@@ -29888,7 +28291,7 @@
                 <a:ea typeface="Inter"/>
                 <a:cs typeface="+mn-lt"/>
               </a:rPr>
-              <a:t>salestable</a:t>
+              <a:t>sales_table</a:t>
             </a:r>
             <a:r>
               <a:rPr lang="en-US" sz="2000" dirty="0">
@@ -29975,35 +28378,14 @@
                 <a:ea typeface="Inter"/>
                 <a:cs typeface="+mn-lt"/>
               </a:rPr>
-              <a:t>Vaata</a:t>
+              <a:t>Valime</a:t>
             </a:r>
             <a:r>
               <a:rPr lang="en-US" sz="2000" dirty="0">
                 <a:ea typeface="Inter"/>
                 <a:cs typeface="+mn-lt"/>
               </a:rPr>
-              <a:t> </a:t>
-            </a:r>
-            <a:r>
-              <a:rPr lang="en-US" sz="2000" dirty="0" err="1">
-                <a:ea typeface="Inter"/>
-                <a:cs typeface="+mn-lt"/>
-              </a:rPr>
-              <a:t>üle</a:t>
-            </a:r>
-            <a:r>
-              <a:rPr lang="en-US" sz="2000" dirty="0">
-                <a:ea typeface="Inter"/>
-                <a:cs typeface="+mn-lt"/>
-              </a:rPr>
-              <a:t> </a:t>
-            </a:r>
-            <a:r>
-              <a:rPr lang="en-US" sz="2000" dirty="0" err="1">
-                <a:ea typeface="Inter"/>
-                <a:cs typeface="+mn-lt"/>
-              </a:rPr>
-              <a:t>seaded</a:t>
+              <a:t> “sales_table.csv”</a:t>
             </a:r>
             <a:endParaRPr lang="en-US" sz="2000" dirty="0">
               <a:cs typeface="+mn-lt"/>
@@ -30111,7 +28493,7 @@
                 <a:ea typeface="Inter"/>
                 <a:cs typeface="+mn-lt"/>
               </a:rPr>
-              <a:t> - "Configure Data"</a:t>
+              <a:t> - "Configure Data“</a:t>
             </a:r>
           </a:p>
           <a:p>
@@ -30119,15 +28501,15 @@
               <a:lnSpc>
                 <a:spcPct val="150000"/>
               </a:lnSpc>
-              <a:buFont typeface="Inter" panose="020B0502030000000004" pitchFamily="34" charset="0"/>
-              <a:buChar char="‣"/>
+              <a:buFont typeface="Wingdings" panose="020B0502030000000004" pitchFamily="34" charset="0"/>
+              <a:buChar char="§"/>
             </a:pPr>
             <a:r>
               <a:rPr lang="en-US" sz="2000" dirty="0" err="1">
                 <a:ea typeface="Inter"/>
                 <a:cs typeface="+mn-lt"/>
               </a:rPr>
-              <a:t>Eemaldame</a:t>
+              <a:t>Muudame</a:t>
             </a:r>
             <a:r>
               <a:rPr lang="en-US" sz="2000" dirty="0">
@@ -30141,49 +28523,7 @@
                 <a:ea typeface="Inter"/>
                 <a:cs typeface="+mn-lt"/>
               </a:rPr>
-              <a:t>tulpade</a:t>
-            </a:r>
-            <a:r>
-              <a:rPr lang="en-US" sz="2000" dirty="0">
-                <a:ea typeface="Inter"/>
-                <a:cs typeface="+mn-lt"/>
-              </a:rPr>
-              <a:t> </a:t>
-            </a:r>
-            <a:r>
-              <a:rPr lang="en-US" sz="2000" dirty="0" err="1">
-                <a:ea typeface="Inter"/>
-                <a:cs typeface="+mn-lt"/>
-              </a:rPr>
-              <a:t>pealkirjadest</a:t>
-            </a:r>
-            <a:r>
-              <a:rPr lang="en-US" sz="2000" dirty="0">
-                <a:ea typeface="Inter"/>
-                <a:cs typeface="+mn-lt"/>
-              </a:rPr>
-              <a:t> "“ ja </a:t>
-            </a:r>
-            <a:r>
-              <a:rPr lang="en-US" sz="2000" dirty="0" err="1">
-                <a:ea typeface="Inter"/>
-                <a:cs typeface="+mn-lt"/>
-              </a:rPr>
-              <a:t>muudame</a:t>
-            </a:r>
-            <a:r>
-              <a:rPr lang="en-US" sz="2000" dirty="0">
-                <a:ea typeface="Inter"/>
-                <a:cs typeface="+mn-lt"/>
-              </a:rPr>
-              <a:t> </a:t>
-            </a:r>
-            <a:r>
-              <a:rPr lang="en-US" sz="2000" dirty="0" err="1">
-                <a:ea typeface="Inter"/>
-                <a:cs typeface="+mn-lt"/>
-              </a:rPr>
-              <a:t>väiketähtedeks</a:t>
+              <a:t>tüübid</a:t>
             </a:r>
             <a:endParaRPr lang="en-US" sz="2000" dirty="0">
               <a:ea typeface="Inter"/>
@@ -30243,7 +28583,7 @@
                 <a:ea typeface="Inter"/>
                 <a:cs typeface="+mn-lt"/>
               </a:rPr>
-              <a:t>BudgetSalesRep</a:t>
+              <a:t>budget_table</a:t>
             </a:r>
             <a:r>
               <a:rPr lang="en-US" sz="2000" dirty="0">
@@ -30257,7 +28597,7 @@
                 <a:ea typeface="Inter"/>
                 <a:cs typeface="+mn-lt"/>
               </a:rPr>
-              <a:t>SalesRepTable</a:t>
+              <a:t>sales_rep_table</a:t>
             </a:r>
             <a:endParaRPr lang="en-US" sz="2000" dirty="0">
               <a:ea typeface="Inter"/>
@@ -30368,33 +28708,15 @@
                                   </p:childTnLst>
                                 </p:cTn>
                               </p:par>
-                            </p:childTnLst>
-                          </p:cTn>
-                        </p:par>
-                      </p:childTnLst>
-                    </p:cTn>
-                  </p:par>
-                  <p:par>
-                    <p:cTn id="7" fill="hold">
-                      <p:stCondLst>
-                        <p:cond delay="indefinite"/>
-                      </p:stCondLst>
-                      <p:childTnLst>
-                        <p:par>
-                          <p:cTn id="8" fill="hold">
-                            <p:stCondLst>
-                              <p:cond delay="0"/>
-                            </p:stCondLst>
-                            <p:childTnLst>
                               <p:par>
-                                <p:cTn id="9" presetID="1" presetClass="entr" presetSubtype="0" fill="hold" grpId="0" nodeType="clickEffect">
+                                <p:cTn id="7" presetID="1" presetClass="entr" presetSubtype="0" fill="hold" grpId="0" nodeType="withEffect">
                                   <p:stCondLst>
                                     <p:cond delay="0"/>
                                   </p:stCondLst>
                                   <p:childTnLst>
                                     <p:set>
                                       <p:cBhvr>
-                                        <p:cTn id="10" dur="1" fill="hold">
+                                        <p:cTn id="8" dur="1" fill="hold">
                                           <p:stCondLst>
                                             <p:cond delay="0"/>
                                           </p:stCondLst>
@@ -30424,26 +28746,26 @@
                     </p:cTn>
                   </p:par>
                   <p:par>
-                    <p:cTn id="11" fill="hold">
+                    <p:cTn id="9" fill="hold">
                       <p:stCondLst>
                         <p:cond delay="indefinite"/>
                       </p:stCondLst>
                       <p:childTnLst>
                         <p:par>
-                          <p:cTn id="12" fill="hold">
+                          <p:cTn id="10" fill="hold">
                             <p:stCondLst>
                               <p:cond delay="0"/>
                             </p:stCondLst>
                             <p:childTnLst>
                               <p:par>
-                                <p:cTn id="13" presetID="1" presetClass="entr" presetSubtype="0" fill="hold" grpId="0" nodeType="clickEffect">
+                                <p:cTn id="11" presetID="1" presetClass="entr" presetSubtype="0" fill="hold" grpId="0" nodeType="clickEffect">
                                   <p:stCondLst>
                                     <p:cond delay="0"/>
                                   </p:stCondLst>
                                   <p:childTnLst>
                                     <p:set>
                                       <p:cBhvr>
-                                        <p:cTn id="14" dur="1" fill="hold">
+                                        <p:cTn id="12" dur="1" fill="hold">
                                           <p:stCondLst>
                                             <p:cond delay="0"/>
                                           </p:stCondLst>
@@ -30473,26 +28795,26 @@
                     </p:cTn>
                   </p:par>
                   <p:par>
-                    <p:cTn id="15" fill="hold">
+                    <p:cTn id="13" fill="hold">
                       <p:stCondLst>
                         <p:cond delay="indefinite"/>
                       </p:stCondLst>
                       <p:childTnLst>
                         <p:par>
-                          <p:cTn id="16" fill="hold">
+                          <p:cTn id="14" fill="hold">
                             <p:stCondLst>
                               <p:cond delay="0"/>
                             </p:stCondLst>
                             <p:childTnLst>
                               <p:par>
-                                <p:cTn id="17" presetID="1" presetClass="entr" presetSubtype="0" fill="hold" grpId="0" nodeType="clickEffect">
+                                <p:cTn id="15" presetID="1" presetClass="entr" presetSubtype="0" fill="hold" grpId="0" nodeType="clickEffect">
                                   <p:stCondLst>
                                     <p:cond delay="0"/>
                                   </p:stCondLst>
                                   <p:childTnLst>
                                     <p:set>
                                       <p:cBhvr>
-                                        <p:cTn id="18" dur="1" fill="hold">
+                                        <p:cTn id="16" dur="1" fill="hold">
                                           <p:stCondLst>
                                             <p:cond delay="0"/>
                                           </p:stCondLst>
@@ -30522,26 +28844,26 @@
                     </p:cTn>
                   </p:par>
                   <p:par>
-                    <p:cTn id="19" fill="hold">
+                    <p:cTn id="17" fill="hold">
                       <p:stCondLst>
                         <p:cond delay="indefinite"/>
                       </p:stCondLst>
                       <p:childTnLst>
                         <p:par>
-                          <p:cTn id="20" fill="hold">
+                          <p:cTn id="18" fill="hold">
                             <p:stCondLst>
                               <p:cond delay="0"/>
                             </p:stCondLst>
                             <p:childTnLst>
                               <p:par>
-                                <p:cTn id="21" presetID="1" presetClass="entr" presetSubtype="0" fill="hold" grpId="0" nodeType="clickEffect">
+                                <p:cTn id="19" presetID="1" presetClass="entr" presetSubtype="0" fill="hold" grpId="0" nodeType="clickEffect">
                                   <p:stCondLst>
                                     <p:cond delay="0"/>
                                   </p:stCondLst>
                                   <p:childTnLst>
                                     <p:set>
                                       <p:cBhvr>
-                                        <p:cTn id="22" dur="1" fill="hold">
+                                        <p:cTn id="20" dur="1" fill="hold">
                                           <p:stCondLst>
                                             <p:cond delay="0"/>
                                           </p:stCondLst>
@@ -30571,26 +28893,26 @@
                     </p:cTn>
                   </p:par>
                   <p:par>
-                    <p:cTn id="23" fill="hold">
+                    <p:cTn id="21" fill="hold">
                       <p:stCondLst>
                         <p:cond delay="indefinite"/>
                       </p:stCondLst>
                       <p:childTnLst>
                         <p:par>
-                          <p:cTn id="24" fill="hold">
+                          <p:cTn id="22" fill="hold">
                             <p:stCondLst>
                               <p:cond delay="0"/>
                             </p:stCondLst>
                             <p:childTnLst>
                               <p:par>
-                                <p:cTn id="25" presetID="1" presetClass="entr" presetSubtype="0" fill="hold" grpId="0" nodeType="clickEffect">
+                                <p:cTn id="23" presetID="1" presetClass="entr" presetSubtype="0" fill="hold" grpId="0" nodeType="clickEffect">
                                   <p:stCondLst>
                                     <p:cond delay="0"/>
                                   </p:stCondLst>
                                   <p:childTnLst>
                                     <p:set>
                                       <p:cBhvr>
-                                        <p:cTn id="26" dur="1" fill="hold">
+                                        <p:cTn id="24" dur="1" fill="hold">
                                           <p:stCondLst>
                                             <p:cond delay="0"/>
                                           </p:stCondLst>
@@ -30620,26 +28942,26 @@
                     </p:cTn>
                   </p:par>
                   <p:par>
-                    <p:cTn id="27" fill="hold">
+                    <p:cTn id="25" fill="hold">
                       <p:stCondLst>
                         <p:cond delay="indefinite"/>
                       </p:stCondLst>
                       <p:childTnLst>
                         <p:par>
-                          <p:cTn id="28" fill="hold">
+                          <p:cTn id="26" fill="hold">
                             <p:stCondLst>
                               <p:cond delay="0"/>
                             </p:stCondLst>
                             <p:childTnLst>
                               <p:par>
-                                <p:cTn id="29" presetID="1" presetClass="entr" presetSubtype="0" fill="hold" grpId="0" nodeType="clickEffect">
+                                <p:cTn id="27" presetID="1" presetClass="entr" presetSubtype="0" fill="hold" grpId="0" nodeType="clickEffect">
                                   <p:stCondLst>
                                     <p:cond delay="0"/>
                                   </p:stCondLst>
                                   <p:childTnLst>
                                     <p:set>
                                       <p:cBhvr>
-                                        <p:cTn id="30" dur="1" fill="hold">
+                                        <p:cTn id="28" dur="1" fill="hold">
                                           <p:stCondLst>
                                             <p:cond delay="0"/>
                                           </p:stCondLst>
@@ -30669,26 +28991,26 @@
                     </p:cTn>
                   </p:par>
                   <p:par>
-                    <p:cTn id="31" fill="hold">
+                    <p:cTn id="29" fill="hold">
                       <p:stCondLst>
                         <p:cond delay="indefinite"/>
                       </p:stCondLst>
                       <p:childTnLst>
                         <p:par>
-                          <p:cTn id="32" fill="hold">
+                          <p:cTn id="30" fill="hold">
                             <p:stCondLst>
                               <p:cond delay="0"/>
                             </p:stCondLst>
                             <p:childTnLst>
                               <p:par>
-                                <p:cTn id="33" presetID="1" presetClass="entr" presetSubtype="0" fill="hold" grpId="0" nodeType="clickEffect">
+                                <p:cTn id="31" presetID="1" presetClass="entr" presetSubtype="0" fill="hold" grpId="0" nodeType="clickEffect">
                                   <p:stCondLst>
                                     <p:cond delay="0"/>
                                   </p:stCondLst>
                                   <p:childTnLst>
                                     <p:set>
                                       <p:cBhvr>
-                                        <p:cTn id="34" dur="1" fill="hold">
+                                        <p:cTn id="32" dur="1" fill="hold">
                                           <p:stCondLst>
                                             <p:cond delay="0"/>
                                           </p:stCondLst>
@@ -30718,19 +29040,50 @@
                     </p:cTn>
                   </p:par>
                   <p:par>
-                    <p:cTn id="35" fill="hold">
+                    <p:cTn id="33" fill="hold">
                       <p:stCondLst>
                         <p:cond delay="indefinite"/>
                       </p:stCondLst>
                       <p:childTnLst>
                         <p:par>
-                          <p:cTn id="36" fill="hold">
+                          <p:cTn id="34" fill="hold">
                             <p:stCondLst>
                               <p:cond delay="0"/>
                             </p:stCondLst>
                             <p:childTnLst>
                               <p:par>
-                                <p:cTn id="37" presetID="1" presetClass="entr" presetSubtype="0" fill="hold" grpId="0" nodeType="clickEffect">
+                                <p:cTn id="35" presetID="1" presetClass="entr" presetSubtype="0" fill="hold" grpId="0" nodeType="clickEffect">
+                                  <p:stCondLst>
+                                    <p:cond delay="0"/>
+                                  </p:stCondLst>
+                                  <p:childTnLst>
+                                    <p:set>
+                                      <p:cBhvr>
+                                        <p:cTn id="36" dur="1" fill="hold">
+                                          <p:stCondLst>
+                                            <p:cond delay="0"/>
+                                          </p:stCondLst>
+                                        </p:cTn>
+                                        <p:tgtEl>
+                                          <p:spTgt spid="5">
+                                            <p:txEl>
+                                              <p:pRg st="8" end="8"/>
+                                            </p:txEl>
+                                          </p:spTgt>
+                                        </p:tgtEl>
+                                        <p:attrNameLst>
+                                          <p:attrName>style.visibility</p:attrName>
+                                        </p:attrNameLst>
+                                      </p:cBhvr>
+                                      <p:to>
+                                        <p:strVal val="visible"/>
+                                      </p:to>
+                                    </p:set>
+                                  </p:childTnLst>
+                                </p:cTn>
+                              </p:par>
+                              <p:par>
+                                <p:cTn id="37" presetID="1" presetClass="entr" presetSubtype="0" fill="hold" grpId="0" nodeType="withEffect">
                                   <p:stCondLst>
                                     <p:cond delay="0"/>
                                   </p:stCondLst>
@@ -30745,7 +29098,7 @@
                                         <p:tgtEl>
                                           <p:spTgt spid="5">
                                             <p:txEl>
-                                              <p:pRg st="8" end="8"/>
+                                              <p:pRg st="9" end="9"/>
                                             </p:txEl>
                                           </p:spTgt>
                                         </p:tgtEl>
@@ -30794,7 +29147,7 @@
                                         <p:tgtEl>
                                           <p:spTgt spid="5">
                                             <p:txEl>
-                                              <p:pRg st="9" end="9"/>
+                                              <p:pRg st="10" end="10"/>
                                             </p:txEl>
                                           </p:spTgt>
                                         </p:tgtEl>
@@ -30840,6 +29193,499 @@
       <p:bldP spid="5" grpId="0" uiExpand="1" build="p"/>
     </p:bldLst>
   </p:timing>
+</p:sld>
+</file>
+
+<file path=ppt/slides/slide7.xml><?xml version="1.0" encoding="utf-8"?>
+<p:sld xmlns:a="http://schemas.openxmlformats.org/drawingml/2006/main" xmlns:r="http://schemas.openxmlformats.org/officeDocument/2006/relationships" xmlns:p="http://schemas.openxmlformats.org/presentationml/2006/main">
+  <p:cSld>
+    <p:spTree>
+      <p:nvGrpSpPr>
+        <p:cNvPr id="1" name="">
+          <a:extLst>
+            <a:ext uri="{FF2B5EF4-FFF2-40B4-BE49-F238E27FC236}">
+              <a16:creationId xmlns:a16="http://schemas.microsoft.com/office/drawing/2014/main" id="{1469E57D-0698-A888-A781-B5BA4506C68A}"/>
+            </a:ext>
+          </a:extLst>
+        </p:cNvPr>
+        <p:cNvGrpSpPr/>
+        <p:nvPr/>
+      </p:nvGrpSpPr>
+      <p:grpSpPr>
+        <a:xfrm>
+          <a:off x="0" y="0"/>
+          <a:ext cx="0" cy="0"/>
+          <a:chOff x="0" y="0"/>
+          <a:chExt cx="0" cy="0"/>
+        </a:xfrm>
+      </p:grpSpPr>
+      <p:sp>
+        <p:nvSpPr>
+          <p:cNvPr id="3" name="Content Placeholder 2">
+            <a:extLst>
+              <a:ext uri="{FF2B5EF4-FFF2-40B4-BE49-F238E27FC236}">
+                <a16:creationId xmlns:a16="http://schemas.microsoft.com/office/drawing/2014/main" id="{BDBE8A2B-41F3-0AD3-D3F7-DF4AC897F524}"/>
+              </a:ext>
+            </a:extLst>
+          </p:cNvPr>
+          <p:cNvSpPr>
+            <a:spLocks noGrp="1"/>
+          </p:cNvSpPr>
+          <p:nvPr>
+            <p:ph sz="quarter" idx="10"/>
+          </p:nvPr>
+        </p:nvSpPr>
+        <p:spPr/>
+        <p:txBody>
+          <a:bodyPr/>
+          <a:lstStyle/>
+          <a:p>
+            <a:pPr marL="0" indent="0">
+              <a:lnSpc>
+                <a:spcPct val="150000"/>
+              </a:lnSpc>
+              <a:buNone/>
+            </a:pPr>
+            <a:endParaRPr lang="en-US" sz="2800">
+              <a:ea typeface="Inter"/>
+            </a:endParaRPr>
+          </a:p>
+          <a:p>
+            <a:pPr marL="457200" lvl="1" indent="0">
+              <a:lnSpc>
+                <a:spcPct val="150000"/>
+              </a:lnSpc>
+              <a:buNone/>
+            </a:pPr>
+            <a:endParaRPr lang="en-US" sz="2000">
+              <a:ea typeface="Inter"/>
+            </a:endParaRPr>
+          </a:p>
+        </p:txBody>
+      </p:sp>
+      <p:sp>
+        <p:nvSpPr>
+          <p:cNvPr id="5" name="Title 4">
+            <a:extLst>
+              <a:ext uri="{FF2B5EF4-FFF2-40B4-BE49-F238E27FC236}">
+                <a16:creationId xmlns:a16="http://schemas.microsoft.com/office/drawing/2014/main" id="{1A4C1C95-F9A5-B2F3-AAC1-345A2C3966B7}"/>
+              </a:ext>
+            </a:extLst>
+          </p:cNvPr>
+          <p:cNvSpPr>
+            <a:spLocks noGrp="1"/>
+          </p:cNvSpPr>
+          <p:nvPr>
+            <p:ph type="ctrTitle"/>
+          </p:nvPr>
+        </p:nvSpPr>
+        <p:spPr>
+          <a:xfrm>
+            <a:off x="4283493" y="2675333"/>
+            <a:ext cx="3777666" cy="357043"/>
+          </a:xfrm>
+        </p:spPr>
+        <p:txBody>
+          <a:bodyPr/>
+          <a:lstStyle/>
+          <a:p>
+            <a:r>
+              <a:rPr lang="en-US"/>
+              <a:t>Paus 10:30-10:45</a:t>
+            </a:r>
+          </a:p>
+        </p:txBody>
+      </p:sp>
+    </p:spTree>
+    <p:extLst>
+      <p:ext uri="{BB962C8B-B14F-4D97-AF65-F5344CB8AC3E}">
+        <p14:creationId xmlns:p14="http://schemas.microsoft.com/office/powerpoint/2010/main" val="2156485789"/>
+      </p:ext>
+    </p:extLst>
+  </p:cSld>
+  <p:clrMapOvr>
+    <a:masterClrMapping/>
+  </p:clrMapOvr>
+</p:sld>
+</file>
+
+<file path=ppt/slides/slide8.xml><?xml version="1.0" encoding="utf-8"?>
+<p:sld xmlns:a="http://schemas.openxmlformats.org/drawingml/2006/main" xmlns:r="http://schemas.openxmlformats.org/officeDocument/2006/relationships" xmlns:p="http://schemas.openxmlformats.org/presentationml/2006/main">
+  <p:cSld>
+    <p:spTree>
+      <p:nvGrpSpPr>
+        <p:cNvPr id="1" name="">
+          <a:extLst>
+            <a:ext uri="{FF2B5EF4-FFF2-40B4-BE49-F238E27FC236}">
+              <a16:creationId xmlns:a16="http://schemas.microsoft.com/office/drawing/2014/main" id="{CB468293-66B4-9531-CEB8-1310D457F65A}"/>
+            </a:ext>
+          </a:extLst>
+        </p:cNvPr>
+        <p:cNvGrpSpPr/>
+        <p:nvPr/>
+      </p:nvGrpSpPr>
+      <p:grpSpPr>
+        <a:xfrm>
+          <a:off x="0" y="0"/>
+          <a:ext cx="0" cy="0"/>
+          <a:chOff x="0" y="0"/>
+          <a:chExt cx="0" cy="0"/>
+        </a:xfrm>
+      </p:grpSpPr>
+      <p:sp>
+        <p:nvSpPr>
+          <p:cNvPr id="2" name="Title 1">
+            <a:extLst>
+              <a:ext uri="{FF2B5EF4-FFF2-40B4-BE49-F238E27FC236}">
+                <a16:creationId xmlns:a16="http://schemas.microsoft.com/office/drawing/2014/main" id="{C529379B-8B4D-351D-FB50-463F72441597}"/>
+              </a:ext>
+            </a:extLst>
+          </p:cNvPr>
+          <p:cNvSpPr>
+            <a:spLocks noGrp="1"/>
+          </p:cNvSpPr>
+          <p:nvPr>
+            <p:ph type="ctrTitle"/>
+          </p:nvPr>
+        </p:nvSpPr>
+        <p:spPr/>
+        <p:txBody>
+          <a:bodyPr/>
+          <a:lstStyle/>
+          <a:p>
+            <a:r>
+              <a:rPr lang="en-US"/>
+              <a:t>SQL – </a:t>
+            </a:r>
+            <a:r>
+              <a:rPr lang="en-US" err="1"/>
+              <a:t>tabelite</a:t>
+            </a:r>
+            <a:r>
+              <a:rPr lang="en-US"/>
+              <a:t> </a:t>
+            </a:r>
+            <a:r>
+              <a:rPr lang="en-US" err="1"/>
+              <a:t>ühendamine</a:t>
+            </a:r>
+          </a:p>
+        </p:txBody>
+      </p:sp>
+      <p:pic>
+        <p:nvPicPr>
+          <p:cNvPr id="4" name="Content Placeholder 3" descr="A diagram of a diagram&#10;&#10;AI-generated content may be incorrect.">
+            <a:extLst>
+              <a:ext uri="{FF2B5EF4-FFF2-40B4-BE49-F238E27FC236}">
+                <a16:creationId xmlns:a16="http://schemas.microsoft.com/office/drawing/2014/main" id="{CD786AF0-AFD6-3E5D-F34D-476B12CA5EE5}"/>
+              </a:ext>
+            </a:extLst>
+          </p:cNvPr>
+          <p:cNvPicPr>
+            <a:picLocks noGrp="1" noChangeAspect="1"/>
+          </p:cNvPicPr>
+          <p:nvPr>
+            <p:ph sz="quarter" idx="10"/>
+          </p:nvPr>
+        </p:nvPicPr>
+        <p:blipFill>
+          <a:blip r:embed="rId2"/>
+          <a:stretch>
+            <a:fillRect/>
+          </a:stretch>
+        </p:blipFill>
+        <p:spPr>
+          <a:xfrm>
+            <a:off x="1105773" y="978462"/>
+            <a:ext cx="3946694" cy="5129944"/>
+          </a:xfrm>
+          <a:prstGeom prst="rect">
+            <a:avLst/>
+          </a:prstGeom>
+        </p:spPr>
+      </p:pic>
+      <p:sp>
+        <p:nvSpPr>
+          <p:cNvPr id="3" name="TextBox 2">
+            <a:extLst>
+              <a:ext uri="{FF2B5EF4-FFF2-40B4-BE49-F238E27FC236}">
+                <a16:creationId xmlns:a16="http://schemas.microsoft.com/office/drawing/2014/main" id="{9CC3A1CD-3F5D-D5BD-4A3E-F94218F8E9CB}"/>
+              </a:ext>
+            </a:extLst>
+          </p:cNvPr>
+          <p:cNvSpPr txBox="1"/>
+          <p:nvPr/>
+        </p:nvSpPr>
+        <p:spPr>
+          <a:xfrm>
+            <a:off x="6007608" y="1444752"/>
+            <a:ext cx="5742432" cy="874214"/>
+          </a:xfrm>
+          <a:prstGeom prst="rect">
+            <a:avLst/>
+          </a:prstGeom>
+          <a:noFill/>
+        </p:spPr>
+        <p:txBody>
+          <a:bodyPr wrap="square" rtlCol="0">
+            <a:spAutoFit/>
+          </a:bodyPr>
+          <a:lstStyle/>
+          <a:p>
+            <a:pPr>
+              <a:lnSpc>
+                <a:spcPct val="150000"/>
+              </a:lnSpc>
+            </a:pPr>
+            <a:r>
+              <a:rPr lang="en-US" dirty="0" err="1"/>
+              <a:t>Vaatame</a:t>
+            </a:r>
+            <a:r>
+              <a:rPr lang="en-US" dirty="0"/>
+              <a:t> </a:t>
+            </a:r>
+            <a:r>
+              <a:rPr lang="en-US" dirty="0" err="1"/>
+              <a:t>loogikat</a:t>
+            </a:r>
+            <a:r>
+              <a:rPr lang="en-US" dirty="0"/>
+              <a:t> </a:t>
+            </a:r>
+            <a:r>
+              <a:rPr lang="en-US" dirty="0" err="1"/>
+              <a:t>näite</a:t>
+            </a:r>
+            <a:r>
+              <a:rPr lang="en-US" dirty="0"/>
+              <a:t> </a:t>
+            </a:r>
+            <a:r>
+              <a:rPr lang="en-US" dirty="0" err="1"/>
+              <a:t>põhjal</a:t>
+            </a:r>
+            <a:r>
+              <a:rPr lang="en-US" dirty="0"/>
+              <a:t>: </a:t>
+            </a:r>
+          </a:p>
+          <a:p>
+            <a:pPr marL="285750" indent="-285750">
+              <a:lnSpc>
+                <a:spcPct val="150000"/>
+              </a:lnSpc>
+              <a:buFont typeface="Arial" panose="020B0604020202020204" pitchFamily="34" charset="0"/>
+              <a:buChar char="•"/>
+            </a:pPr>
+            <a:r>
+              <a:rPr lang="en-US" dirty="0" err="1"/>
+              <a:t>Github</a:t>
+            </a:r>
+            <a:r>
+              <a:rPr lang="en-US" dirty="0"/>
+              <a:t> </a:t>
+            </a:r>
+            <a:r>
+              <a:rPr lang="en-US" dirty="0">
+                <a:sym typeface="Wingdings" panose="05000000000000000000" pitchFamily="2" charset="2"/>
+              </a:rPr>
+              <a:t> Day6: JOINS_loogika.XLSX</a:t>
+            </a:r>
+            <a:endParaRPr lang="et-EE" dirty="0"/>
+          </a:p>
+        </p:txBody>
+      </p:sp>
+    </p:spTree>
+    <p:extLst>
+      <p:ext uri="{BB962C8B-B14F-4D97-AF65-F5344CB8AC3E}">
+        <p14:creationId xmlns:p14="http://schemas.microsoft.com/office/powerpoint/2010/main" val="1137972440"/>
+      </p:ext>
+    </p:extLst>
+  </p:cSld>
+  <p:clrMapOvr>
+    <a:masterClrMapping/>
+  </p:clrMapOvr>
+</p:sld>
+</file>
+
+<file path=ppt/slides/slide9.xml><?xml version="1.0" encoding="utf-8"?>
+<p:sld xmlns:a="http://schemas.openxmlformats.org/drawingml/2006/main" xmlns:r="http://schemas.openxmlformats.org/officeDocument/2006/relationships" xmlns:p="http://schemas.openxmlformats.org/presentationml/2006/main">
+  <p:cSld>
+    <p:spTree>
+      <p:nvGrpSpPr>
+        <p:cNvPr id="1" name="">
+          <a:extLst>
+            <a:ext uri="{FF2B5EF4-FFF2-40B4-BE49-F238E27FC236}">
+              <a16:creationId xmlns:a16="http://schemas.microsoft.com/office/drawing/2014/main" id="{2EB12F7D-0F32-EA88-B041-16143FEB8924}"/>
+            </a:ext>
+          </a:extLst>
+        </p:cNvPr>
+        <p:cNvGrpSpPr/>
+        <p:nvPr/>
+      </p:nvGrpSpPr>
+      <p:grpSpPr>
+        <a:xfrm>
+          <a:off x="0" y="0"/>
+          <a:ext cx="0" cy="0"/>
+          <a:chOff x="0" y="0"/>
+          <a:chExt cx="0" cy="0"/>
+        </a:xfrm>
+      </p:grpSpPr>
+      <p:sp>
+        <p:nvSpPr>
+          <p:cNvPr id="2" name="Title 1">
+            <a:extLst>
+              <a:ext uri="{FF2B5EF4-FFF2-40B4-BE49-F238E27FC236}">
+                <a16:creationId xmlns:a16="http://schemas.microsoft.com/office/drawing/2014/main" id="{89D3BBAC-BC5C-05AA-FECD-7B6769209565}"/>
+              </a:ext>
+            </a:extLst>
+          </p:cNvPr>
+          <p:cNvSpPr>
+            <a:spLocks noGrp="1"/>
+          </p:cNvSpPr>
+          <p:nvPr>
+            <p:ph type="ctrTitle"/>
+          </p:nvPr>
+        </p:nvSpPr>
+        <p:spPr/>
+        <p:txBody>
+          <a:bodyPr/>
+          <a:lstStyle/>
+          <a:p>
+            <a:r>
+              <a:rPr lang="en-US" dirty="0" err="1"/>
+              <a:t>DBeaver</a:t>
+            </a:r>
+            <a:r>
+              <a:rPr lang="en-US" dirty="0"/>
+              <a:t> – </a:t>
+            </a:r>
+            <a:r>
+              <a:rPr lang="en-US" dirty="0" err="1"/>
+              <a:t>tabelite</a:t>
+            </a:r>
+            <a:r>
+              <a:rPr lang="en-US" dirty="0"/>
+              <a:t> </a:t>
+            </a:r>
+            <a:r>
+              <a:rPr lang="en-US" dirty="0" err="1"/>
+              <a:t>ühendamine</a:t>
+            </a:r>
+            <a:endParaRPr lang="en-US" dirty="0"/>
+          </a:p>
+        </p:txBody>
+      </p:sp>
+      <p:sp>
+        <p:nvSpPr>
+          <p:cNvPr id="5" name="Content Placeholder 4">
+            <a:extLst>
+              <a:ext uri="{FF2B5EF4-FFF2-40B4-BE49-F238E27FC236}">
+                <a16:creationId xmlns:a16="http://schemas.microsoft.com/office/drawing/2014/main" id="{C8F9C816-F533-C6F6-6632-43FAF5E25536}"/>
+              </a:ext>
+            </a:extLst>
+          </p:cNvPr>
+          <p:cNvSpPr>
+            <a:spLocks noGrp="1"/>
+          </p:cNvSpPr>
+          <p:nvPr>
+            <p:ph sz="quarter" idx="10"/>
+          </p:nvPr>
+        </p:nvSpPr>
+        <p:spPr/>
+        <p:txBody>
+          <a:bodyPr/>
+          <a:lstStyle/>
+          <a:p>
+            <a:pPr marL="285750" indent="-285750">
+              <a:lnSpc>
+                <a:spcPct val="150000"/>
+              </a:lnSpc>
+            </a:pPr>
+            <a:r>
+              <a:rPr lang="en-US" sz="2400" dirty="0" err="1">
+                <a:ea typeface="Inter"/>
+                <a:cs typeface="+mn-lt"/>
+              </a:rPr>
+              <a:t>Lahendame</a:t>
+            </a:r>
+            <a:r>
+              <a:rPr lang="en-US" sz="2400" dirty="0">
+                <a:ea typeface="Inter"/>
+                <a:cs typeface="+mn-lt"/>
+              </a:rPr>
+              <a:t>: Day6 </a:t>
+            </a:r>
+            <a:r>
+              <a:rPr lang="en-US" sz="2400" dirty="0">
+                <a:ea typeface="Inter"/>
+                <a:cs typeface="+mn-lt"/>
+                <a:sym typeface="Wingdings" panose="05000000000000000000" pitchFamily="2" charset="2"/>
+              </a:rPr>
+              <a:t> </a:t>
+            </a:r>
+            <a:r>
+              <a:rPr lang="en-US" sz="2400" dirty="0">
+                <a:ea typeface="Inter"/>
+                <a:cs typeface="+mn-lt"/>
+              </a:rPr>
+              <a:t>sql_ulesanded_5.txt</a:t>
+            </a:r>
+          </a:p>
+          <a:p>
+            <a:pPr marL="857250" lvl="1" indent="-342900">
+              <a:lnSpc>
+                <a:spcPct val="150000"/>
+              </a:lnSpc>
+              <a:buAutoNum type="arabicPeriod"/>
+            </a:pPr>
+            <a:endParaRPr lang="en-US" dirty="0">
+              <a:solidFill>
+                <a:srgbClr val="121212"/>
+              </a:solidFill>
+              <a:cs typeface="+mn-lt"/>
+            </a:endParaRPr>
+          </a:p>
+          <a:p>
+            <a:pPr marL="857250" lvl="1" indent="-342900">
+              <a:lnSpc>
+                <a:spcPct val="150000"/>
+              </a:lnSpc>
+              <a:buAutoNum type="arabicPeriod"/>
+            </a:pPr>
+            <a:endParaRPr lang="en-US" dirty="0">
+              <a:cs typeface="+mn-lt"/>
+            </a:endParaRPr>
+          </a:p>
+          <a:p>
+            <a:pPr marL="0" indent="0">
+              <a:buClr>
+                <a:srgbClr val="121212"/>
+              </a:buClr>
+              <a:buNone/>
+            </a:pPr>
+            <a:endParaRPr lang="en-US" dirty="0">
+              <a:cs typeface="+mn-lt"/>
+            </a:endParaRPr>
+          </a:p>
+          <a:p>
+            <a:endParaRPr lang="en-US" dirty="0">
+              <a:cs typeface="+mn-lt"/>
+            </a:endParaRPr>
+          </a:p>
+        </p:txBody>
+      </p:sp>
+    </p:spTree>
+    <p:extLst>
+      <p:ext uri="{BB962C8B-B14F-4D97-AF65-F5344CB8AC3E}">
+        <p14:creationId xmlns:p14="http://schemas.microsoft.com/office/powerpoint/2010/main" val="2838608381"/>
+      </p:ext>
+    </p:extLst>
+  </p:cSld>
+  <p:clrMapOvr>
+    <a:masterClrMapping/>
+  </p:clrMapOvr>
 </p:sld>
 </file>
 
@@ -31635,21 +30481,6 @@
 </file>
 
 <file path=customXml/item1.xml><?xml version="1.0" encoding="utf-8"?>
-<?mso-contentType ?>
-<FormTemplates xmlns="http://schemas.microsoft.com/sharepoint/v3/contenttype/forms">
-  <Display>DocumentLibraryForm</Display>
-  <Edit>DocumentLibraryForm</Edit>
-  <New>DocumentLibraryForm</New>
-</FormTemplates>
-</file>
-
-<file path=customXml/item2.xml><?xml version="1.0" encoding="utf-8"?>
-<p:properties xmlns:p="http://schemas.microsoft.com/office/2006/metadata/properties" xmlns:xsi="http://www.w3.org/2001/XMLSchema-instance" xmlns:pc="http://schemas.microsoft.com/office/infopath/2007/PartnerControls">
-  <documentManagement/>
-</p:properties>
-</file>
-
-<file path=customXml/item3.xml><?xml version="1.0" encoding="utf-8"?>
 <ct:contentTypeSchema xmlns:ct="http://schemas.microsoft.com/office/2006/metadata/contentType" xmlns:ma="http://schemas.microsoft.com/office/2006/metadata/properties/metaAttributes" ct:_="" ma:_="" ma:contentTypeName="Document" ma:contentTypeID="0x010100C4D27B8FA8976546BCD79313C588588D" ma:contentTypeVersion="8" ma:contentTypeDescription="Create a new document." ma:contentTypeScope="" ma:versionID="a112c56f6fe148a79025c76584832af0">
   <xsd:schema xmlns:xsd="http://www.w3.org/2001/XMLSchema" xmlns:xs="http://www.w3.org/2001/XMLSchema" xmlns:p="http://schemas.microsoft.com/office/2006/metadata/properties" xmlns:ns2="a1a2d923-8fea-42f1-bd41-9cdfff65694e" targetNamespace="http://schemas.microsoft.com/office/2006/metadata/properties" ma:root="true" ma:fieldsID="97c8655d467eaa9470a714421e7268c0" ns2:_="">
     <xsd:import namespace="a1a2d923-8fea-42f1-bd41-9cdfff65694e"/>
@@ -31817,24 +30648,22 @@
 </ct:contentTypeSchema>
 </file>
 
-<file path=customXml/itemProps1.xml><?xml version="1.0" encoding="utf-8"?>
-<ds:datastoreItem xmlns:ds="http://schemas.openxmlformats.org/officeDocument/2006/customXml" ds:itemID="{9DC439CA-6F1C-4005-ACA6-A52E04DEE0A7}">
-  <ds:schemaRefs>
-    <ds:schemaRef ds:uri="http://schemas.microsoft.com/sharepoint/v3/contenttype/forms"/>
-  </ds:schemaRefs>
-</ds:datastoreItem>
+<file path=customXml/item2.xml><?xml version="1.0" encoding="utf-8"?>
+<p:properties xmlns:p="http://schemas.microsoft.com/office/2006/metadata/properties" xmlns:xsi="http://www.w3.org/2001/XMLSchema-instance" xmlns:pc="http://schemas.microsoft.com/office/infopath/2007/PartnerControls">
+  <documentManagement/>
+</p:properties>
 </file>
 
-<file path=customXml/itemProps2.xml><?xml version="1.0" encoding="utf-8"?>
-<ds:datastoreItem xmlns:ds="http://schemas.openxmlformats.org/officeDocument/2006/customXml" ds:itemID="{5BDF4908-A52A-47DD-A794-6E02D71942FC}">
-  <ds:schemaRefs>
-    <ds:schemaRef ds:uri="http://schemas.microsoft.com/office/2006/metadata/properties"/>
-    <ds:schemaRef ds:uri="http://schemas.microsoft.com/office/infopath/2007/PartnerControls"/>
-  </ds:schemaRefs>
-</ds:datastoreItem>
+<file path=customXml/item3.xml><?xml version="1.0" encoding="utf-8"?>
+<?mso-contentType ?>
+<FormTemplates xmlns="http://schemas.microsoft.com/sharepoint/v3/contenttype/forms">
+  <Display>DocumentLibraryForm</Display>
+  <Edit>DocumentLibraryForm</Edit>
+  <New>DocumentLibraryForm</New>
+</FormTemplates>
 </file>
 
-<file path=customXml/itemProps3.xml><?xml version="1.0" encoding="utf-8"?>
+<file path=customXml/itemProps1.xml><?xml version="1.0" encoding="utf-8"?>
 <ds:datastoreItem xmlns:ds="http://schemas.openxmlformats.org/officeDocument/2006/customXml" ds:itemID="{9CF4F972-2392-44D0-AA45-41AC4FDC4A59}">
   <ds:schemaRefs>
     <ds:schemaRef ds:uri="a1a2d923-8fea-42f1-bd41-9cdfff65694e"/>
@@ -31850,4 +30679,21 @@
     <ds:schemaRef ds:uri="http://www.w3.org/2001/XMLSchema"/>
   </ds:schemaRefs>
 </ds:datastoreItem>
+</file>
+
+<file path=customXml/itemProps2.xml><?xml version="1.0" encoding="utf-8"?>
+<ds:datastoreItem xmlns:ds="http://schemas.openxmlformats.org/officeDocument/2006/customXml" ds:itemID="{5BDF4908-A52A-47DD-A794-6E02D71942FC}">
+  <ds:schemaRefs>
+    <ds:schemaRef ds:uri="http://schemas.microsoft.com/office/2006/metadata/properties"/>
+    <ds:schemaRef ds:uri="http://schemas.microsoft.com/office/infopath/2007/PartnerControls"/>
+  </ds:schemaRefs>
+</ds:datastoreItem>
+</file>
+
+<file path=customXml/itemProps3.xml><?xml version="1.0" encoding="utf-8"?>
+<ds:datastoreItem xmlns:ds="http://schemas.openxmlformats.org/officeDocument/2006/customXml" ds:itemID="{9DC439CA-6F1C-4005-ACA6-A52E04DEE0A7}">
+  <ds:schemaRefs>
+    <ds:schemaRef ds:uri="http://schemas.microsoft.com/sharepoint/v3/contenttype/forms"/>
+  </ds:schemaRefs>
+</ds:datastoreItem>
 </file>
--- a/Day6/6-paev-andmetarkus-esitlus.pptx
+++ b/Day6/6-paev-andmetarkus-esitlus.pptx
@@ -5,10 +5,10 @@
     <p:sldMasterId id="2147483648" r:id="rId4"/>
   </p:sldMasterIdLst>
   <p:notesMasterIdLst>
-    <p:notesMasterId r:id="rId19"/>
+    <p:notesMasterId r:id="rId20"/>
   </p:notesMasterIdLst>
   <p:handoutMasterIdLst>
-    <p:handoutMasterId r:id="rId20"/>
+    <p:handoutMasterId r:id="rId21"/>
   </p:handoutMasterIdLst>
   <p:sldIdLst>
     <p:sldId id="417" r:id="rId5"/>
@@ -22,26 +22,27 @@
     <p:sldId id="644" r:id="rId13"/>
     <p:sldId id="555" r:id="rId14"/>
     <p:sldId id="645" r:id="rId15"/>
-    <p:sldId id="558" r:id="rId16"/>
-    <p:sldId id="472" r:id="rId17"/>
-    <p:sldId id="557" r:id="rId18"/>
+    <p:sldId id="492" r:id="rId16"/>
+    <p:sldId id="558" r:id="rId17"/>
+    <p:sldId id="472" r:id="rId18"/>
+    <p:sldId id="557" r:id="rId19"/>
   </p:sldIdLst>
   <p:sldSz cx="12192000" cy="6858000"/>
   <p:notesSz cx="6858000" cy="9144000"/>
   <p:embeddedFontLst>
     <p:embeddedFont>
       <p:font typeface="Inter" panose="020B0604020202020204" charset="0"/>
-      <p:regular r:id="rId21"/>
-      <p:bold r:id="rId22"/>
+      <p:regular r:id="rId22"/>
+      <p:bold r:id="rId23"/>
     </p:embeddedFont>
     <p:embeddedFont>
       <p:font typeface="Inter Bold" panose="020B0604020202020204" charset="0"/>
-      <p:bold r:id="rId23"/>
+      <p:bold r:id="rId24"/>
     </p:embeddedFont>
     <p:embeddedFont>
       <p:font typeface="Poppins SemiBold" panose="00000700000000000000" pitchFamily="2" charset="0"/>
-      <p:bold r:id="rId24"/>
-      <p:boldItalic r:id="rId25"/>
+      <p:bold r:id="rId25"/>
+      <p:boldItalic r:id="rId26"/>
     </p:embeddedFont>
   </p:embeddedFontLst>
   <p:defaultTextStyle>
@@ -153,7 +154,7 @@
 <file path=ppt/revisionInfo.xml><?xml version="1.0" encoding="utf-8"?>
 <p1510:revInfo xmlns:a="http://schemas.openxmlformats.org/drawingml/2006/main" xmlns:r="http://schemas.openxmlformats.org/officeDocument/2006/relationships" xmlns:p1510="http://schemas.microsoft.com/office/powerpoint/2015/10/main">
   <p1510:revLst>
-    <p1510:client id="{3A2F0262-37F4-47A8-B98C-004B30A9F6B3}" v="203" dt="2026-04-06T18:52:17.470"/>
+    <p1510:client id="{3A2F0262-37F4-47A8-B98C-004B30A9F6B3}" v="204" dt="2026-04-07T09:10:32.550"/>
   </p1510:revLst>
 </p1510:revInfo>
 </file>
@@ -163,7 +164,7 @@
   <pc:docChgLst>
     <pc:chgData name="Virve Räni" userId="161a7437-7ef4-49ec-91bf-54882f313dfe" providerId="ADAL" clId="{6D754EED-65AA-4A21-B175-6769012CF487}"/>
     <pc:docChg chg="custSel addSld delSld modSld sldOrd">
-      <pc:chgData name="Virve Räni" userId="161a7437-7ef4-49ec-91bf-54882f313dfe" providerId="ADAL" clId="{6D754EED-65AA-4A21-B175-6769012CF487}" dt="2026-04-06T19:42:00.933" v="579" actId="20577"/>
+      <pc:chgData name="Virve Räni" userId="161a7437-7ef4-49ec-91bf-54882f313dfe" providerId="ADAL" clId="{6D754EED-65AA-4A21-B175-6769012CF487}" dt="2026-04-07T09:44:33.491" v="810" actId="20577"/>
       <pc:docMkLst>
         <pc:docMk/>
       </pc:docMkLst>
@@ -256,6 +257,21 @@
           <pc:docMk/>
           <pc:sldMk cId="1821779248" sldId="490"/>
         </pc:sldMkLst>
+      </pc:sldChg>
+      <pc:sldChg chg="modSp add mod">
+        <pc:chgData name="Virve Räni" userId="161a7437-7ef4-49ec-91bf-54882f313dfe" providerId="ADAL" clId="{6D754EED-65AA-4A21-B175-6769012CF487}" dt="2026-04-07T09:44:33.491" v="810" actId="20577"/>
+        <pc:sldMkLst>
+          <pc:docMk/>
+          <pc:sldMk cId="4264120663" sldId="492"/>
+        </pc:sldMkLst>
+        <pc:spChg chg="mod">
+          <ac:chgData name="Virve Räni" userId="161a7437-7ef4-49ec-91bf-54882f313dfe" providerId="ADAL" clId="{6D754EED-65AA-4A21-B175-6769012CF487}" dt="2026-04-07T09:44:33.491" v="810" actId="20577"/>
+          <ac:spMkLst>
+            <pc:docMk/>
+            <pc:sldMk cId="4264120663" sldId="492"/>
+            <ac:spMk id="5" creationId="{E9CF221A-8E5D-03C4-56B6-F5CA02C825C0}"/>
+          </ac:spMkLst>
+        </pc:spChg>
       </pc:sldChg>
       <pc:sldChg chg="modSp del mod">
         <pc:chgData name="Virve Räni" userId="161a7437-7ef4-49ec-91bf-54882f313dfe" providerId="ADAL" clId="{6D754EED-65AA-4A21-B175-6769012CF487}" dt="2026-04-06T19:39:31.240" v="421" actId="47"/>
@@ -429,7 +445,7 @@
           <a:p>
             <a:fld id="{F9D2AD6E-DEDD-49A0-A4BE-7A081A9112DA}" type="datetimeFigureOut">
               <a:rPr lang="en-US" smtClean="0"/>
-              <a:t>4/6/2026</a:t>
+              <a:t>4/7/2026</a:t>
             </a:fld>
             <a:endParaRPr lang="en-US"/>
           </a:p>
@@ -605,7 +621,7 @@
           </a:lstStyle>
           <a:p>
             <a:fld id="{2AF9C1A6-4321-41FA-B001-4140F0E2457F}" type="datetimeFigureOut">
-              <a:t>06.04.2026</a:t>
+              <a:t>07.04.2026</a:t>
             </a:fld>
             <a:endParaRPr lang="en-US"/>
           </a:p>
@@ -12084,7 +12100,7 @@
           <a:p>
             <a:fld id="{DE840A40-73C8-4048-8140-49F5D65BB431}" type="datetimeFigureOut">
               <a:rPr lang="et-EE" smtClean="0"/>
-              <a:t>06.04.2026</a:t>
+              <a:t>07.04.2026</a:t>
             </a:fld>
             <a:endParaRPr lang="et-EE"/>
           </a:p>
@@ -24440,6 +24456,811 @@
         <p:cNvPr id="1" name="">
           <a:extLst>
             <a:ext uri="{FF2B5EF4-FFF2-40B4-BE49-F238E27FC236}">
+              <a16:creationId xmlns:a16="http://schemas.microsoft.com/office/drawing/2014/main" id="{5A120294-3B0C-1FA8-EA29-F48F16C2F670}"/>
+            </a:ext>
+          </a:extLst>
+        </p:cNvPr>
+        <p:cNvGrpSpPr/>
+        <p:nvPr/>
+      </p:nvGrpSpPr>
+      <p:grpSpPr>
+        <a:xfrm>
+          <a:off x="0" y="0"/>
+          <a:ext cx="0" cy="0"/>
+          <a:chOff x="0" y="0"/>
+          <a:chExt cx="0" cy="0"/>
+        </a:xfrm>
+      </p:grpSpPr>
+      <p:sp>
+        <p:nvSpPr>
+          <p:cNvPr id="2" name="Title 1">
+            <a:extLst>
+              <a:ext uri="{FF2B5EF4-FFF2-40B4-BE49-F238E27FC236}">
+                <a16:creationId xmlns:a16="http://schemas.microsoft.com/office/drawing/2014/main" id="{087D87FE-C19E-B5D7-602C-B58CD8DC8460}"/>
+              </a:ext>
+            </a:extLst>
+          </p:cNvPr>
+          <p:cNvSpPr>
+            <a:spLocks noGrp="1"/>
+          </p:cNvSpPr>
+          <p:nvPr>
+            <p:ph type="ctrTitle"/>
+          </p:nvPr>
+        </p:nvSpPr>
+        <p:spPr/>
+        <p:txBody>
+          <a:bodyPr/>
+          <a:lstStyle/>
+          <a:p>
+            <a:r>
+              <a:rPr lang="en-US"/>
+              <a:t>SQL </a:t>
+            </a:r>
+            <a:r>
+              <a:rPr lang="en-US" err="1"/>
+              <a:t>päring</a:t>
+            </a:r>
+            <a:r>
+              <a:rPr lang="en-US"/>
+              <a:t> </a:t>
+            </a:r>
+            <a:r>
+              <a:rPr lang="en-US" err="1"/>
+              <a:t>müügiandmete</a:t>
+            </a:r>
+            <a:r>
+              <a:rPr lang="en-US"/>
+              <a:t> </a:t>
+            </a:r>
+            <a:r>
+              <a:rPr lang="en-US" err="1"/>
+              <a:t>analüüsiks</a:t>
+            </a:r>
+            <a:r>
+              <a:rPr lang="en-US"/>
+              <a:t> </a:t>
+            </a:r>
+          </a:p>
+        </p:txBody>
+      </p:sp>
+      <p:sp>
+        <p:nvSpPr>
+          <p:cNvPr id="5" name="Content Placeholder 4">
+            <a:extLst>
+              <a:ext uri="{FF2B5EF4-FFF2-40B4-BE49-F238E27FC236}">
+                <a16:creationId xmlns:a16="http://schemas.microsoft.com/office/drawing/2014/main" id="{E9CF221A-8E5D-03C4-56B6-F5CA02C825C0}"/>
+              </a:ext>
+            </a:extLst>
+          </p:cNvPr>
+          <p:cNvSpPr>
+            <a:spLocks noGrp="1"/>
+          </p:cNvSpPr>
+          <p:nvPr>
+            <p:ph sz="quarter" idx="10"/>
+          </p:nvPr>
+        </p:nvSpPr>
+        <p:spPr/>
+        <p:txBody>
+          <a:bodyPr/>
+          <a:lstStyle/>
+          <a:p>
+            <a:pPr marL="285750" indent="-285750">
+              <a:lnSpc>
+                <a:spcPct val="150000"/>
+              </a:lnSpc>
+            </a:pPr>
+            <a:r>
+              <a:rPr lang="en-US" sz="2000" dirty="0">
+                <a:ea typeface="Inter"/>
+                <a:cs typeface="+mn-lt"/>
+              </a:rPr>
+              <a:t>Leia </a:t>
+            </a:r>
+            <a:r>
+              <a:rPr lang="en-US" sz="2000" dirty="0" err="1">
+                <a:ea typeface="Inter"/>
+                <a:cs typeface="+mn-lt"/>
+              </a:rPr>
+              <a:t>müügisummad</a:t>
+            </a:r>
+            <a:r>
+              <a:rPr lang="en-US" sz="2000" dirty="0">
+                <a:ea typeface="Inter"/>
+                <a:cs typeface="+mn-lt"/>
+              </a:rPr>
+              <a:t> </a:t>
+            </a:r>
+            <a:r>
+              <a:rPr lang="en-US" sz="2000" dirty="0" err="1">
+                <a:ea typeface="Inter"/>
+                <a:cs typeface="+mn-lt"/>
+              </a:rPr>
+              <a:t>toodete</a:t>
+            </a:r>
+            <a:r>
+              <a:rPr lang="en-US" sz="2000" dirty="0">
+                <a:ea typeface="Inter"/>
+                <a:cs typeface="+mn-lt"/>
+              </a:rPr>
+              <a:t> </a:t>
+            </a:r>
+            <a:r>
+              <a:rPr lang="en-US" sz="2000" dirty="0" err="1">
+                <a:ea typeface="Inter"/>
+                <a:cs typeface="+mn-lt"/>
+              </a:rPr>
+              <a:t>kaupa</a:t>
+            </a:r>
+            <a:r>
+              <a:rPr lang="en-US" sz="2000" dirty="0">
+                <a:ea typeface="Inter"/>
+                <a:cs typeface="+mn-lt"/>
+              </a:rPr>
+              <a:t> – </a:t>
+            </a:r>
+            <a:r>
+              <a:rPr lang="en-US" sz="2000" dirty="0" err="1">
+                <a:ea typeface="Inter"/>
+                <a:cs typeface="+mn-lt"/>
+              </a:rPr>
+              <a:t>toote</a:t>
+            </a:r>
+            <a:r>
+              <a:rPr lang="en-US" sz="2000" dirty="0">
+                <a:ea typeface="Inter"/>
+                <a:cs typeface="+mn-lt"/>
+              </a:rPr>
+              <a:t> ID ja </a:t>
+            </a:r>
+            <a:r>
+              <a:rPr lang="en-US" sz="2000" dirty="0" err="1">
+                <a:ea typeface="Inter"/>
+                <a:cs typeface="+mn-lt"/>
+              </a:rPr>
+              <a:t>müügisumma</a:t>
+            </a:r>
+            <a:endParaRPr lang="en-US" sz="2000" dirty="0">
+              <a:cs typeface="+mn-lt"/>
+            </a:endParaRPr>
+          </a:p>
+          <a:p>
+            <a:pPr marL="285750" indent="-285750">
+              <a:lnSpc>
+                <a:spcPct val="150000"/>
+              </a:lnSpc>
+            </a:pPr>
+            <a:r>
+              <a:rPr lang="en-US" sz="2000" dirty="0">
+                <a:ea typeface="Inter"/>
+                <a:cs typeface="+mn-lt"/>
+              </a:rPr>
+              <a:t>Leia </a:t>
+            </a:r>
+            <a:r>
+              <a:rPr lang="en-US" sz="2000" dirty="0" err="1">
+                <a:ea typeface="Inter"/>
+                <a:cs typeface="+mn-lt"/>
+              </a:rPr>
+              <a:t>müügisummad</a:t>
+            </a:r>
+            <a:r>
+              <a:rPr lang="en-US" sz="2000" dirty="0">
+                <a:ea typeface="Inter"/>
+                <a:cs typeface="+mn-lt"/>
+              </a:rPr>
+              <a:t> </a:t>
+            </a:r>
+            <a:r>
+              <a:rPr lang="en-US" sz="2000" dirty="0" err="1">
+                <a:ea typeface="Inter"/>
+                <a:cs typeface="+mn-lt"/>
+              </a:rPr>
+              <a:t>klientide</a:t>
+            </a:r>
+            <a:r>
+              <a:rPr lang="en-US" sz="2000" dirty="0">
+                <a:ea typeface="Inter"/>
+                <a:cs typeface="+mn-lt"/>
+              </a:rPr>
+              <a:t> </a:t>
+            </a:r>
+            <a:r>
+              <a:rPr lang="en-US" sz="2000" dirty="0" err="1">
+                <a:ea typeface="Inter"/>
+                <a:cs typeface="+mn-lt"/>
+              </a:rPr>
+              <a:t>kaupa</a:t>
+            </a:r>
+            <a:r>
+              <a:rPr lang="en-US" sz="2000" dirty="0">
+                <a:ea typeface="Inter"/>
+                <a:cs typeface="+mn-lt"/>
+              </a:rPr>
+              <a:t> – </a:t>
+            </a:r>
+            <a:r>
+              <a:rPr lang="en-US" sz="2000" dirty="0" err="1">
+                <a:ea typeface="Inter"/>
+                <a:cs typeface="+mn-lt"/>
+              </a:rPr>
+              <a:t>kliendi</a:t>
+            </a:r>
+            <a:r>
+              <a:rPr lang="en-US" sz="2000" dirty="0">
+                <a:ea typeface="Inter"/>
+                <a:cs typeface="+mn-lt"/>
+              </a:rPr>
+              <a:t> ID ja </a:t>
+            </a:r>
+            <a:r>
+              <a:rPr lang="en-US" sz="2000" dirty="0" err="1">
+                <a:ea typeface="Inter"/>
+                <a:cs typeface="+mn-lt"/>
+              </a:rPr>
+              <a:t>müügisumma</a:t>
+            </a:r>
+            <a:endParaRPr lang="en-US" sz="2000" dirty="0">
+              <a:cs typeface="+mn-lt"/>
+            </a:endParaRPr>
+          </a:p>
+          <a:p>
+            <a:pPr marL="285750" indent="-285750">
+              <a:lnSpc>
+                <a:spcPct val="150000"/>
+              </a:lnSpc>
+              <a:buClr>
+                <a:srgbClr val="121212"/>
+              </a:buClr>
+            </a:pPr>
+            <a:r>
+              <a:rPr lang="en-US" sz="2000" dirty="0">
+                <a:ea typeface="Inter"/>
+                <a:cs typeface="+mn-lt"/>
+              </a:rPr>
+              <a:t>Leia </a:t>
+            </a:r>
+            <a:r>
+              <a:rPr lang="en-US" sz="2000" dirty="0" err="1">
+                <a:ea typeface="Inter"/>
+                <a:cs typeface="+mn-lt"/>
+              </a:rPr>
+              <a:t>müügisummad</a:t>
+            </a:r>
+            <a:r>
+              <a:rPr lang="en-US" sz="2000" dirty="0">
+                <a:ea typeface="Inter"/>
+                <a:cs typeface="+mn-lt"/>
+              </a:rPr>
+              <a:t> </a:t>
+            </a:r>
+            <a:r>
+              <a:rPr lang="en-US" sz="2000" dirty="0" err="1">
+                <a:ea typeface="Inter"/>
+                <a:cs typeface="+mn-lt"/>
+              </a:rPr>
+              <a:t>müügiesindajate</a:t>
+            </a:r>
+            <a:r>
+              <a:rPr lang="en-US" sz="2000" dirty="0">
+                <a:ea typeface="Inter"/>
+                <a:cs typeface="+mn-lt"/>
+              </a:rPr>
+              <a:t> </a:t>
+            </a:r>
+            <a:r>
+              <a:rPr lang="en-US" sz="2000" dirty="0" err="1">
+                <a:ea typeface="Inter"/>
+                <a:cs typeface="+mn-lt"/>
+              </a:rPr>
+              <a:t>kaupa</a:t>
+            </a:r>
+            <a:r>
+              <a:rPr lang="en-US" sz="2000" dirty="0">
+                <a:ea typeface="Inter"/>
+                <a:cs typeface="+mn-lt"/>
+              </a:rPr>
+              <a:t> – </a:t>
+            </a:r>
+            <a:r>
+              <a:rPr lang="en-US" sz="2000" dirty="0" err="1">
+                <a:ea typeface="Inter"/>
+                <a:cs typeface="+mn-lt"/>
+              </a:rPr>
+              <a:t>kliendiesindaja</a:t>
+            </a:r>
+            <a:r>
+              <a:rPr lang="en-US" sz="2000" dirty="0">
+                <a:ea typeface="Inter"/>
+                <a:cs typeface="+mn-lt"/>
+              </a:rPr>
+              <a:t> ID ja </a:t>
+            </a:r>
+            <a:r>
+              <a:rPr lang="en-US" sz="2000" dirty="0" err="1">
+                <a:ea typeface="Inter"/>
+                <a:cs typeface="+mn-lt"/>
+              </a:rPr>
+              <a:t>müügisumma</a:t>
+            </a:r>
+            <a:endParaRPr lang="en-US" sz="2000" dirty="0">
+              <a:cs typeface="+mn-lt"/>
+            </a:endParaRPr>
+          </a:p>
+          <a:p>
+            <a:pPr marL="285750" indent="-285750">
+              <a:lnSpc>
+                <a:spcPct val="150000"/>
+              </a:lnSpc>
+              <a:buClr>
+                <a:srgbClr val="121212"/>
+              </a:buClr>
+            </a:pPr>
+            <a:r>
+              <a:rPr lang="en-US" sz="2000" dirty="0">
+                <a:ea typeface="Inter"/>
+                <a:cs typeface="+mn-lt"/>
+              </a:rPr>
+              <a:t>Leia </a:t>
+            </a:r>
+            <a:r>
+              <a:rPr lang="en-US" sz="2000" dirty="0" err="1">
+                <a:ea typeface="Inter"/>
+                <a:cs typeface="+mn-lt"/>
+              </a:rPr>
+              <a:t>müügisummad</a:t>
+            </a:r>
+            <a:r>
+              <a:rPr lang="en-US" sz="2000" dirty="0">
+                <a:ea typeface="Inter"/>
+                <a:cs typeface="+mn-lt"/>
+              </a:rPr>
+              <a:t> </a:t>
+            </a:r>
+            <a:r>
+              <a:rPr lang="en-US" sz="2000" dirty="0" err="1">
+                <a:ea typeface="Inter"/>
+                <a:cs typeface="+mn-lt"/>
+              </a:rPr>
+              <a:t>aastate</a:t>
+            </a:r>
+            <a:r>
+              <a:rPr lang="en-US" sz="2000" dirty="0">
+                <a:ea typeface="Inter"/>
+                <a:cs typeface="+mn-lt"/>
+              </a:rPr>
+              <a:t> </a:t>
+            </a:r>
+            <a:r>
+              <a:rPr lang="en-US" sz="2000" dirty="0" err="1">
+                <a:ea typeface="Inter"/>
+                <a:cs typeface="+mn-lt"/>
+              </a:rPr>
+              <a:t>kaupa</a:t>
+            </a:r>
+            <a:r>
+              <a:rPr lang="en-US" sz="2000" dirty="0">
+                <a:ea typeface="Inter"/>
+                <a:cs typeface="+mn-lt"/>
+              </a:rPr>
+              <a:t> – </a:t>
+            </a:r>
+            <a:r>
+              <a:rPr lang="en-US" sz="2000" dirty="0" err="1">
+                <a:ea typeface="Inter"/>
+                <a:cs typeface="+mn-lt"/>
+              </a:rPr>
+              <a:t>aasta</a:t>
+            </a:r>
+            <a:r>
+              <a:rPr lang="en-US" sz="2000" dirty="0">
+                <a:ea typeface="Inter"/>
+                <a:cs typeface="+mn-lt"/>
+              </a:rPr>
+              <a:t> ja </a:t>
+            </a:r>
+            <a:r>
+              <a:rPr lang="en-US" sz="2000" dirty="0" err="1">
+                <a:ea typeface="Inter"/>
+                <a:cs typeface="+mn-lt"/>
+              </a:rPr>
+              <a:t>müügisumma</a:t>
+            </a:r>
+            <a:endParaRPr lang="en-US" sz="2000" dirty="0">
+              <a:cs typeface="+mn-lt"/>
+            </a:endParaRPr>
+          </a:p>
+          <a:p>
+            <a:pPr marL="342900" indent="-342900">
+              <a:lnSpc>
+                <a:spcPct val="150000"/>
+              </a:lnSpc>
+              <a:buClr>
+                <a:srgbClr val="121212"/>
+              </a:buClr>
+            </a:pPr>
+            <a:r>
+              <a:rPr lang="en-US" sz="2000" dirty="0">
+                <a:ea typeface="Inter"/>
+                <a:cs typeface="+mn-lt"/>
+              </a:rPr>
+              <a:t>Lisa </a:t>
+            </a:r>
+            <a:r>
+              <a:rPr lang="en-US" sz="2000" dirty="0" err="1">
+                <a:ea typeface="Inter"/>
+                <a:cs typeface="+mn-lt"/>
+              </a:rPr>
+              <a:t>müükidele</a:t>
+            </a:r>
+            <a:r>
+              <a:rPr lang="en-US" sz="2000" dirty="0">
+                <a:ea typeface="Inter"/>
+                <a:cs typeface="+mn-lt"/>
+              </a:rPr>
+              <a:t> </a:t>
+            </a:r>
+            <a:r>
+              <a:rPr lang="en-US" sz="2000" dirty="0" err="1">
+                <a:ea typeface="Inter"/>
+                <a:cs typeface="+mn-lt"/>
+              </a:rPr>
+              <a:t>müügisumma</a:t>
+            </a:r>
+            <a:r>
+              <a:rPr lang="en-US" sz="2000" dirty="0">
+                <a:ea typeface="Inter"/>
+                <a:cs typeface="+mn-lt"/>
+              </a:rPr>
+              <a:t> </a:t>
+            </a:r>
+            <a:r>
+              <a:rPr lang="en-US" sz="2000" dirty="0" err="1">
+                <a:ea typeface="Inter"/>
+                <a:cs typeface="+mn-lt"/>
+              </a:rPr>
+              <a:t>kategooriad</a:t>
+            </a:r>
+            <a:endParaRPr lang="en-US" sz="2000" dirty="0">
+              <a:cs typeface="+mn-lt"/>
+            </a:endParaRPr>
+          </a:p>
+          <a:p>
+            <a:pPr marL="857250" lvl="1">
+              <a:lnSpc>
+                <a:spcPct val="150000"/>
+              </a:lnSpc>
+              <a:buAutoNum type="arabicPeriod"/>
+            </a:pPr>
+            <a:r>
+              <a:rPr lang="en-US" sz="2000" dirty="0">
+                <a:ea typeface="Inter"/>
+                <a:cs typeface="+mn-lt"/>
+              </a:rPr>
+              <a:t>Large Sale &gt; 500</a:t>
+            </a:r>
+            <a:endParaRPr lang="en-US" sz="2000" dirty="0">
+              <a:cs typeface="+mn-lt"/>
+            </a:endParaRPr>
+          </a:p>
+          <a:p>
+            <a:pPr marL="857250" lvl="1">
+              <a:lnSpc>
+                <a:spcPct val="150000"/>
+              </a:lnSpc>
+              <a:buAutoNum type="arabicPeriod"/>
+            </a:pPr>
+            <a:r>
+              <a:rPr lang="en-US" sz="2000" dirty="0">
+                <a:ea typeface="Inter"/>
+                <a:cs typeface="+mn-lt"/>
+              </a:rPr>
+              <a:t>Medium Sale &lt;= 500 and &gt;= 250</a:t>
+            </a:r>
+            <a:endParaRPr lang="en-US" sz="2000" dirty="0">
+              <a:cs typeface="+mn-lt"/>
+            </a:endParaRPr>
+          </a:p>
+          <a:p>
+            <a:pPr marL="857250" lvl="1">
+              <a:lnSpc>
+                <a:spcPct val="150000"/>
+              </a:lnSpc>
+              <a:buAutoNum type="arabicPeriod"/>
+            </a:pPr>
+            <a:r>
+              <a:rPr lang="en-US" sz="2000" dirty="0">
+                <a:ea typeface="Inter"/>
+                <a:cs typeface="+mn-lt"/>
+              </a:rPr>
+              <a:t>Small Sale &lt; 250</a:t>
+            </a:r>
+            <a:endParaRPr lang="en-US" sz="2000" dirty="0">
+              <a:cs typeface="+mn-lt"/>
+            </a:endParaRPr>
+          </a:p>
+          <a:p>
+            <a:pPr marL="342900" indent="-342900">
+              <a:lnSpc>
+                <a:spcPct val="150000"/>
+              </a:lnSpc>
+              <a:buClr>
+                <a:srgbClr val="121212"/>
+              </a:buClr>
+            </a:pPr>
+            <a:r>
+              <a:rPr lang="en-US" sz="2000" dirty="0">
+                <a:ea typeface="Inter"/>
+                <a:cs typeface="+mn-lt"/>
+              </a:rPr>
+              <a:t>Leia </a:t>
+            </a:r>
+            <a:r>
+              <a:rPr lang="en-US" sz="2000" dirty="0" err="1">
+                <a:ea typeface="Inter"/>
+                <a:cs typeface="+mn-lt"/>
+              </a:rPr>
+              <a:t>müükide</a:t>
+            </a:r>
+            <a:r>
+              <a:rPr lang="en-US" sz="2000" dirty="0">
+                <a:ea typeface="Inter"/>
+                <a:cs typeface="+mn-lt"/>
+              </a:rPr>
+              <a:t> </a:t>
+            </a:r>
+            <a:r>
+              <a:rPr lang="en-US" sz="2000" dirty="0" err="1">
+                <a:ea typeface="Inter"/>
+                <a:cs typeface="+mn-lt"/>
+              </a:rPr>
+              <a:t>arv</a:t>
+            </a:r>
+            <a:r>
+              <a:rPr lang="en-US" sz="2000" dirty="0">
+                <a:ea typeface="Inter"/>
+                <a:cs typeface="+mn-lt"/>
+              </a:rPr>
+              <a:t> ja </a:t>
+            </a:r>
+            <a:r>
+              <a:rPr lang="en-US" sz="2000" dirty="0" err="1">
+                <a:ea typeface="Inter"/>
+                <a:cs typeface="+mn-lt"/>
+              </a:rPr>
+              <a:t>müügisumma</a:t>
+            </a:r>
+            <a:r>
+              <a:rPr lang="en-US" sz="2000" dirty="0">
+                <a:ea typeface="Inter"/>
+                <a:cs typeface="+mn-lt"/>
+              </a:rPr>
+              <a:t> </a:t>
+            </a:r>
+            <a:r>
+              <a:rPr lang="en-US" sz="2000" dirty="0" err="1">
+                <a:ea typeface="Inter"/>
+                <a:cs typeface="+mn-lt"/>
+              </a:rPr>
+              <a:t>müügisumma</a:t>
+            </a:r>
+            <a:r>
+              <a:rPr lang="en-US" sz="2000" dirty="0">
+                <a:ea typeface="Inter"/>
+                <a:cs typeface="+mn-lt"/>
+              </a:rPr>
+              <a:t> </a:t>
+            </a:r>
+            <a:r>
+              <a:rPr lang="en-US" sz="2000" dirty="0" err="1">
+                <a:ea typeface="Inter"/>
+                <a:cs typeface="+mn-lt"/>
+              </a:rPr>
+              <a:t>kategooriate</a:t>
+            </a:r>
+            <a:r>
+              <a:rPr lang="en-US" sz="2000" dirty="0">
+                <a:ea typeface="Inter"/>
+                <a:cs typeface="+mn-lt"/>
+              </a:rPr>
+              <a:t> </a:t>
+            </a:r>
+            <a:r>
+              <a:rPr lang="en-US" sz="2000" dirty="0" err="1">
+                <a:ea typeface="Inter"/>
+                <a:cs typeface="+mn-lt"/>
+              </a:rPr>
+              <a:t>kaupa</a:t>
+            </a:r>
+            <a:endParaRPr lang="en-US" sz="2000" dirty="0">
+              <a:ea typeface="Inter"/>
+              <a:cs typeface="+mn-lt"/>
+            </a:endParaRPr>
+          </a:p>
+          <a:p>
+            <a:pPr marL="857250" lvl="1" indent="-342900">
+              <a:lnSpc>
+                <a:spcPct val="150000"/>
+              </a:lnSpc>
+              <a:buClr>
+                <a:srgbClr val="121212"/>
+              </a:buClr>
+            </a:pPr>
+            <a:r>
+              <a:rPr lang="en-US" sz="2000" dirty="0" err="1">
+                <a:ea typeface="Inter"/>
+                <a:cs typeface="+mn-lt"/>
+              </a:rPr>
+              <a:t>Müügisumma</a:t>
+            </a:r>
+            <a:r>
+              <a:rPr lang="en-US" sz="2000" dirty="0">
+                <a:ea typeface="Inter"/>
+                <a:cs typeface="+mn-lt"/>
+              </a:rPr>
+              <a:t> </a:t>
+            </a:r>
+            <a:r>
+              <a:rPr lang="en-US" sz="2000" dirty="0" err="1">
+                <a:ea typeface="Inter"/>
+                <a:cs typeface="+mn-lt"/>
+              </a:rPr>
+              <a:t>kategooria</a:t>
+            </a:r>
+            <a:r>
+              <a:rPr lang="en-US" sz="2000" dirty="0">
+                <a:ea typeface="Inter"/>
+                <a:cs typeface="+mn-lt"/>
+              </a:rPr>
+              <a:t>, </a:t>
+            </a:r>
+            <a:r>
+              <a:rPr lang="en-US" sz="2000" dirty="0" err="1">
+                <a:ea typeface="Inter"/>
+                <a:cs typeface="+mn-lt"/>
+              </a:rPr>
+              <a:t>müükide</a:t>
+            </a:r>
+            <a:r>
+              <a:rPr lang="en-US" sz="2000" dirty="0">
+                <a:ea typeface="Inter"/>
+                <a:cs typeface="+mn-lt"/>
+              </a:rPr>
+              <a:t> </a:t>
+            </a:r>
+            <a:r>
+              <a:rPr lang="en-US" sz="2000" dirty="0" err="1">
+                <a:ea typeface="Inter"/>
+                <a:cs typeface="+mn-lt"/>
+              </a:rPr>
+              <a:t>arv</a:t>
+            </a:r>
+            <a:r>
+              <a:rPr lang="en-US" sz="2000" dirty="0">
+                <a:ea typeface="Inter"/>
+                <a:cs typeface="+mn-lt"/>
+              </a:rPr>
+              <a:t>, </a:t>
+            </a:r>
+            <a:r>
+              <a:rPr lang="en-US" sz="2000" dirty="0" err="1">
+                <a:ea typeface="Inter"/>
+                <a:cs typeface="+mn-lt"/>
+              </a:rPr>
+              <a:t>müügisumma</a:t>
+            </a:r>
+            <a:endParaRPr lang="en-US" sz="2000" dirty="0">
+              <a:cs typeface="+mn-lt"/>
+            </a:endParaRPr>
+          </a:p>
+          <a:p>
+            <a:pPr marL="342900" indent="-342900">
+              <a:lnSpc>
+                <a:spcPct val="150000"/>
+              </a:lnSpc>
+              <a:buClr>
+                <a:srgbClr val="121212"/>
+              </a:buClr>
+            </a:pPr>
+            <a:r>
+              <a:rPr lang="en-US" sz="2000" dirty="0">
+                <a:ea typeface="Inter"/>
+                <a:cs typeface="+mn-lt"/>
+              </a:rPr>
+              <a:t>Mida </a:t>
+            </a:r>
+            <a:r>
+              <a:rPr lang="en-US" sz="2000" dirty="0" err="1">
+                <a:ea typeface="Inter"/>
+                <a:cs typeface="+mn-lt"/>
+              </a:rPr>
+              <a:t>veel</a:t>
+            </a:r>
+            <a:r>
+              <a:rPr lang="en-US" sz="2000" dirty="0">
+                <a:ea typeface="Inter"/>
+                <a:cs typeface="+mn-lt"/>
+              </a:rPr>
+              <a:t> </a:t>
+            </a:r>
+            <a:r>
+              <a:rPr lang="en-US" sz="2000" dirty="0" err="1">
+                <a:ea typeface="Inter"/>
+                <a:cs typeface="+mn-lt"/>
+              </a:rPr>
+              <a:t>võiks</a:t>
+            </a:r>
+            <a:r>
+              <a:rPr lang="en-US" sz="2000" dirty="0">
+                <a:ea typeface="Inter"/>
+                <a:cs typeface="+mn-lt"/>
+              </a:rPr>
+              <a:t> </a:t>
+            </a:r>
+            <a:r>
+              <a:rPr lang="en-US" sz="2000" dirty="0" err="1">
+                <a:ea typeface="Inter"/>
+                <a:cs typeface="+mn-lt"/>
+              </a:rPr>
+              <a:t>leida</a:t>
+            </a:r>
+            <a:r>
+              <a:rPr lang="en-US" sz="2000" dirty="0">
+                <a:ea typeface="Inter"/>
+                <a:cs typeface="+mn-lt"/>
+              </a:rPr>
+              <a:t>?</a:t>
+            </a:r>
+            <a:endParaRPr lang="en-US" sz="2000" dirty="0">
+              <a:cs typeface="+mn-lt"/>
+            </a:endParaRPr>
+          </a:p>
+          <a:p>
+            <a:pPr marL="857250" lvl="1" indent="-342900">
+              <a:lnSpc>
+                <a:spcPct val="150000"/>
+              </a:lnSpc>
+              <a:buAutoNum type="arabicPeriod"/>
+            </a:pPr>
+            <a:endParaRPr lang="en-US" dirty="0">
+              <a:cs typeface="+mn-lt"/>
+            </a:endParaRPr>
+          </a:p>
+          <a:p>
+            <a:pPr marL="0" indent="0">
+              <a:buNone/>
+            </a:pPr>
+            <a:endParaRPr lang="en-US" dirty="0">
+              <a:cs typeface="+mn-lt"/>
+            </a:endParaRPr>
+          </a:p>
+          <a:p>
+            <a:endParaRPr lang="en-US" dirty="0">
+              <a:cs typeface="+mn-lt"/>
+            </a:endParaRPr>
+          </a:p>
+        </p:txBody>
+      </p:sp>
+    </p:spTree>
+    <p:extLst>
+      <p:ext uri="{BB962C8B-B14F-4D97-AF65-F5344CB8AC3E}">
+        <p14:creationId xmlns:p14="http://schemas.microsoft.com/office/powerpoint/2010/main" val="4264120663"/>
+      </p:ext>
+    </p:extLst>
+  </p:cSld>
+  <p:clrMapOvr>
+    <a:masterClrMapping/>
+  </p:clrMapOvr>
+</p:sld>
+</file>
+
+<file path=ppt/slides/slide13.xml><?xml version="1.0" encoding="utf-8"?>
+<p:sld xmlns:a="http://schemas.openxmlformats.org/drawingml/2006/main" xmlns:r="http://schemas.openxmlformats.org/officeDocument/2006/relationships" xmlns:p="http://schemas.openxmlformats.org/presentationml/2006/main">
+  <p:cSld>
+    <p:spTree>
+      <p:nvGrpSpPr>
+        <p:cNvPr id="1" name="">
+          <a:extLst>
+            <a:ext uri="{FF2B5EF4-FFF2-40B4-BE49-F238E27FC236}">
               <a16:creationId xmlns:a16="http://schemas.microsoft.com/office/drawing/2014/main" id="{14BCBF13-0577-C954-E859-4485C0A777E3}"/>
             </a:ext>
           </a:extLst>
@@ -24545,7 +25366,7 @@
 </p:sld>
 </file>
 
-<file path=ppt/slides/slide13.xml><?xml version="1.0" encoding="utf-8"?>
+<file path=ppt/slides/slide14.xml><?xml version="1.0" encoding="utf-8"?>
 <p:sld xmlns:a="http://schemas.openxmlformats.org/drawingml/2006/main" xmlns:r="http://schemas.openxmlformats.org/officeDocument/2006/relationships" xmlns:p="http://schemas.openxmlformats.org/presentationml/2006/main">
   <p:cSld>
     <p:spTree>
@@ -25048,7 +25869,7 @@
 </p:sld>
 </file>
 
-<file path=ppt/slides/slide14.xml><?xml version="1.0" encoding="utf-8"?>
+<file path=ppt/slides/slide15.xml><?xml version="1.0" encoding="utf-8"?>
 <p:sld xmlns:a="http://schemas.openxmlformats.org/drawingml/2006/main" xmlns:r="http://schemas.openxmlformats.org/officeDocument/2006/relationships" xmlns:p="http://schemas.openxmlformats.org/presentationml/2006/main">
   <p:cSld>
     <p:spTree>
@@ -30481,6 +31302,21 @@
 </file>
 
 <file path=customXml/item1.xml><?xml version="1.0" encoding="utf-8"?>
+<?mso-contentType ?>
+<FormTemplates xmlns="http://schemas.microsoft.com/sharepoint/v3/contenttype/forms">
+  <Display>DocumentLibraryForm</Display>
+  <Edit>DocumentLibraryForm</Edit>
+  <New>DocumentLibraryForm</New>
+</FormTemplates>
+</file>
+
+<file path=customXml/item2.xml><?xml version="1.0" encoding="utf-8"?>
+<p:properties xmlns:p="http://schemas.microsoft.com/office/2006/metadata/properties" xmlns:xsi="http://www.w3.org/2001/XMLSchema-instance" xmlns:pc="http://schemas.microsoft.com/office/infopath/2007/PartnerControls">
+  <documentManagement/>
+</p:properties>
+</file>
+
+<file path=customXml/item3.xml><?xml version="1.0" encoding="utf-8"?>
 <ct:contentTypeSchema xmlns:ct="http://schemas.microsoft.com/office/2006/metadata/contentType" xmlns:ma="http://schemas.microsoft.com/office/2006/metadata/properties/metaAttributes" ct:_="" ma:_="" ma:contentTypeName="Document" ma:contentTypeID="0x010100C4D27B8FA8976546BCD79313C588588D" ma:contentTypeVersion="8" ma:contentTypeDescription="Create a new document." ma:contentTypeScope="" ma:versionID="a112c56f6fe148a79025c76584832af0">
   <xsd:schema xmlns:xsd="http://www.w3.org/2001/XMLSchema" xmlns:xs="http://www.w3.org/2001/XMLSchema" xmlns:p="http://schemas.microsoft.com/office/2006/metadata/properties" xmlns:ns2="a1a2d923-8fea-42f1-bd41-9cdfff65694e" targetNamespace="http://schemas.microsoft.com/office/2006/metadata/properties" ma:root="true" ma:fieldsID="97c8655d467eaa9470a714421e7268c0" ns2:_="">
     <xsd:import namespace="a1a2d923-8fea-42f1-bd41-9cdfff65694e"/>
@@ -30648,22 +31484,24 @@
 </ct:contentTypeSchema>
 </file>
 
-<file path=customXml/item2.xml><?xml version="1.0" encoding="utf-8"?>
-<p:properties xmlns:p="http://schemas.microsoft.com/office/2006/metadata/properties" xmlns:xsi="http://www.w3.org/2001/XMLSchema-instance" xmlns:pc="http://schemas.microsoft.com/office/infopath/2007/PartnerControls">
-  <documentManagement/>
-</p:properties>
+<file path=customXml/itemProps1.xml><?xml version="1.0" encoding="utf-8"?>
+<ds:datastoreItem xmlns:ds="http://schemas.openxmlformats.org/officeDocument/2006/customXml" ds:itemID="{9DC439CA-6F1C-4005-ACA6-A52E04DEE0A7}">
+  <ds:schemaRefs>
+    <ds:schemaRef ds:uri="http://schemas.microsoft.com/sharepoint/v3/contenttype/forms"/>
+  </ds:schemaRefs>
+</ds:datastoreItem>
 </file>
 
-<file path=customXml/item3.xml><?xml version="1.0" encoding="utf-8"?>
-<?mso-contentType ?>
-<FormTemplates xmlns="http://schemas.microsoft.com/sharepoint/v3/contenttype/forms">
-  <Display>DocumentLibraryForm</Display>
-  <Edit>DocumentLibraryForm</Edit>
-  <New>DocumentLibraryForm</New>
-</FormTemplates>
+<file path=customXml/itemProps2.xml><?xml version="1.0" encoding="utf-8"?>
+<ds:datastoreItem xmlns:ds="http://schemas.openxmlformats.org/officeDocument/2006/customXml" ds:itemID="{5BDF4908-A52A-47DD-A794-6E02D71942FC}">
+  <ds:schemaRefs>
+    <ds:schemaRef ds:uri="http://schemas.microsoft.com/office/2006/metadata/properties"/>
+    <ds:schemaRef ds:uri="http://schemas.microsoft.com/office/infopath/2007/PartnerControls"/>
+  </ds:schemaRefs>
+</ds:datastoreItem>
 </file>
 
-<file path=customXml/itemProps1.xml><?xml version="1.0" encoding="utf-8"?>
+<file path=customXml/itemProps3.xml><?xml version="1.0" encoding="utf-8"?>
 <ds:datastoreItem xmlns:ds="http://schemas.openxmlformats.org/officeDocument/2006/customXml" ds:itemID="{9CF4F972-2392-44D0-AA45-41AC4FDC4A59}">
   <ds:schemaRefs>
     <ds:schemaRef ds:uri="a1a2d923-8fea-42f1-bd41-9cdfff65694e"/>
@@ -30679,21 +31517,4 @@
     <ds:schemaRef ds:uri="http://www.w3.org/2001/XMLSchema"/>
   </ds:schemaRefs>
 </ds:datastoreItem>
-</file>
-
-<file path=customXml/itemProps2.xml><?xml version="1.0" encoding="utf-8"?>
-<ds:datastoreItem xmlns:ds="http://schemas.openxmlformats.org/officeDocument/2006/customXml" ds:itemID="{5BDF4908-A52A-47DD-A794-6E02D71942FC}">
-  <ds:schemaRefs>
-    <ds:schemaRef ds:uri="http://schemas.microsoft.com/office/2006/metadata/properties"/>
-    <ds:schemaRef ds:uri="http://schemas.microsoft.com/office/infopath/2007/PartnerControls"/>
-  </ds:schemaRefs>
-</ds:datastoreItem>
-</file>
-
-<file path=customXml/itemProps3.xml><?xml version="1.0" encoding="utf-8"?>
-<ds:datastoreItem xmlns:ds="http://schemas.openxmlformats.org/officeDocument/2006/customXml" ds:itemID="{9DC439CA-6F1C-4005-ACA6-A52E04DEE0A7}">
-  <ds:schemaRefs>
-    <ds:schemaRef ds:uri="http://schemas.microsoft.com/sharepoint/v3/contenttype/forms"/>
-  </ds:schemaRefs>
-</ds:datastoreItem>
 </file>